--- a/(6.25) 트리거 및 퀘스트 전개 도면.pptx
+++ b/(6.25) 트리거 및 퀘스트 전개 도면.pptx
@@ -5,7 +5,7 @@
     <p:sldMasterId id="2147483648" r:id="rId1"/>
   </p:sldMasterIdLst>
   <p:notesMasterIdLst>
-    <p:notesMasterId r:id="rId13"/>
+    <p:notesMasterId r:id="rId14"/>
   </p:notesMasterIdLst>
   <p:sldIdLst>
     <p:sldId id="257" r:id="rId2"/>
@@ -19,6 +19,7 @@
     <p:sldId id="265" r:id="rId10"/>
     <p:sldId id="266" r:id="rId11"/>
     <p:sldId id="256" r:id="rId12"/>
+    <p:sldId id="268" r:id="rId13"/>
   </p:sldIdLst>
   <p:sldSz cx="12192000" cy="6858000"/>
   <p:notesSz cx="6858000" cy="9144000"/>
@@ -6029,6 +6030,13 @@
   <p:clrMapOvr>
     <a:masterClrMapping/>
   </p:clrMapOvr>
+  <p:timing>
+    <p:tnLst>
+      <p:par>
+        <p:cTn id="1" dur="indefinite" restart="never" nodeType="tmRoot"/>
+      </p:par>
+    </p:tnLst>
+  </p:timing>
 </p:sld>
 </file>
 
@@ -6123,7 +6131,7 @@
           <a:lstStyle/>
           <a:p>
             <a:r>
-              <a:rPr lang="ko-KR" altLang="en-US" sz="2800" b="1" kern="0" spc="3" dirty="0">
+              <a:rPr lang="ko-KR" altLang="en-US" sz="2800" b="1" kern="0" spc="3" smtClean="0">
                 <a:solidFill>
                   <a:srgbClr val="FFFFFF"/>
                 </a:solidFill>
@@ -6131,7 +6139,7 @@
                 <a:ea typeface="Space Grotesk Bold" pitchFamily="34" charset="-122"/>
                 <a:cs typeface="Space Grotesk Bold" pitchFamily="34" charset="-120"/>
               </a:rPr>
-              <a:t>퀘스트 전개 도면</a:t>
+              <a:t>퀘스트</a:t>
             </a:r>
             <a:endParaRPr lang="en-US" sz="2800" dirty="0">
               <a:solidFill>
@@ -6149,7 +6157,7 @@
         </p:nvSpPr>
         <p:spPr>
           <a:xfrm>
-            <a:off x="933450" y="1309688"/>
+            <a:off x="627125" y="1309688"/>
             <a:ext cx="762000" cy="609600"/>
           </a:xfrm>
           <a:prstGeom prst="rect">
@@ -6174,7 +6182,7 @@
         </p:nvSpPr>
         <p:spPr>
           <a:xfrm>
-            <a:off x="1170385" y="1408510"/>
+            <a:off x="864060" y="1408510"/>
             <a:ext cx="278923" cy="102657"/>
           </a:xfrm>
           <a:prstGeom prst="rect">
@@ -6214,7 +6222,7 @@
         </p:nvSpPr>
         <p:spPr>
           <a:xfrm>
-            <a:off x="1166813" y="1529954"/>
+            <a:off x="860488" y="1529954"/>
             <a:ext cx="243656" cy="246221"/>
           </a:xfrm>
           <a:prstGeom prst="rect">
@@ -6252,8 +6260,8 @@
         </p:nvSpPr>
         <p:spPr>
           <a:xfrm>
-            <a:off x="1885951" y="1395295"/>
-            <a:ext cx="3733799" cy="438149"/>
+            <a:off x="1579626" y="1395295"/>
+            <a:ext cx="4144393" cy="438149"/>
           </a:xfrm>
           <a:prstGeom prst="rect">
             <a:avLst/>
@@ -6279,7 +6287,7 @@
         </p:nvSpPr>
         <p:spPr>
           <a:xfrm>
-            <a:off x="2000251" y="1515946"/>
+            <a:off x="1693926" y="1515946"/>
             <a:ext cx="1458733" cy="205121"/>
           </a:xfrm>
           <a:prstGeom prst="rect">
@@ -6317,7 +6325,7 @@
         </p:nvSpPr>
         <p:spPr>
           <a:xfrm>
-            <a:off x="4870876" y="1520310"/>
+            <a:off x="4949640" y="1520310"/>
             <a:ext cx="578644" cy="159544"/>
           </a:xfrm>
           <a:prstGeom prst="rect">
@@ -6337,8 +6345,325 @@
         </p:nvSpPr>
         <p:spPr>
           <a:xfrm>
-            <a:off x="4870876" y="1520310"/>
-            <a:ext cx="531812" cy="148482"/>
+            <a:off x="4949640" y="1520310"/>
+            <a:ext cx="575094" cy="148482"/>
+          </a:xfrm>
+          <a:prstGeom prst="rect">
+            <a:avLst/>
+          </a:prstGeom>
+          <a:noFill/>
+          <a:ln/>
+        </p:spPr>
+        <p:txBody>
+          <a:bodyPr wrap="none" lIns="68072" tIns="22691" rIns="68072" bIns="22691" rtlCol="0" anchor="t">
+            <a:spAutoFit/>
+          </a:bodyPr>
+          <a:lstStyle/>
+          <a:p>
+            <a:r>
+              <a:rPr lang="en-US" sz="667" b="1" smtClean="0">
+                <a:solidFill>
+                  <a:srgbClr val="001F3F"/>
+                </a:solidFill>
+                <a:latin typeface="Space Grotesk Bold" pitchFamily="34" charset="0"/>
+                <a:ea typeface="Space Grotesk Bold" pitchFamily="34" charset="-122"/>
+                <a:cs typeface="Space Grotesk Bold" pitchFamily="34" charset="-120"/>
+              </a:rPr>
+              <a:t>TUTORIAL</a:t>
+            </a:r>
+            <a:endParaRPr lang="en-US" sz="667" dirty="0"/>
+          </a:p>
+        </p:txBody>
+      </p:sp>
+      <p:sp>
+        <p:nvSpPr>
+          <p:cNvPr id="15" name="Shape 12"/>
+          <p:cNvSpPr/>
+          <p:nvPr/>
+        </p:nvSpPr>
+        <p:spPr>
+          <a:xfrm>
+            <a:off x="1579626" y="1954094"/>
+            <a:ext cx="1821656" cy="242888"/>
+          </a:xfrm>
+          <a:prstGeom prst="rect">
+            <a:avLst/>
+          </a:prstGeom>
+          <a:solidFill>
+            <a:srgbClr val="FFFFFF">
+              <a:alpha val="5000"/>
+            </a:srgbClr>
+          </a:solidFill>
+          <a:ln w="9144">
+            <a:solidFill>
+              <a:srgbClr val="A9AAB7">
+                <a:alpha val="50000"/>
+              </a:srgbClr>
+            </a:solidFill>
+            <a:prstDash val="dash"/>
+          </a:ln>
+        </p:spPr>
+      </p:sp>
+      <p:pic>
+        <p:nvPicPr>
+          <p:cNvPr id="16" name="Image 1" descr="preencoded.png"/>
+          <p:cNvPicPr>
+            <a:picLocks noChangeAspect="1"/>
+          </p:cNvPicPr>
+          <p:nvPr/>
+        </p:nvPicPr>
+        <p:blipFill>
+          <a:blip r:embed="rId3"/>
+          <a:stretch>
+            <a:fillRect/>
+          </a:stretch>
+        </p:blipFill>
+        <p:spPr>
+          <a:xfrm>
+            <a:off x="1655827" y="2037438"/>
+            <a:ext cx="107156" cy="95251"/>
+          </a:xfrm>
+          <a:prstGeom prst="rect">
+            <a:avLst/>
+          </a:prstGeom>
+        </p:spPr>
+      </p:pic>
+      <p:sp>
+        <p:nvSpPr>
+          <p:cNvPr id="17" name="Text 13"/>
+          <p:cNvSpPr/>
+          <p:nvPr/>
+        </p:nvSpPr>
+        <p:spPr>
+          <a:xfrm>
+            <a:off x="1820133" y="2011244"/>
+            <a:ext cx="1319272" cy="133434"/>
+          </a:xfrm>
+          <a:prstGeom prst="rect">
+            <a:avLst/>
+          </a:prstGeom>
+          <a:noFill/>
+          <a:ln/>
+        </p:spPr>
+        <p:txBody>
+          <a:bodyPr wrap="none" lIns="0" tIns="0" rIns="0" bIns="0" rtlCol="0" anchor="t">
+            <a:spAutoFit/>
+          </a:bodyPr>
+          <a:lstStyle/>
+          <a:p>
+            <a:r>
+              <a:rPr lang="en-US" sz="867" dirty="0">
+                <a:solidFill>
+                  <a:srgbClr val="FFFFFF"/>
+                </a:solidFill>
+                <a:latin typeface="Space Grotesk" pitchFamily="34" charset="0"/>
+                <a:ea typeface="Space Grotesk" pitchFamily="34" charset="-122"/>
+                <a:cs typeface="Space Grotesk" pitchFamily="34" charset="-120"/>
+              </a:rPr>
+              <a:t>기본 이동 및 상호작용 습득</a:t>
+            </a:r>
+            <a:endParaRPr lang="en-US" sz="867" dirty="0"/>
+          </a:p>
+        </p:txBody>
+      </p:sp>
+      <p:sp>
+        <p:nvSpPr>
+          <p:cNvPr id="18" name="Shape 14"/>
+          <p:cNvSpPr/>
+          <p:nvPr/>
+        </p:nvSpPr>
+        <p:spPr>
+          <a:xfrm>
+            <a:off x="627125" y="2381250"/>
+            <a:ext cx="762000" cy="609600"/>
+          </a:xfrm>
+          <a:prstGeom prst="rect">
+            <a:avLst/>
+          </a:prstGeom>
+          <a:solidFill>
+            <a:srgbClr val="001F3F"/>
+          </a:solidFill>
+          <a:ln w="18288">
+            <a:solidFill>
+              <a:srgbClr val="00D1FF"/>
+            </a:solidFill>
+            <a:prstDash val="solid"/>
+          </a:ln>
+        </p:spPr>
+      </p:sp>
+      <p:sp>
+        <p:nvSpPr>
+          <p:cNvPr id="19" name="Text 15"/>
+          <p:cNvSpPr/>
+          <p:nvPr/>
+        </p:nvSpPr>
+        <p:spPr>
+          <a:xfrm>
+            <a:off x="864060" y="2480073"/>
+            <a:ext cx="278923" cy="102657"/>
+          </a:xfrm>
+          <a:prstGeom prst="rect">
+            <a:avLst/>
+          </a:prstGeom>
+          <a:noFill/>
+          <a:ln/>
+        </p:spPr>
+        <p:txBody>
+          <a:bodyPr wrap="none" lIns="0" tIns="0" rIns="0" bIns="0" rtlCol="0" anchor="t">
+            <a:spAutoFit/>
+          </a:bodyPr>
+          <a:lstStyle/>
+          <a:p>
+            <a:r>
+              <a:rPr lang="en-US" sz="667" b="1" dirty="0">
+                <a:solidFill>
+                  <a:srgbClr val="FFFFFF">
+                    <a:alpha val="70000"/>
+                  </a:srgbClr>
+                </a:solidFill>
+                <a:latin typeface="Space Grotesk Bold" pitchFamily="34" charset="0"/>
+                <a:ea typeface="Space Grotesk Bold" pitchFamily="34" charset="-122"/>
+                <a:cs typeface="Space Grotesk Bold" pitchFamily="34" charset="-120"/>
+              </a:rPr>
+              <a:t>PHASE</a:t>
+            </a:r>
+            <a:endParaRPr lang="en-US" sz="667" dirty="0"/>
+          </a:p>
+        </p:txBody>
+      </p:sp>
+      <p:sp>
+        <p:nvSpPr>
+          <p:cNvPr id="20" name="Text 16"/>
+          <p:cNvSpPr/>
+          <p:nvPr/>
+        </p:nvSpPr>
+        <p:spPr>
+          <a:xfrm>
+            <a:off x="883109" y="2601516"/>
+            <a:ext cx="208390" cy="246221"/>
+          </a:xfrm>
+          <a:prstGeom prst="rect">
+            <a:avLst/>
+          </a:prstGeom>
+          <a:noFill/>
+          <a:ln/>
+        </p:spPr>
+        <p:txBody>
+          <a:bodyPr wrap="none" lIns="0" tIns="0" rIns="0" bIns="0" rtlCol="0" anchor="t">
+            <a:spAutoFit/>
+          </a:bodyPr>
+          <a:lstStyle/>
+          <a:p>
+            <a:r>
+              <a:rPr lang="en-US" sz="1600" b="1" dirty="0">
+                <a:solidFill>
+                  <a:srgbClr val="00D1FF"/>
+                </a:solidFill>
+                <a:latin typeface="Space Grotesk Bold" pitchFamily="34" charset="0"/>
+                <a:ea typeface="Space Grotesk Bold" pitchFamily="34" charset="-122"/>
+                <a:cs typeface="Space Grotesk Bold" pitchFamily="34" charset="-120"/>
+              </a:rPr>
+              <a:t>01</a:t>
+            </a:r>
+            <a:endParaRPr lang="en-US" sz="1600" dirty="0"/>
+          </a:p>
+        </p:txBody>
+      </p:sp>
+      <p:sp>
+        <p:nvSpPr>
+          <p:cNvPr id="21" name="Shape 17"/>
+          <p:cNvSpPr/>
+          <p:nvPr/>
+        </p:nvSpPr>
+        <p:spPr>
+          <a:xfrm>
+            <a:off x="1579626" y="2466857"/>
+            <a:ext cx="4144393" cy="438149"/>
+          </a:xfrm>
+          <a:prstGeom prst="rect">
+            <a:avLst/>
+          </a:prstGeom>
+          <a:solidFill>
+            <a:srgbClr val="003366">
+              <a:alpha val="60000"/>
+            </a:srgbClr>
+          </a:solidFill>
+          <a:ln w="9144">
+            <a:solidFill>
+              <a:srgbClr val="00D1FF"/>
+            </a:solidFill>
+            <a:prstDash val="solid"/>
+          </a:ln>
+        </p:spPr>
+      </p:sp>
+      <p:sp>
+        <p:nvSpPr>
+          <p:cNvPr id="22" name="Text 18"/>
+          <p:cNvSpPr/>
+          <p:nvPr/>
+        </p:nvSpPr>
+        <p:spPr>
+          <a:xfrm>
+            <a:off x="1693926" y="2587507"/>
+            <a:ext cx="900888" cy="205121"/>
+          </a:xfrm>
+          <a:prstGeom prst="rect">
+            <a:avLst/>
+          </a:prstGeom>
+          <a:noFill/>
+          <a:ln/>
+        </p:spPr>
+        <p:txBody>
+          <a:bodyPr wrap="none" lIns="0" tIns="0" rIns="0" bIns="0" rtlCol="0" anchor="t">
+            <a:spAutoFit/>
+          </a:bodyPr>
+          <a:lstStyle/>
+          <a:p>
+            <a:r>
+              <a:rPr lang="en-US" sz="1333" b="1" dirty="0">
+                <a:solidFill>
+                  <a:srgbClr val="FFFFFF"/>
+                </a:solidFill>
+                <a:latin typeface="Space Grotesk Bold" pitchFamily="34" charset="0"/>
+                <a:ea typeface="Space Grotesk Bold" pitchFamily="34" charset="-122"/>
+                <a:cs typeface="Space Grotesk Bold" pitchFamily="34" charset="-120"/>
+              </a:rPr>
+              <a:t>동생 심부름</a:t>
+            </a:r>
+            <a:endParaRPr lang="en-US" sz="1333" dirty="0"/>
+          </a:p>
+        </p:txBody>
+      </p:sp>
+      <p:sp>
+        <p:nvSpPr>
+          <p:cNvPr id="23" name="Shape 19"/>
+          <p:cNvSpPr/>
+          <p:nvPr/>
+        </p:nvSpPr>
+        <p:spPr>
+          <a:xfrm>
+            <a:off x="4828196" y="2591873"/>
+            <a:ext cx="700088" cy="159544"/>
+          </a:xfrm>
+          <a:prstGeom prst="rect">
+            <a:avLst/>
+          </a:prstGeom>
+          <a:solidFill>
+            <a:srgbClr val="00D1FF"/>
+          </a:solidFill>
+          <a:ln/>
+        </p:spPr>
+      </p:sp>
+      <p:sp>
+        <p:nvSpPr>
+          <p:cNvPr id="24" name="Text 20"/>
+          <p:cNvSpPr/>
+          <p:nvPr/>
+        </p:nvSpPr>
+        <p:spPr>
+          <a:xfrm>
+            <a:off x="4828196" y="2591873"/>
+            <a:ext cx="624786" cy="148482"/>
           </a:xfrm>
           <a:prstGeom prst="rect">
             <a:avLst/>
@@ -6361,7 +6686,7 @@
                 <a:ea typeface="Space Grotesk Bold" pitchFamily="34" charset="-122"/>
                 <a:cs typeface="Space Grotesk Bold" pitchFamily="34" charset="-120"/>
               </a:rPr>
-              <a:t>INITIATION</a:t>
+              <a:t>MAIN_QUEST</a:t>
             </a:r>
             <a:endParaRPr lang="en-US" sz="667" dirty="0"/>
           </a:p>
@@ -6369,14 +6694,14 @@
       </p:sp>
       <p:sp>
         <p:nvSpPr>
-          <p:cNvPr id="15" name="Shape 12"/>
-          <p:cNvSpPr/>
-          <p:nvPr/>
-        </p:nvSpPr>
-        <p:spPr>
-          <a:xfrm>
-            <a:off x="5908264" y="1488379"/>
-            <a:ext cx="1821656" cy="242888"/>
+          <p:cNvPr id="25" name="Shape 21"/>
+          <p:cNvSpPr/>
+          <p:nvPr/>
+        </p:nvSpPr>
+        <p:spPr>
+          <a:xfrm>
+            <a:off x="1579626" y="2987520"/>
+            <a:ext cx="1183481" cy="242888"/>
           </a:xfrm>
           <a:prstGeom prst="rect">
             <a:avLst/>
@@ -6398,22 +6723,22 @@
       </p:sp>
       <p:pic>
         <p:nvPicPr>
-          <p:cNvPr id="16" name="Image 1" descr="preencoded.png"/>
+          <p:cNvPr id="26" name="Image 2" descr="preencoded.png"/>
           <p:cNvPicPr>
             <a:picLocks noChangeAspect="1"/>
           </p:cNvPicPr>
           <p:nvPr/>
         </p:nvPicPr>
         <p:blipFill>
-          <a:blip r:embed="rId3"/>
+          <a:blip r:embed="rId4"/>
           <a:stretch>
             <a:fillRect/>
           </a:stretch>
         </p:blipFill>
         <p:spPr>
           <a:xfrm>
-            <a:off x="5984465" y="1552673"/>
-            <a:ext cx="107156" cy="95251"/>
+            <a:off x="1655825" y="3070864"/>
+            <a:ext cx="83344" cy="95251"/>
           </a:xfrm>
           <a:prstGeom prst="rect">
             <a:avLst/>
@@ -6422,14 +6747,14 @@
       </p:pic>
       <p:sp>
         <p:nvSpPr>
-          <p:cNvPr id="17" name="Text 13"/>
-          <p:cNvSpPr/>
-          <p:nvPr/>
-        </p:nvSpPr>
-        <p:spPr>
-          <a:xfrm>
-            <a:off x="6148771" y="1516954"/>
-            <a:ext cx="1319272" cy="133434"/>
+          <p:cNvPr id="27" name="Text 22"/>
+          <p:cNvSpPr/>
+          <p:nvPr/>
+        </p:nvSpPr>
+        <p:spPr>
+          <a:xfrm>
+            <a:off x="1796319" y="3044670"/>
+            <a:ext cx="787075" cy="133434"/>
           </a:xfrm>
           <a:prstGeom prst="rect">
             <a:avLst/>
@@ -6452,7 +6777,7 @@
                 <a:ea typeface="Space Grotesk" pitchFamily="34" charset="-122"/>
                 <a:cs typeface="Space Grotesk" pitchFamily="34" charset="-120"/>
               </a:rPr>
-              <a:t>기본 이동 및 상호작용 습득</a:t>
+              <a:t>SQ: 치킨 심부름</a:t>
             </a:r>
             <a:endParaRPr lang="en-US" sz="867" dirty="0"/>
           </a:p>
@@ -6460,13 +6785,13 @@
       </p:sp>
       <p:sp>
         <p:nvSpPr>
-          <p:cNvPr id="18" name="Shape 14"/>
-          <p:cNvSpPr/>
-          <p:nvPr/>
-        </p:nvSpPr>
-        <p:spPr>
-          <a:xfrm>
-            <a:off x="933450" y="2381250"/>
+          <p:cNvPr id="28" name="Shape 23"/>
+          <p:cNvSpPr/>
+          <p:nvPr/>
+        </p:nvSpPr>
+        <p:spPr>
+          <a:xfrm>
+            <a:off x="627125" y="3457696"/>
             <a:ext cx="762000" cy="609600"/>
           </a:xfrm>
           <a:prstGeom prst="rect">
@@ -6485,14 +6810,14 @@
       </p:sp>
       <p:sp>
         <p:nvSpPr>
-          <p:cNvPr id="19" name="Text 15"/>
-          <p:cNvSpPr/>
-          <p:nvPr/>
-        </p:nvSpPr>
-        <p:spPr>
-          <a:xfrm>
-            <a:off x="1170385" y="2480073"/>
-            <a:ext cx="278923" cy="102657"/>
+          <p:cNvPr id="29" name="Text 24"/>
+          <p:cNvSpPr/>
+          <p:nvPr/>
+        </p:nvSpPr>
+        <p:spPr>
+          <a:xfrm>
+            <a:off x="864060" y="3556518"/>
+            <a:ext cx="232436" cy="102657"/>
           </a:xfrm>
           <a:prstGeom prst="rect">
             <a:avLst/>
@@ -6525,13 +6850,13 @@
       </p:sp>
       <p:sp>
         <p:nvSpPr>
-          <p:cNvPr id="20" name="Text 16"/>
-          <p:cNvSpPr/>
-          <p:nvPr/>
-        </p:nvSpPr>
-        <p:spPr>
-          <a:xfrm>
-            <a:off x="1189434" y="2601516"/>
+          <p:cNvPr id="30" name="Text 25"/>
+          <p:cNvSpPr/>
+          <p:nvPr/>
+        </p:nvSpPr>
+        <p:spPr>
+          <a:xfrm>
+            <a:off x="866441" y="3677962"/>
             <a:ext cx="208390" cy="246221"/>
           </a:xfrm>
           <a:prstGeom prst="rect">
@@ -6555,7 +6880,7 @@
                 <a:ea typeface="Space Grotesk Bold" pitchFamily="34" charset="-122"/>
                 <a:cs typeface="Space Grotesk Bold" pitchFamily="34" charset="-120"/>
               </a:rPr>
-              <a:t>01</a:t>
+              <a:t>02</a:t>
             </a:r>
             <a:endParaRPr lang="en-US" sz="1600" dirty="0"/>
           </a:p>
@@ -6563,14 +6888,14 @@
       </p:sp>
       <p:sp>
         <p:nvSpPr>
-          <p:cNvPr id="21" name="Shape 17"/>
-          <p:cNvSpPr/>
-          <p:nvPr/>
-        </p:nvSpPr>
-        <p:spPr>
-          <a:xfrm>
-            <a:off x="1885951" y="2466857"/>
-            <a:ext cx="3733799" cy="438149"/>
+          <p:cNvPr id="31" name="Shape 26"/>
+          <p:cNvSpPr/>
+          <p:nvPr/>
+        </p:nvSpPr>
+        <p:spPr>
+          <a:xfrm>
+            <a:off x="1579626" y="3543303"/>
+            <a:ext cx="4144393" cy="438149"/>
           </a:xfrm>
           <a:prstGeom prst="rect">
             <a:avLst/>
@@ -6590,14 +6915,14 @@
       </p:sp>
       <p:sp>
         <p:nvSpPr>
-          <p:cNvPr id="22" name="Text 18"/>
-          <p:cNvSpPr/>
-          <p:nvPr/>
-        </p:nvSpPr>
-        <p:spPr>
-          <a:xfrm>
-            <a:off x="2000251" y="2587507"/>
-            <a:ext cx="900888" cy="205121"/>
+          <p:cNvPr id="32" name="Text 27"/>
+          <p:cNvSpPr/>
+          <p:nvPr/>
+        </p:nvSpPr>
+        <p:spPr>
+          <a:xfrm>
+            <a:off x="1693926" y="3663953"/>
+            <a:ext cx="729367" cy="205121"/>
           </a:xfrm>
           <a:prstGeom prst="rect">
             <a:avLst/>
@@ -6620,7 +6945,7 @@
                 <a:ea typeface="Space Grotesk Bold" pitchFamily="34" charset="-122"/>
                 <a:cs typeface="Space Grotesk Bold" pitchFamily="34" charset="-120"/>
               </a:rPr>
-              <a:t>동생 심부름</a:t>
+              <a:t>공원 청소</a:t>
             </a:r>
             <a:endParaRPr lang="en-US" sz="1333" dirty="0"/>
           </a:p>
@@ -6628,13 +6953,13 @@
       </p:sp>
       <p:sp>
         <p:nvSpPr>
-          <p:cNvPr id="23" name="Shape 19"/>
-          <p:cNvSpPr/>
-          <p:nvPr/>
-        </p:nvSpPr>
-        <p:spPr>
-          <a:xfrm>
-            <a:off x="4749432" y="2591873"/>
+          <p:cNvPr id="33" name="Shape 28"/>
+          <p:cNvSpPr/>
+          <p:nvPr/>
+        </p:nvSpPr>
+        <p:spPr>
+          <a:xfrm>
+            <a:off x="4828196" y="3668319"/>
             <a:ext cx="700088" cy="159544"/>
           </a:xfrm>
           <a:prstGeom prst="rect">
@@ -6648,13 +6973,13 @@
       </p:sp>
       <p:sp>
         <p:nvSpPr>
-          <p:cNvPr id="24" name="Text 20"/>
-          <p:cNvSpPr/>
-          <p:nvPr/>
-        </p:nvSpPr>
-        <p:spPr>
-          <a:xfrm>
-            <a:off x="4749432" y="2591873"/>
+          <p:cNvPr id="34" name="Text 29"/>
+          <p:cNvSpPr/>
+          <p:nvPr/>
+        </p:nvSpPr>
+        <p:spPr>
+          <a:xfrm>
+            <a:off x="4828196" y="3668319"/>
             <a:ext cx="624786" cy="148482"/>
           </a:xfrm>
           <a:prstGeom prst="rect">
@@ -6686,14 +7011,14 @@
       </p:sp>
       <p:sp>
         <p:nvSpPr>
-          <p:cNvPr id="25" name="Shape 21"/>
-          <p:cNvSpPr/>
-          <p:nvPr/>
-        </p:nvSpPr>
-        <p:spPr>
-          <a:xfrm>
-            <a:off x="5908264" y="2556849"/>
-            <a:ext cx="1183481" cy="242888"/>
+          <p:cNvPr id="35" name="Shape 30"/>
+          <p:cNvSpPr/>
+          <p:nvPr/>
+        </p:nvSpPr>
+        <p:spPr>
+          <a:xfrm>
+            <a:off x="1579626" y="4065539"/>
+            <a:ext cx="1585912" cy="242888"/>
           </a:xfrm>
           <a:prstGeom prst="rect">
             <a:avLst/>
@@ -6715,21 +7040,21 @@
       </p:sp>
       <p:pic>
         <p:nvPicPr>
-          <p:cNvPr id="26" name="Image 2" descr="preencoded.png"/>
+          <p:cNvPr id="36" name="Image 3" descr="preencoded.png"/>
           <p:cNvPicPr>
             <a:picLocks noChangeAspect="1"/>
           </p:cNvPicPr>
           <p:nvPr/>
         </p:nvPicPr>
         <p:blipFill>
-          <a:blip r:embed="rId4"/>
+          <a:blip r:embed="rId5"/>
           <a:stretch>
             <a:fillRect/>
           </a:stretch>
         </p:blipFill>
         <p:spPr>
           <a:xfrm>
-            <a:off x="5984463" y="2621143"/>
+            <a:off x="1655826" y="4158408"/>
             <a:ext cx="83344" cy="95251"/>
           </a:xfrm>
           <a:prstGeom prst="rect">
@@ -6739,14 +7064,14 @@
       </p:pic>
       <p:sp>
         <p:nvSpPr>
-          <p:cNvPr id="27" name="Text 22"/>
-          <p:cNvSpPr/>
-          <p:nvPr/>
-        </p:nvSpPr>
-        <p:spPr>
-          <a:xfrm>
-            <a:off x="6124957" y="2585424"/>
-            <a:ext cx="787075" cy="133434"/>
+          <p:cNvPr id="37" name="Text 31"/>
+          <p:cNvSpPr/>
+          <p:nvPr/>
+        </p:nvSpPr>
+        <p:spPr>
+          <a:xfrm>
+            <a:off x="1796320" y="4132214"/>
+            <a:ext cx="1146148" cy="133434"/>
           </a:xfrm>
           <a:prstGeom prst="rect">
             <a:avLst/>
@@ -6769,7 +7094,7 @@
                 <a:ea typeface="Space Grotesk" pitchFamily="34" charset="-122"/>
                 <a:cs typeface="Space Grotesk" pitchFamily="34" charset="-120"/>
               </a:rPr>
-              <a:t>SQ: 치킨 심부름</a:t>
+              <a:t>SQ: 우정 반지 찾아주기</a:t>
             </a:r>
             <a:endParaRPr lang="en-US" sz="867" dirty="0"/>
           </a:p>
@@ -6777,240 +7102,14 @@
       </p:sp>
       <p:sp>
         <p:nvSpPr>
-          <p:cNvPr id="28" name="Shape 23"/>
-          <p:cNvSpPr/>
-          <p:nvPr/>
-        </p:nvSpPr>
-        <p:spPr>
-          <a:xfrm>
-            <a:off x="933450" y="3457696"/>
-            <a:ext cx="762000" cy="609600"/>
-          </a:xfrm>
-          <a:prstGeom prst="rect">
-            <a:avLst/>
-          </a:prstGeom>
-          <a:solidFill>
-            <a:srgbClr val="001F3F"/>
-          </a:solidFill>
-          <a:ln w="18288">
-            <a:solidFill>
-              <a:srgbClr val="00D1FF"/>
-            </a:solidFill>
-            <a:prstDash val="solid"/>
-          </a:ln>
-        </p:spPr>
-      </p:sp>
-      <p:sp>
-        <p:nvSpPr>
-          <p:cNvPr id="29" name="Text 24"/>
-          <p:cNvSpPr/>
-          <p:nvPr/>
-        </p:nvSpPr>
-        <p:spPr>
-          <a:xfrm>
-            <a:off x="1170385" y="3556518"/>
-            <a:ext cx="232436" cy="102657"/>
-          </a:xfrm>
-          <a:prstGeom prst="rect">
-            <a:avLst/>
-          </a:prstGeom>
-          <a:noFill/>
-          <a:ln/>
-        </p:spPr>
-        <p:txBody>
-          <a:bodyPr wrap="none" lIns="0" tIns="0" rIns="0" bIns="0" rtlCol="0" anchor="t">
-            <a:spAutoFit/>
-          </a:bodyPr>
-          <a:lstStyle/>
-          <a:p>
-            <a:r>
-              <a:rPr lang="en-US" sz="667" b="1" dirty="0">
-                <a:solidFill>
-                  <a:srgbClr val="FFFFFF">
-                    <a:alpha val="70000"/>
-                  </a:srgbClr>
-                </a:solidFill>
-                <a:latin typeface="Space Grotesk Bold" pitchFamily="34" charset="0"/>
-                <a:ea typeface="Space Grotesk Bold" pitchFamily="34" charset="-122"/>
-                <a:cs typeface="Space Grotesk Bold" pitchFamily="34" charset="-120"/>
-              </a:rPr>
-              <a:t>PHASE</a:t>
-            </a:r>
-            <a:endParaRPr lang="en-US" sz="667" dirty="0"/>
-          </a:p>
-        </p:txBody>
-      </p:sp>
-      <p:sp>
-        <p:nvSpPr>
-          <p:cNvPr id="30" name="Text 25"/>
-          <p:cNvSpPr/>
-          <p:nvPr/>
-        </p:nvSpPr>
-        <p:spPr>
-          <a:xfrm>
-            <a:off x="1172766" y="3677962"/>
-            <a:ext cx="208390" cy="246221"/>
-          </a:xfrm>
-          <a:prstGeom prst="rect">
-            <a:avLst/>
-          </a:prstGeom>
-          <a:noFill/>
-          <a:ln/>
-        </p:spPr>
-        <p:txBody>
-          <a:bodyPr wrap="none" lIns="0" tIns="0" rIns="0" bIns="0" rtlCol="0" anchor="t">
-            <a:spAutoFit/>
-          </a:bodyPr>
-          <a:lstStyle/>
-          <a:p>
-            <a:r>
-              <a:rPr lang="en-US" sz="1600" b="1" dirty="0">
-                <a:solidFill>
-                  <a:srgbClr val="00D1FF"/>
-                </a:solidFill>
-                <a:latin typeface="Space Grotesk Bold" pitchFamily="34" charset="0"/>
-                <a:ea typeface="Space Grotesk Bold" pitchFamily="34" charset="-122"/>
-                <a:cs typeface="Space Grotesk Bold" pitchFamily="34" charset="-120"/>
-              </a:rPr>
-              <a:t>02</a:t>
-            </a:r>
-            <a:endParaRPr lang="en-US" sz="1600" dirty="0"/>
-          </a:p>
-        </p:txBody>
-      </p:sp>
-      <p:sp>
-        <p:nvSpPr>
-          <p:cNvPr id="31" name="Shape 26"/>
-          <p:cNvSpPr/>
-          <p:nvPr/>
-        </p:nvSpPr>
-        <p:spPr>
-          <a:xfrm>
-            <a:off x="1885951" y="3543303"/>
-            <a:ext cx="3733799" cy="438149"/>
-          </a:xfrm>
-          <a:prstGeom prst="rect">
-            <a:avLst/>
-          </a:prstGeom>
-          <a:solidFill>
-            <a:srgbClr val="003366">
-              <a:alpha val="60000"/>
-            </a:srgbClr>
-          </a:solidFill>
-          <a:ln w="9144">
-            <a:solidFill>
-              <a:srgbClr val="00D1FF"/>
-            </a:solidFill>
-            <a:prstDash val="solid"/>
-          </a:ln>
-        </p:spPr>
-      </p:sp>
-      <p:sp>
-        <p:nvSpPr>
-          <p:cNvPr id="32" name="Text 27"/>
-          <p:cNvSpPr/>
-          <p:nvPr/>
-        </p:nvSpPr>
-        <p:spPr>
-          <a:xfrm>
-            <a:off x="2000251" y="3663953"/>
-            <a:ext cx="729367" cy="205121"/>
-          </a:xfrm>
-          <a:prstGeom prst="rect">
-            <a:avLst/>
-          </a:prstGeom>
-          <a:noFill/>
-          <a:ln/>
-        </p:spPr>
-        <p:txBody>
-          <a:bodyPr wrap="none" lIns="0" tIns="0" rIns="0" bIns="0" rtlCol="0" anchor="t">
-            <a:spAutoFit/>
-          </a:bodyPr>
-          <a:lstStyle/>
-          <a:p>
-            <a:r>
-              <a:rPr lang="en-US" sz="1333" b="1" dirty="0">
-                <a:solidFill>
-                  <a:srgbClr val="FFFFFF"/>
-                </a:solidFill>
-                <a:latin typeface="Space Grotesk Bold" pitchFamily="34" charset="0"/>
-                <a:ea typeface="Space Grotesk Bold" pitchFamily="34" charset="-122"/>
-                <a:cs typeface="Space Grotesk Bold" pitchFamily="34" charset="-120"/>
-              </a:rPr>
-              <a:t>공원 청소</a:t>
-            </a:r>
-            <a:endParaRPr lang="en-US" sz="1333" dirty="0"/>
-          </a:p>
-        </p:txBody>
-      </p:sp>
-      <p:sp>
-        <p:nvSpPr>
-          <p:cNvPr id="33" name="Shape 28"/>
-          <p:cNvSpPr/>
-          <p:nvPr/>
-        </p:nvSpPr>
-        <p:spPr>
-          <a:xfrm>
-            <a:off x="4749432" y="3668319"/>
-            <a:ext cx="700088" cy="159544"/>
-          </a:xfrm>
-          <a:prstGeom prst="rect">
-            <a:avLst/>
-          </a:prstGeom>
-          <a:solidFill>
-            <a:srgbClr val="00D1FF"/>
-          </a:solidFill>
-          <a:ln/>
-        </p:spPr>
-      </p:sp>
-      <p:sp>
-        <p:nvSpPr>
-          <p:cNvPr id="34" name="Text 29"/>
-          <p:cNvSpPr/>
-          <p:nvPr/>
-        </p:nvSpPr>
-        <p:spPr>
-          <a:xfrm>
-            <a:off x="4749432" y="3668319"/>
-            <a:ext cx="624786" cy="148482"/>
-          </a:xfrm>
-          <a:prstGeom prst="rect">
-            <a:avLst/>
-          </a:prstGeom>
-          <a:noFill/>
-          <a:ln/>
-        </p:spPr>
-        <p:txBody>
-          <a:bodyPr wrap="none" lIns="68072" tIns="22691" rIns="68072" bIns="22691" rtlCol="0" anchor="t">
-            <a:spAutoFit/>
-          </a:bodyPr>
-          <a:lstStyle/>
-          <a:p>
-            <a:r>
-              <a:rPr lang="en-US" sz="667" b="1" dirty="0">
-                <a:solidFill>
-                  <a:srgbClr val="001F3F"/>
-                </a:solidFill>
-                <a:latin typeface="Space Grotesk Bold" pitchFamily="34" charset="0"/>
-                <a:ea typeface="Space Grotesk Bold" pitchFamily="34" charset="-122"/>
-                <a:cs typeface="Space Grotesk Bold" pitchFamily="34" charset="-120"/>
-              </a:rPr>
-              <a:t>MAIN_QUEST</a:t>
-            </a:r>
-            <a:endParaRPr lang="en-US" sz="667" dirty="0"/>
-          </a:p>
-        </p:txBody>
-      </p:sp>
-      <p:sp>
-        <p:nvSpPr>
-          <p:cNvPr id="35" name="Shape 30"/>
-          <p:cNvSpPr/>
-          <p:nvPr/>
-        </p:nvSpPr>
-        <p:spPr>
-          <a:xfrm>
-            <a:off x="5908264" y="3623132"/>
-            <a:ext cx="1585912" cy="242888"/>
+          <p:cNvPr id="38" name="Shape 32"/>
+          <p:cNvSpPr/>
+          <p:nvPr/>
+        </p:nvSpPr>
+        <p:spPr>
+          <a:xfrm>
+            <a:off x="3241738" y="4065539"/>
+            <a:ext cx="1493044" cy="242888"/>
           </a:xfrm>
           <a:prstGeom prst="rect">
             <a:avLst/>
@@ -7032,21 +7131,21 @@
       </p:sp>
       <p:pic>
         <p:nvPicPr>
-          <p:cNvPr id="36" name="Image 3" descr="preencoded.png"/>
+          <p:cNvPr id="39" name="Image 4" descr="preencoded.png"/>
           <p:cNvPicPr>
             <a:picLocks noChangeAspect="1"/>
           </p:cNvPicPr>
           <p:nvPr/>
         </p:nvPicPr>
         <p:blipFill>
-          <a:blip r:embed="rId5"/>
+          <a:blip r:embed="rId6"/>
           <a:stretch>
             <a:fillRect/>
           </a:stretch>
         </p:blipFill>
         <p:spPr>
           <a:xfrm>
-            <a:off x="5984464" y="3696951"/>
+            <a:off x="3317938" y="4148884"/>
             <a:ext cx="83344" cy="95251"/>
           </a:xfrm>
           <a:prstGeom prst="rect">
@@ -7056,14 +7155,14 @@
       </p:pic>
       <p:sp>
         <p:nvSpPr>
-          <p:cNvPr id="37" name="Text 31"/>
-          <p:cNvSpPr/>
-          <p:nvPr/>
-        </p:nvSpPr>
-        <p:spPr>
-          <a:xfrm>
-            <a:off x="6124958" y="3661232"/>
-            <a:ext cx="1146148" cy="133434"/>
+          <p:cNvPr id="40" name="Text 33"/>
+          <p:cNvSpPr/>
+          <p:nvPr/>
+        </p:nvSpPr>
+        <p:spPr>
+          <a:xfrm>
+            <a:off x="3458432" y="4122690"/>
+            <a:ext cx="1062791" cy="133434"/>
           </a:xfrm>
           <a:prstGeom prst="rect">
             <a:avLst/>
@@ -7086,7 +7185,7 @@
                 <a:ea typeface="Space Grotesk" pitchFamily="34" charset="-122"/>
                 <a:cs typeface="Space Grotesk" pitchFamily="34" charset="-120"/>
               </a:rPr>
-              <a:t>SQ: 우정 반지 찾아주기</a:t>
+              <a:t>SQ: 균열 앞 커플 사진</a:t>
             </a:r>
             <a:endParaRPr lang="en-US" sz="867" dirty="0"/>
           </a:p>
@@ -7094,14 +7193,262 @@
       </p:sp>
       <p:sp>
         <p:nvSpPr>
-          <p:cNvPr id="38" name="Shape 32"/>
-          <p:cNvSpPr/>
-          <p:nvPr/>
-        </p:nvSpPr>
-        <p:spPr>
-          <a:xfrm>
-            <a:off x="7882280" y="3623132"/>
-            <a:ext cx="1493044" cy="242888"/>
+          <p:cNvPr id="41" name="Shape 34"/>
+          <p:cNvSpPr/>
+          <p:nvPr/>
+        </p:nvSpPr>
+        <p:spPr>
+          <a:xfrm>
+            <a:off x="1579626" y="4619746"/>
+            <a:ext cx="3733799" cy="438151"/>
+          </a:xfrm>
+          <a:prstGeom prst="rect">
+            <a:avLst/>
+          </a:prstGeom>
+          <a:solidFill>
+            <a:srgbClr val="FF4136">
+              <a:alpha val="10000"/>
+            </a:srgbClr>
+          </a:solidFill>
+          <a:ln/>
+        </p:spPr>
+      </p:sp>
+      <p:sp>
+        <p:nvSpPr>
+          <p:cNvPr id="42" name="Shape 35"/>
+          <p:cNvSpPr/>
+          <p:nvPr/>
+        </p:nvSpPr>
+        <p:spPr>
+          <a:xfrm>
+            <a:off x="627125" y="4534142"/>
+            <a:ext cx="762000" cy="609600"/>
+          </a:xfrm>
+          <a:prstGeom prst="rect">
+            <a:avLst/>
+          </a:prstGeom>
+          <a:solidFill>
+            <a:srgbClr val="001F3F"/>
+          </a:solidFill>
+          <a:ln w="18288">
+            <a:solidFill>
+              <a:srgbClr val="FF4136"/>
+            </a:solidFill>
+            <a:prstDash val="solid"/>
+          </a:ln>
+        </p:spPr>
+      </p:sp>
+      <p:sp>
+        <p:nvSpPr>
+          <p:cNvPr id="43" name="Text 36"/>
+          <p:cNvSpPr/>
+          <p:nvPr/>
+        </p:nvSpPr>
+        <p:spPr>
+          <a:xfrm>
+            <a:off x="864060" y="4632964"/>
+            <a:ext cx="232436" cy="102657"/>
+          </a:xfrm>
+          <a:prstGeom prst="rect">
+            <a:avLst/>
+          </a:prstGeom>
+          <a:noFill/>
+          <a:ln/>
+        </p:spPr>
+        <p:txBody>
+          <a:bodyPr wrap="none" lIns="0" tIns="0" rIns="0" bIns="0" rtlCol="0" anchor="t">
+            <a:spAutoFit/>
+          </a:bodyPr>
+          <a:lstStyle/>
+          <a:p>
+            <a:r>
+              <a:rPr lang="en-US" sz="667" b="1" dirty="0">
+                <a:solidFill>
+                  <a:srgbClr val="FFFFFF">
+                    <a:alpha val="70000"/>
+                  </a:srgbClr>
+                </a:solidFill>
+                <a:latin typeface="Space Grotesk Bold" pitchFamily="34" charset="0"/>
+                <a:ea typeface="Space Grotesk Bold" pitchFamily="34" charset="-122"/>
+                <a:cs typeface="Space Grotesk Bold" pitchFamily="34" charset="-120"/>
+              </a:rPr>
+              <a:t>PHASE</a:t>
+            </a:r>
+            <a:endParaRPr lang="en-US" sz="667" dirty="0"/>
+          </a:p>
+        </p:txBody>
+      </p:sp>
+      <p:sp>
+        <p:nvSpPr>
+          <p:cNvPr id="44" name="Text 37"/>
+          <p:cNvSpPr/>
+          <p:nvPr/>
+        </p:nvSpPr>
+        <p:spPr>
+          <a:xfrm>
+            <a:off x="865251" y="4754408"/>
+            <a:ext cx="243656" cy="246221"/>
+          </a:xfrm>
+          <a:prstGeom prst="rect">
+            <a:avLst/>
+          </a:prstGeom>
+          <a:noFill/>
+          <a:ln/>
+        </p:spPr>
+        <p:txBody>
+          <a:bodyPr wrap="none" lIns="0" tIns="0" rIns="0" bIns="0" rtlCol="0" anchor="t">
+            <a:spAutoFit/>
+          </a:bodyPr>
+          <a:lstStyle/>
+          <a:p>
+            <a:r>
+              <a:rPr lang="en-US" sz="1600" b="1" dirty="0">
+                <a:solidFill>
+                  <a:srgbClr val="FF4136"/>
+                </a:solidFill>
+                <a:latin typeface="Space Grotesk Bold" pitchFamily="34" charset="0"/>
+                <a:ea typeface="Space Grotesk Bold" pitchFamily="34" charset="-122"/>
+                <a:cs typeface="Space Grotesk Bold" pitchFamily="34" charset="-120"/>
+              </a:rPr>
+              <a:t>03</a:t>
+            </a:r>
+            <a:endParaRPr lang="en-US" sz="1600" dirty="0"/>
+          </a:p>
+        </p:txBody>
+      </p:sp>
+      <p:sp>
+        <p:nvSpPr>
+          <p:cNvPr id="45" name="Shape 38"/>
+          <p:cNvSpPr/>
+          <p:nvPr/>
+        </p:nvSpPr>
+        <p:spPr>
+          <a:xfrm>
+            <a:off x="1579626" y="4619749"/>
+            <a:ext cx="4144393" cy="438149"/>
+          </a:xfrm>
+          <a:prstGeom prst="rect">
+            <a:avLst/>
+          </a:prstGeom>
+          <a:solidFill>
+            <a:srgbClr val="003366">
+              <a:alpha val="60000"/>
+            </a:srgbClr>
+          </a:solidFill>
+          <a:ln w="9144">
+            <a:solidFill>
+              <a:srgbClr val="00D1FF"/>
+            </a:solidFill>
+            <a:prstDash val="solid"/>
+          </a:ln>
+        </p:spPr>
+      </p:sp>
+      <p:sp>
+        <p:nvSpPr>
+          <p:cNvPr id="46" name="Text 39"/>
+          <p:cNvSpPr/>
+          <p:nvPr/>
+        </p:nvSpPr>
+        <p:spPr>
+          <a:xfrm>
+            <a:off x="1693925" y="4740399"/>
+            <a:ext cx="2436019" cy="205121"/>
+          </a:xfrm>
+          <a:prstGeom prst="rect">
+            <a:avLst/>
+          </a:prstGeom>
+          <a:noFill/>
+          <a:ln/>
+        </p:spPr>
+        <p:txBody>
+          <a:bodyPr wrap="square" lIns="0" tIns="0" rIns="0" bIns="0" rtlCol="0" anchor="t">
+            <a:spAutoFit/>
+          </a:bodyPr>
+          <a:lstStyle/>
+          <a:p>
+            <a:r>
+              <a:rPr lang="en-US" sz="1333" b="1" dirty="0">
+                <a:solidFill>
+                  <a:srgbClr val="FF4136"/>
+                </a:solidFill>
+                <a:latin typeface="Space Grotesk Bold" pitchFamily="34" charset="0"/>
+                <a:ea typeface="Space Grotesk Bold" pitchFamily="34" charset="-122"/>
+                <a:cs typeface="Space Grotesk Bold" pitchFamily="34" charset="-120"/>
+              </a:rPr>
+              <a:t>재난 대응 (첫 전투 튜토리얼)</a:t>
+            </a:r>
+            <a:endParaRPr lang="en-US" sz="1333" dirty="0"/>
+          </a:p>
+        </p:txBody>
+      </p:sp>
+      <p:sp>
+        <p:nvSpPr>
+          <p:cNvPr id="47" name="Shape 40"/>
+          <p:cNvSpPr/>
+          <p:nvPr/>
+        </p:nvSpPr>
+        <p:spPr>
+          <a:xfrm>
+            <a:off x="5143741" y="4744763"/>
+            <a:ext cx="384543" cy="159544"/>
+          </a:xfrm>
+          <a:prstGeom prst="rect">
+            <a:avLst/>
+          </a:prstGeom>
+          <a:solidFill>
+            <a:srgbClr val="FF4136"/>
+          </a:solidFill>
+          <a:ln/>
+        </p:spPr>
+      </p:sp>
+      <p:sp>
+        <p:nvSpPr>
+          <p:cNvPr id="48" name="Text 41"/>
+          <p:cNvSpPr/>
+          <p:nvPr/>
+        </p:nvSpPr>
+        <p:spPr>
+          <a:xfrm>
+            <a:off x="5143741" y="4744764"/>
+            <a:ext cx="382733" cy="148482"/>
+          </a:xfrm>
+          <a:prstGeom prst="rect">
+            <a:avLst/>
+          </a:prstGeom>
+          <a:noFill/>
+          <a:ln/>
+        </p:spPr>
+        <p:txBody>
+          <a:bodyPr wrap="none" lIns="68072" tIns="22691" rIns="68072" bIns="22691" rtlCol="0" anchor="t">
+            <a:spAutoFit/>
+          </a:bodyPr>
+          <a:lstStyle/>
+          <a:p>
+            <a:r>
+              <a:rPr lang="en-US" sz="667" b="1" smtClean="0">
+                <a:solidFill>
+                  <a:srgbClr val="FFFFFF"/>
+                </a:solidFill>
+                <a:latin typeface="Space Grotesk Bold" pitchFamily="34" charset="0"/>
+                <a:ea typeface="Space Grotesk Bold" pitchFamily="34" charset="-122"/>
+                <a:cs typeface="Space Grotesk Bold" pitchFamily="34" charset="-120"/>
+              </a:rPr>
+              <a:t>BOSS</a:t>
+            </a:r>
+            <a:endParaRPr lang="en-US" sz="667" dirty="0"/>
+          </a:p>
+        </p:txBody>
+      </p:sp>
+      <p:sp>
+        <p:nvSpPr>
+          <p:cNvPr id="49" name="Shape 42"/>
+          <p:cNvSpPr/>
+          <p:nvPr/>
+        </p:nvSpPr>
+        <p:spPr>
+          <a:xfrm>
+            <a:off x="1579626" y="5147738"/>
+            <a:ext cx="1111833" cy="242888"/>
           </a:xfrm>
           <a:prstGeom prst="rect">
             <a:avLst/>
@@ -7123,22 +7470,22 @@
       </p:sp>
       <p:pic>
         <p:nvPicPr>
-          <p:cNvPr id="39" name="Image 4" descr="preencoded.png"/>
+          <p:cNvPr id="50" name="Image 5" descr="preencoded.png"/>
           <p:cNvPicPr>
             <a:picLocks noChangeAspect="1"/>
           </p:cNvPicPr>
           <p:nvPr/>
         </p:nvPicPr>
         <p:blipFill>
-          <a:blip r:embed="rId6"/>
+          <a:blip r:embed="rId7"/>
           <a:stretch>
             <a:fillRect/>
           </a:stretch>
         </p:blipFill>
         <p:spPr>
           <a:xfrm>
-            <a:off x="7958480" y="3687427"/>
-            <a:ext cx="83344" cy="95251"/>
+            <a:off x="1655825" y="5240607"/>
+            <a:ext cx="95251" cy="95251"/>
           </a:xfrm>
           <a:prstGeom prst="rect">
             <a:avLst/>
@@ -7147,14 +7494,14 @@
       </p:pic>
       <p:sp>
         <p:nvSpPr>
-          <p:cNvPr id="40" name="Text 33"/>
-          <p:cNvSpPr/>
-          <p:nvPr/>
-        </p:nvSpPr>
-        <p:spPr>
-          <a:xfrm>
-            <a:off x="8098974" y="3651708"/>
-            <a:ext cx="1062791" cy="133434"/>
+          <p:cNvPr id="51" name="Text 43"/>
+          <p:cNvSpPr/>
+          <p:nvPr/>
+        </p:nvSpPr>
+        <p:spPr>
+          <a:xfrm>
+            <a:off x="1808226" y="5214413"/>
+            <a:ext cx="787075" cy="133434"/>
           </a:xfrm>
           <a:prstGeom prst="rect">
             <a:avLst/>
@@ -7177,7 +7524,7 @@
                 <a:ea typeface="Space Grotesk" pitchFamily="34" charset="-122"/>
                 <a:cs typeface="Space Grotesk" pitchFamily="34" charset="-120"/>
               </a:rPr>
-              <a:t>SQ: 균열 앞 커플 사진</a:t>
+              <a:t>SQ: 대피소 지원</a:t>
             </a:r>
             <a:endParaRPr lang="en-US" sz="867" dirty="0"/>
           </a:p>
@@ -7185,262 +7532,14 @@
       </p:sp>
       <p:sp>
         <p:nvSpPr>
-          <p:cNvPr id="41" name="Shape 34"/>
-          <p:cNvSpPr/>
-          <p:nvPr/>
-        </p:nvSpPr>
-        <p:spPr>
-          <a:xfrm>
-            <a:off x="1885951" y="4619746"/>
-            <a:ext cx="3733799" cy="438151"/>
-          </a:xfrm>
-          <a:prstGeom prst="rect">
-            <a:avLst/>
-          </a:prstGeom>
-          <a:solidFill>
-            <a:srgbClr val="FF4136">
-              <a:alpha val="10000"/>
-            </a:srgbClr>
-          </a:solidFill>
-          <a:ln/>
-        </p:spPr>
-      </p:sp>
-      <p:sp>
-        <p:nvSpPr>
-          <p:cNvPr id="42" name="Shape 35"/>
-          <p:cNvSpPr/>
-          <p:nvPr/>
-        </p:nvSpPr>
-        <p:spPr>
-          <a:xfrm>
-            <a:off x="933450" y="4534142"/>
-            <a:ext cx="762000" cy="609600"/>
-          </a:xfrm>
-          <a:prstGeom prst="rect">
-            <a:avLst/>
-          </a:prstGeom>
-          <a:solidFill>
-            <a:srgbClr val="001F3F"/>
-          </a:solidFill>
-          <a:ln w="18288">
-            <a:solidFill>
-              <a:srgbClr val="FF4136"/>
-            </a:solidFill>
-            <a:prstDash val="solid"/>
-          </a:ln>
-        </p:spPr>
-      </p:sp>
-      <p:sp>
-        <p:nvSpPr>
-          <p:cNvPr id="43" name="Text 36"/>
-          <p:cNvSpPr/>
-          <p:nvPr/>
-        </p:nvSpPr>
-        <p:spPr>
-          <a:xfrm>
-            <a:off x="1170385" y="4632964"/>
-            <a:ext cx="232436" cy="102657"/>
-          </a:xfrm>
-          <a:prstGeom prst="rect">
-            <a:avLst/>
-          </a:prstGeom>
-          <a:noFill/>
-          <a:ln/>
-        </p:spPr>
-        <p:txBody>
-          <a:bodyPr wrap="none" lIns="0" tIns="0" rIns="0" bIns="0" rtlCol="0" anchor="t">
-            <a:spAutoFit/>
-          </a:bodyPr>
-          <a:lstStyle/>
-          <a:p>
-            <a:r>
-              <a:rPr lang="en-US" sz="667" b="1" dirty="0">
-                <a:solidFill>
-                  <a:srgbClr val="FFFFFF">
-                    <a:alpha val="70000"/>
-                  </a:srgbClr>
-                </a:solidFill>
-                <a:latin typeface="Space Grotesk Bold" pitchFamily="34" charset="0"/>
-                <a:ea typeface="Space Grotesk Bold" pitchFamily="34" charset="-122"/>
-                <a:cs typeface="Space Grotesk Bold" pitchFamily="34" charset="-120"/>
-              </a:rPr>
-              <a:t>PHASE</a:t>
-            </a:r>
-            <a:endParaRPr lang="en-US" sz="667" dirty="0"/>
-          </a:p>
-        </p:txBody>
-      </p:sp>
-      <p:sp>
-        <p:nvSpPr>
-          <p:cNvPr id="44" name="Text 37"/>
-          <p:cNvSpPr/>
-          <p:nvPr/>
-        </p:nvSpPr>
-        <p:spPr>
-          <a:xfrm>
-            <a:off x="1171576" y="4754408"/>
-            <a:ext cx="243656" cy="246221"/>
-          </a:xfrm>
-          <a:prstGeom prst="rect">
-            <a:avLst/>
-          </a:prstGeom>
-          <a:noFill/>
-          <a:ln/>
-        </p:spPr>
-        <p:txBody>
-          <a:bodyPr wrap="none" lIns="0" tIns="0" rIns="0" bIns="0" rtlCol="0" anchor="t">
-            <a:spAutoFit/>
-          </a:bodyPr>
-          <a:lstStyle/>
-          <a:p>
-            <a:r>
-              <a:rPr lang="en-US" sz="1600" b="1" dirty="0">
-                <a:solidFill>
-                  <a:srgbClr val="FF4136"/>
-                </a:solidFill>
-                <a:latin typeface="Space Grotesk Bold" pitchFamily="34" charset="0"/>
-                <a:ea typeface="Space Grotesk Bold" pitchFamily="34" charset="-122"/>
-                <a:cs typeface="Space Grotesk Bold" pitchFamily="34" charset="-120"/>
-              </a:rPr>
-              <a:t>03</a:t>
-            </a:r>
-            <a:endParaRPr lang="en-US" sz="1600" dirty="0"/>
-          </a:p>
-        </p:txBody>
-      </p:sp>
-      <p:sp>
-        <p:nvSpPr>
-          <p:cNvPr id="45" name="Shape 38"/>
-          <p:cNvSpPr/>
-          <p:nvPr/>
-        </p:nvSpPr>
-        <p:spPr>
-          <a:xfrm>
-            <a:off x="1885951" y="4619749"/>
-            <a:ext cx="3733799" cy="438149"/>
-          </a:xfrm>
-          <a:prstGeom prst="rect">
-            <a:avLst/>
-          </a:prstGeom>
-          <a:solidFill>
-            <a:srgbClr val="003366">
-              <a:alpha val="60000"/>
-            </a:srgbClr>
-          </a:solidFill>
-          <a:ln w="9144">
-            <a:solidFill>
-              <a:srgbClr val="00D1FF"/>
-            </a:solidFill>
-            <a:prstDash val="solid"/>
-          </a:ln>
-        </p:spPr>
-      </p:sp>
-      <p:sp>
-        <p:nvSpPr>
-          <p:cNvPr id="46" name="Text 39"/>
-          <p:cNvSpPr/>
-          <p:nvPr/>
-        </p:nvSpPr>
-        <p:spPr>
-          <a:xfrm>
-            <a:off x="2000250" y="4740399"/>
-            <a:ext cx="2436019" cy="205121"/>
-          </a:xfrm>
-          <a:prstGeom prst="rect">
-            <a:avLst/>
-          </a:prstGeom>
-          <a:noFill/>
-          <a:ln/>
-        </p:spPr>
-        <p:txBody>
-          <a:bodyPr wrap="square" lIns="0" tIns="0" rIns="0" bIns="0" rtlCol="0" anchor="t">
-            <a:spAutoFit/>
-          </a:bodyPr>
-          <a:lstStyle/>
-          <a:p>
-            <a:r>
-              <a:rPr lang="en-US" sz="1333" b="1" dirty="0">
-                <a:solidFill>
-                  <a:srgbClr val="FF4136"/>
-                </a:solidFill>
-                <a:latin typeface="Space Grotesk Bold" pitchFamily="34" charset="0"/>
-                <a:ea typeface="Space Grotesk Bold" pitchFamily="34" charset="-122"/>
-                <a:cs typeface="Space Grotesk Bold" pitchFamily="34" charset="-120"/>
-              </a:rPr>
-              <a:t>재난 대응 (첫 전투 튜토리얼)</a:t>
-            </a:r>
-            <a:endParaRPr lang="en-US" sz="1333" dirty="0"/>
-          </a:p>
-        </p:txBody>
-      </p:sp>
-      <p:sp>
-        <p:nvSpPr>
-          <p:cNvPr id="47" name="Shape 40"/>
-          <p:cNvSpPr/>
-          <p:nvPr/>
-        </p:nvSpPr>
-        <p:spPr>
-          <a:xfrm>
-            <a:off x="4606557" y="4744763"/>
-            <a:ext cx="842963" cy="159544"/>
-          </a:xfrm>
-          <a:prstGeom prst="rect">
-            <a:avLst/>
-          </a:prstGeom>
-          <a:solidFill>
-            <a:srgbClr val="FF4136"/>
-          </a:solidFill>
-          <a:ln/>
-        </p:spPr>
-      </p:sp>
-      <p:sp>
-        <p:nvSpPr>
-          <p:cNvPr id="48" name="Text 41"/>
-          <p:cNvSpPr/>
-          <p:nvPr/>
-        </p:nvSpPr>
-        <p:spPr>
-          <a:xfrm>
-            <a:off x="4606557" y="4744764"/>
-            <a:ext cx="732188" cy="148482"/>
-          </a:xfrm>
-          <a:prstGeom prst="rect">
-            <a:avLst/>
-          </a:prstGeom>
-          <a:noFill/>
-          <a:ln/>
-        </p:spPr>
-        <p:txBody>
-          <a:bodyPr wrap="none" lIns="68072" tIns="22691" rIns="68072" bIns="22691" rtlCol="0" anchor="t">
-            <a:spAutoFit/>
-          </a:bodyPr>
-          <a:lstStyle/>
-          <a:p>
-            <a:r>
-              <a:rPr lang="en-US" sz="667" b="1" dirty="0">
-                <a:solidFill>
-                  <a:srgbClr val="FFFFFF"/>
-                </a:solidFill>
-                <a:latin typeface="Space Grotesk Bold" pitchFamily="34" charset="0"/>
-                <a:ea typeface="Space Grotesk Bold" pitchFamily="34" charset="-122"/>
-                <a:cs typeface="Space Grotesk Bold" pitchFamily="34" charset="-120"/>
-              </a:rPr>
-              <a:t>COMBAT_EVENT</a:t>
-            </a:r>
-            <a:endParaRPr lang="en-US" sz="667" dirty="0"/>
-          </a:p>
-        </p:txBody>
-      </p:sp>
-      <p:sp>
-        <p:nvSpPr>
-          <p:cNvPr id="49" name="Shape 42"/>
-          <p:cNvSpPr/>
-          <p:nvPr/>
-        </p:nvSpPr>
-        <p:spPr>
-          <a:xfrm>
-            <a:off x="5908264" y="4709505"/>
-            <a:ext cx="1195388" cy="242888"/>
+          <p:cNvPr id="52" name="Shape 44"/>
+          <p:cNvSpPr/>
+          <p:nvPr/>
+        </p:nvSpPr>
+        <p:spPr>
+          <a:xfrm>
+            <a:off x="2768809" y="5147738"/>
+            <a:ext cx="1541899" cy="242888"/>
           </a:xfrm>
           <a:prstGeom prst="rect">
             <a:avLst/>
@@ -7462,21 +7561,21 @@
       </p:sp>
       <p:pic>
         <p:nvPicPr>
-          <p:cNvPr id="50" name="Image 5" descr="preencoded.png"/>
+          <p:cNvPr id="53" name="Image 6" descr="preencoded.png"/>
           <p:cNvPicPr>
             <a:picLocks noChangeAspect="1"/>
           </p:cNvPicPr>
           <p:nvPr/>
         </p:nvPicPr>
         <p:blipFill>
-          <a:blip r:embed="rId7"/>
+          <a:blip r:embed="rId8"/>
           <a:stretch>
             <a:fillRect/>
           </a:stretch>
         </p:blipFill>
         <p:spPr>
           <a:xfrm>
-            <a:off x="5984463" y="4783324"/>
+            <a:off x="2845008" y="5240607"/>
             <a:ext cx="95251" cy="95251"/>
           </a:xfrm>
           <a:prstGeom prst="rect">
@@ -7486,14 +7585,14 @@
       </p:pic>
       <p:sp>
         <p:nvSpPr>
-          <p:cNvPr id="51" name="Text 43"/>
-          <p:cNvSpPr/>
-          <p:nvPr/>
-        </p:nvSpPr>
-        <p:spPr>
-          <a:xfrm>
-            <a:off x="6136864" y="4747605"/>
-            <a:ext cx="787075" cy="133434"/>
+          <p:cNvPr id="54" name="Text 45"/>
+          <p:cNvSpPr/>
+          <p:nvPr/>
+        </p:nvSpPr>
+        <p:spPr>
+          <a:xfrm>
+            <a:off x="2997408" y="5214413"/>
+            <a:ext cx="1256754" cy="133434"/>
           </a:xfrm>
           <a:prstGeom prst="rect">
             <a:avLst/>
@@ -7516,7 +7615,7 @@
                 <a:ea typeface="Space Grotesk" pitchFamily="34" charset="-122"/>
                 <a:cs typeface="Space Grotesk" pitchFamily="34" charset="-120"/>
               </a:rPr>
-              <a:t>SQ: 대피소 지원</a:t>
+              <a:t>SQ: 잃어버린 강아지 찾기</a:t>
             </a:r>
             <a:endParaRPr lang="en-US" sz="867" dirty="0"/>
           </a:p>
@@ -7524,14 +7623,14 @@
       </p:sp>
       <p:sp>
         <p:nvSpPr>
-          <p:cNvPr id="52" name="Shape 44"/>
-          <p:cNvSpPr/>
-          <p:nvPr/>
-        </p:nvSpPr>
-        <p:spPr>
-          <a:xfrm>
-            <a:off x="7494176" y="4709505"/>
-            <a:ext cx="1721644" cy="242888"/>
+          <p:cNvPr id="55" name="Shape 46"/>
+          <p:cNvSpPr/>
+          <p:nvPr/>
+        </p:nvSpPr>
+        <p:spPr>
+          <a:xfrm>
+            <a:off x="4386907" y="5147738"/>
+            <a:ext cx="1337112" cy="242888"/>
           </a:xfrm>
           <a:prstGeom prst="rect">
             <a:avLst/>
@@ -7553,21 +7652,21 @@
       </p:sp>
       <p:pic>
         <p:nvPicPr>
-          <p:cNvPr id="53" name="Image 6" descr="preencoded.png"/>
+          <p:cNvPr id="56" name="Image 7" descr="preencoded.png"/>
           <p:cNvPicPr>
             <a:picLocks noChangeAspect="1"/>
           </p:cNvPicPr>
           <p:nvPr/>
         </p:nvPicPr>
         <p:blipFill>
-          <a:blip r:embed="rId8"/>
+          <a:blip r:embed="rId9"/>
           <a:stretch>
             <a:fillRect/>
           </a:stretch>
         </p:blipFill>
         <p:spPr>
           <a:xfrm>
-            <a:off x="7570375" y="4783324"/>
+            <a:off x="4463105" y="5231081"/>
             <a:ext cx="95251" cy="95251"/>
           </a:xfrm>
           <a:prstGeom prst="rect">
@@ -7577,14 +7676,14 @@
       </p:pic>
       <p:sp>
         <p:nvSpPr>
-          <p:cNvPr id="54" name="Text 45"/>
-          <p:cNvSpPr/>
-          <p:nvPr/>
-        </p:nvSpPr>
-        <p:spPr>
-          <a:xfrm>
-            <a:off x="7722775" y="4747605"/>
-            <a:ext cx="1256754" cy="133434"/>
+          <p:cNvPr id="57" name="Text 47"/>
+          <p:cNvSpPr/>
+          <p:nvPr/>
+        </p:nvSpPr>
+        <p:spPr>
+          <a:xfrm>
+            <a:off x="4615506" y="5204888"/>
+            <a:ext cx="1008289" cy="133434"/>
           </a:xfrm>
           <a:prstGeom prst="rect">
             <a:avLst/>
@@ -7607,7 +7706,7 @@
                 <a:ea typeface="Space Grotesk" pitchFamily="34" charset="-122"/>
                 <a:cs typeface="Space Grotesk" pitchFamily="34" charset="-120"/>
               </a:rPr>
-              <a:t>SQ: 잃어버린 강아지 찾기</a:t>
+              <a:t>SQ: 괴물 목격담 수집</a:t>
             </a:r>
             <a:endParaRPr lang="en-US" sz="867" dirty="0"/>
           </a:p>
@@ -7615,13 +7714,141 @@
       </p:sp>
       <p:sp>
         <p:nvSpPr>
-          <p:cNvPr id="55" name="Shape 46"/>
-          <p:cNvSpPr/>
-          <p:nvPr/>
-        </p:nvSpPr>
-        <p:spPr>
-          <a:xfrm>
-            <a:off x="9606344" y="4709505"/>
+          <p:cNvPr id="58" name="Shape 48"/>
+          <p:cNvSpPr/>
+          <p:nvPr/>
+        </p:nvSpPr>
+        <p:spPr>
+          <a:xfrm>
+            <a:off x="627125" y="5613920"/>
+            <a:ext cx="762000" cy="609600"/>
+          </a:xfrm>
+          <a:prstGeom prst="rect">
+            <a:avLst/>
+          </a:prstGeom>
+          <a:solidFill>
+            <a:srgbClr val="001F3F"/>
+          </a:solidFill>
+          <a:ln w="18288">
+            <a:solidFill>
+              <a:srgbClr val="00D1FF"/>
+            </a:solidFill>
+            <a:prstDash val="solid"/>
+          </a:ln>
+        </p:spPr>
+      </p:sp>
+      <p:sp>
+        <p:nvSpPr>
+          <p:cNvPr id="60" name="Text 50"/>
+          <p:cNvSpPr/>
+          <p:nvPr/>
+        </p:nvSpPr>
+        <p:spPr>
+          <a:xfrm>
+            <a:off x="861552" y="5834187"/>
+            <a:ext cx="503633" cy="246221"/>
+          </a:xfrm>
+          <a:prstGeom prst="rect">
+            <a:avLst/>
+          </a:prstGeom>
+          <a:noFill/>
+          <a:ln/>
+        </p:spPr>
+        <p:txBody>
+          <a:bodyPr wrap="square" lIns="0" tIns="0" rIns="0" bIns="0" rtlCol="0" anchor="t">
+            <a:spAutoFit/>
+          </a:bodyPr>
+          <a:lstStyle/>
+          <a:p>
+            <a:r>
+              <a:rPr lang="en-US" sz="1600" b="1" smtClean="0">
+                <a:solidFill>
+                  <a:srgbClr val="00D1FF"/>
+                </a:solidFill>
+                <a:latin typeface="Space Grotesk Bold" pitchFamily="34" charset="0"/>
+                <a:ea typeface="Space Grotesk Bold" pitchFamily="34" charset="-122"/>
+                <a:cs typeface="Space Grotesk Bold" pitchFamily="34" charset="-120"/>
+              </a:rPr>
+              <a:t>04</a:t>
+            </a:r>
+            <a:endParaRPr lang="en-US" sz="1600" dirty="0"/>
+          </a:p>
+        </p:txBody>
+      </p:sp>
+      <p:sp>
+        <p:nvSpPr>
+          <p:cNvPr id="61" name="Shape 51"/>
+          <p:cNvSpPr/>
+          <p:nvPr/>
+        </p:nvSpPr>
+        <p:spPr>
+          <a:xfrm>
+            <a:off x="1579626" y="5699526"/>
+            <a:ext cx="4144393" cy="438151"/>
+          </a:xfrm>
+          <a:prstGeom prst="rect">
+            <a:avLst/>
+          </a:prstGeom>
+          <a:solidFill>
+            <a:srgbClr val="003366">
+              <a:alpha val="60000"/>
+            </a:srgbClr>
+          </a:solidFill>
+          <a:ln w="9144">
+            <a:solidFill>
+              <a:srgbClr val="00D1FF"/>
+            </a:solidFill>
+            <a:prstDash val="solid"/>
+          </a:ln>
+        </p:spPr>
+      </p:sp>
+      <p:sp>
+        <p:nvSpPr>
+          <p:cNvPr id="62" name="Text 52"/>
+          <p:cNvSpPr/>
+          <p:nvPr/>
+        </p:nvSpPr>
+        <p:spPr>
+          <a:xfrm>
+            <a:off x="1693925" y="5820178"/>
+            <a:ext cx="1905000" cy="205121"/>
+          </a:xfrm>
+          <a:prstGeom prst="rect">
+            <a:avLst/>
+          </a:prstGeom>
+          <a:noFill/>
+          <a:ln/>
+        </p:spPr>
+        <p:txBody>
+          <a:bodyPr wrap="square" lIns="0" tIns="0" rIns="0" bIns="0" rtlCol="0" anchor="t">
+            <a:spAutoFit/>
+          </a:bodyPr>
+          <a:lstStyle/>
+          <a:p>
+            <a:r>
+              <a:rPr lang="en-US" sz="1333" b="1" dirty="0">
+                <a:solidFill>
+                  <a:srgbClr val="FFFFFF"/>
+                </a:solidFill>
+                <a:latin typeface="Space Grotesk Bold" pitchFamily="34" charset="0"/>
+                <a:ea typeface="Space Grotesk Bold" pitchFamily="34" charset="-122"/>
+                <a:cs typeface="Space Grotesk Bold" pitchFamily="34" charset="-120"/>
+              </a:rPr>
+              <a:t>폐교 탐사 및 균열 탐색</a:t>
+            </a:r>
+            <a:endParaRPr lang="en-US" sz="1333" dirty="0"/>
+          </a:p>
+        </p:txBody>
+      </p:sp>
+      <p:sp>
+        <p:nvSpPr>
+          <p:cNvPr id="65" name="Shape 55"/>
+          <p:cNvSpPr/>
+          <p:nvPr/>
+        </p:nvSpPr>
+        <p:spPr>
+          <a:xfrm>
+            <a:off x="1579626" y="6246468"/>
             <a:ext cx="1473993" cy="242888"/>
           </a:xfrm>
           <a:prstGeom prst="rect">
@@ -7644,21 +7871,21 @@
       </p:sp>
       <p:pic>
         <p:nvPicPr>
-          <p:cNvPr id="56" name="Image 7" descr="preencoded.png"/>
+          <p:cNvPr id="66" name="Image 8" descr="preencoded.png"/>
           <p:cNvPicPr>
             <a:picLocks noChangeAspect="1"/>
           </p:cNvPicPr>
           <p:nvPr/>
         </p:nvPicPr>
         <p:blipFill>
-          <a:blip r:embed="rId9"/>
+          <a:blip r:embed="rId10"/>
           <a:stretch>
             <a:fillRect/>
           </a:stretch>
         </p:blipFill>
         <p:spPr>
           <a:xfrm>
-            <a:off x="9682543" y="4773798"/>
+            <a:off x="1655825" y="6339337"/>
             <a:ext cx="95251" cy="95251"/>
           </a:xfrm>
           <a:prstGeom prst="rect">
@@ -7668,14 +7895,14 @@
       </p:pic>
       <p:sp>
         <p:nvSpPr>
-          <p:cNvPr id="57" name="Text 47"/>
-          <p:cNvSpPr/>
-          <p:nvPr/>
-        </p:nvSpPr>
-        <p:spPr>
-          <a:xfrm>
-            <a:off x="9834944" y="4738080"/>
-            <a:ext cx="1008289" cy="133434"/>
+          <p:cNvPr id="67" name="Text 56"/>
+          <p:cNvSpPr/>
+          <p:nvPr/>
+        </p:nvSpPr>
+        <p:spPr>
+          <a:xfrm>
+            <a:off x="1808226" y="6313143"/>
+            <a:ext cx="1035540" cy="133434"/>
           </a:xfrm>
           <a:prstGeom prst="rect">
             <a:avLst/>
@@ -7698,7 +7925,7 @@
                 <a:ea typeface="Space Grotesk" pitchFamily="34" charset="-122"/>
                 <a:cs typeface="Space Grotesk" pitchFamily="34" charset="-120"/>
               </a:rPr>
-              <a:t>SQ: 괴물 목격담 수집</a:t>
+              <a:t>SQ: 숨겨진 기억 단서</a:t>
             </a:r>
             <a:endParaRPr lang="en-US" sz="867" dirty="0"/>
           </a:p>
@@ -7706,240 +7933,14 @@
       </p:sp>
       <p:sp>
         <p:nvSpPr>
-          <p:cNvPr id="58" name="Shape 48"/>
-          <p:cNvSpPr/>
-          <p:nvPr/>
-        </p:nvSpPr>
-        <p:spPr>
-          <a:xfrm>
-            <a:off x="933450" y="5613920"/>
-            <a:ext cx="762000" cy="609600"/>
-          </a:xfrm>
-          <a:prstGeom prst="rect">
-            <a:avLst/>
-          </a:prstGeom>
-          <a:solidFill>
-            <a:srgbClr val="001F3F"/>
-          </a:solidFill>
-          <a:ln w="18288">
-            <a:solidFill>
-              <a:srgbClr val="00D1FF"/>
-            </a:solidFill>
-            <a:prstDash val="solid"/>
-          </a:ln>
-        </p:spPr>
-      </p:sp>
-      <p:sp>
-        <p:nvSpPr>
-          <p:cNvPr id="59" name="Text 49"/>
-          <p:cNvSpPr/>
-          <p:nvPr/>
-        </p:nvSpPr>
-        <p:spPr>
-          <a:xfrm>
-            <a:off x="1170385" y="5712744"/>
-            <a:ext cx="278923" cy="102657"/>
-          </a:xfrm>
-          <a:prstGeom prst="rect">
-            <a:avLst/>
-          </a:prstGeom>
-          <a:noFill/>
-          <a:ln/>
-        </p:spPr>
-        <p:txBody>
-          <a:bodyPr wrap="square" lIns="0" tIns="0" rIns="0" bIns="0" rtlCol="0" anchor="t">
-            <a:spAutoFit/>
-          </a:bodyPr>
-          <a:lstStyle/>
-          <a:p>
-            <a:r>
-              <a:rPr lang="en-US" sz="667" b="1" dirty="0">
-                <a:solidFill>
-                  <a:srgbClr val="FFFFFF">
-                    <a:alpha val="70000"/>
-                  </a:srgbClr>
-                </a:solidFill>
-                <a:latin typeface="Space Grotesk Bold" pitchFamily="34" charset="0"/>
-                <a:ea typeface="Space Grotesk Bold" pitchFamily="34" charset="-122"/>
-                <a:cs typeface="Space Grotesk Bold" pitchFamily="34" charset="-120"/>
-              </a:rPr>
-              <a:t>PHASE</a:t>
-            </a:r>
-            <a:endParaRPr lang="en-US" sz="667" dirty="0"/>
-          </a:p>
-        </p:txBody>
-      </p:sp>
-      <p:sp>
-        <p:nvSpPr>
-          <p:cNvPr id="60" name="Text 50"/>
-          <p:cNvSpPr/>
-          <p:nvPr/>
-        </p:nvSpPr>
-        <p:spPr>
-          <a:xfrm>
-            <a:off x="1096567" y="5834187"/>
-            <a:ext cx="503633" cy="246221"/>
-          </a:xfrm>
-          <a:prstGeom prst="rect">
-            <a:avLst/>
-          </a:prstGeom>
-          <a:noFill/>
-          <a:ln/>
-        </p:spPr>
-        <p:txBody>
-          <a:bodyPr wrap="square" lIns="0" tIns="0" rIns="0" bIns="0" rtlCol="0" anchor="t">
-            <a:spAutoFit/>
-          </a:bodyPr>
-          <a:lstStyle/>
-          <a:p>
-            <a:r>
-              <a:rPr lang="en-US" sz="1600" b="1" dirty="0">
-                <a:solidFill>
-                  <a:srgbClr val="00D1FF"/>
-                </a:solidFill>
-                <a:latin typeface="Space Grotesk Bold" pitchFamily="34" charset="0"/>
-                <a:ea typeface="Space Grotesk Bold" pitchFamily="34" charset="-122"/>
-                <a:cs typeface="Space Grotesk Bold" pitchFamily="34" charset="-120"/>
-              </a:rPr>
-              <a:t>04+</a:t>
-            </a:r>
-            <a:endParaRPr lang="en-US" sz="1600" dirty="0"/>
-          </a:p>
-        </p:txBody>
-      </p:sp>
-      <p:sp>
-        <p:nvSpPr>
-          <p:cNvPr id="61" name="Shape 51"/>
-          <p:cNvSpPr/>
-          <p:nvPr/>
-        </p:nvSpPr>
-        <p:spPr>
-          <a:xfrm>
-            <a:off x="1885951" y="5699526"/>
-            <a:ext cx="3733799" cy="438151"/>
-          </a:xfrm>
-          <a:prstGeom prst="rect">
-            <a:avLst/>
-          </a:prstGeom>
-          <a:solidFill>
-            <a:srgbClr val="003366">
-              <a:alpha val="60000"/>
-            </a:srgbClr>
-          </a:solidFill>
-          <a:ln w="9144">
-            <a:solidFill>
-              <a:srgbClr val="00D1FF"/>
-            </a:solidFill>
-            <a:prstDash val="solid"/>
-          </a:ln>
-        </p:spPr>
-      </p:sp>
-      <p:sp>
-        <p:nvSpPr>
-          <p:cNvPr id="62" name="Text 52"/>
-          <p:cNvSpPr/>
-          <p:nvPr/>
-        </p:nvSpPr>
-        <p:spPr>
-          <a:xfrm>
-            <a:off x="2000250" y="5820178"/>
-            <a:ext cx="1905000" cy="205121"/>
-          </a:xfrm>
-          <a:prstGeom prst="rect">
-            <a:avLst/>
-          </a:prstGeom>
-          <a:noFill/>
-          <a:ln/>
-        </p:spPr>
-        <p:txBody>
-          <a:bodyPr wrap="square" lIns="0" tIns="0" rIns="0" bIns="0" rtlCol="0" anchor="t">
-            <a:spAutoFit/>
-          </a:bodyPr>
-          <a:lstStyle/>
-          <a:p>
-            <a:r>
-              <a:rPr lang="en-US" sz="1333" b="1" dirty="0">
-                <a:solidFill>
-                  <a:srgbClr val="FFFFFF"/>
-                </a:solidFill>
-                <a:latin typeface="Space Grotesk Bold" pitchFamily="34" charset="0"/>
-                <a:ea typeface="Space Grotesk Bold" pitchFamily="34" charset="-122"/>
-                <a:cs typeface="Space Grotesk Bold" pitchFamily="34" charset="-120"/>
-              </a:rPr>
-              <a:t>폐교 탐사 및 균열 탐색</a:t>
-            </a:r>
-            <a:endParaRPr lang="en-US" sz="1333" dirty="0"/>
-          </a:p>
-        </p:txBody>
-      </p:sp>
-      <p:sp>
-        <p:nvSpPr>
-          <p:cNvPr id="63" name="Shape 53"/>
-          <p:cNvSpPr/>
-          <p:nvPr/>
-        </p:nvSpPr>
-        <p:spPr>
-          <a:xfrm>
-            <a:off x="4832776" y="5824543"/>
-            <a:ext cx="616744" cy="159544"/>
-          </a:xfrm>
-          <a:prstGeom prst="rect">
-            <a:avLst/>
-          </a:prstGeom>
-          <a:solidFill>
-            <a:srgbClr val="00D1FF"/>
-          </a:solidFill>
-          <a:ln/>
-        </p:spPr>
-      </p:sp>
-      <p:sp>
-        <p:nvSpPr>
-          <p:cNvPr id="64" name="Text 54"/>
-          <p:cNvSpPr/>
-          <p:nvPr/>
-        </p:nvSpPr>
-        <p:spPr>
-          <a:xfrm>
-            <a:off x="4832776" y="5824544"/>
-            <a:ext cx="554254" cy="251138"/>
-          </a:xfrm>
-          <a:prstGeom prst="rect">
-            <a:avLst/>
-          </a:prstGeom>
-          <a:noFill/>
-          <a:ln/>
-        </p:spPr>
-        <p:txBody>
-          <a:bodyPr wrap="square" lIns="68072" tIns="22691" rIns="68072" bIns="22691" rtlCol="0" anchor="t">
-            <a:spAutoFit/>
-          </a:bodyPr>
-          <a:lstStyle/>
-          <a:p>
-            <a:r>
-              <a:rPr lang="en-US" sz="667" b="1" dirty="0">
-                <a:solidFill>
-                  <a:srgbClr val="001F3F"/>
-                </a:solidFill>
-                <a:latin typeface="Space Grotesk Bold" pitchFamily="34" charset="0"/>
-                <a:ea typeface="Space Grotesk Bold" pitchFamily="34" charset="-122"/>
-                <a:cs typeface="Space Grotesk Bold" pitchFamily="34" charset="-120"/>
-              </a:rPr>
-              <a:t>EXPANSION</a:t>
-            </a:r>
-            <a:endParaRPr lang="en-US" sz="667" dirty="0"/>
-          </a:p>
-        </p:txBody>
-      </p:sp>
-      <p:sp>
-        <p:nvSpPr>
-          <p:cNvPr id="65" name="Shape 55"/>
-          <p:cNvSpPr/>
-          <p:nvPr/>
-        </p:nvSpPr>
-        <p:spPr>
-          <a:xfrm>
-            <a:off x="5909075" y="5777975"/>
-            <a:ext cx="1473993" cy="242888"/>
+          <p:cNvPr id="68" name="Shape 57"/>
+          <p:cNvSpPr/>
+          <p:nvPr/>
+        </p:nvSpPr>
+        <p:spPr>
+          <a:xfrm>
+            <a:off x="3125627" y="6246468"/>
+            <a:ext cx="1350169" cy="242888"/>
           </a:xfrm>
           <a:prstGeom prst="rect">
             <a:avLst/>
@@ -7961,97 +7962,6 @@
       </p:sp>
       <p:pic>
         <p:nvPicPr>
-          <p:cNvPr id="66" name="Image 8" descr="preencoded.png"/>
-          <p:cNvPicPr>
-            <a:picLocks noChangeAspect="1"/>
-          </p:cNvPicPr>
-          <p:nvPr/>
-        </p:nvPicPr>
-        <p:blipFill>
-          <a:blip r:embed="rId10"/>
-          <a:stretch>
-            <a:fillRect/>
-          </a:stretch>
-        </p:blipFill>
-        <p:spPr>
-          <a:xfrm>
-            <a:off x="5985274" y="5851794"/>
-            <a:ext cx="95251" cy="95251"/>
-          </a:xfrm>
-          <a:prstGeom prst="rect">
-            <a:avLst/>
-          </a:prstGeom>
-        </p:spPr>
-      </p:pic>
-      <p:sp>
-        <p:nvSpPr>
-          <p:cNvPr id="67" name="Text 56"/>
-          <p:cNvSpPr/>
-          <p:nvPr/>
-        </p:nvSpPr>
-        <p:spPr>
-          <a:xfrm>
-            <a:off x="6137675" y="5816075"/>
-            <a:ext cx="1035540" cy="133434"/>
-          </a:xfrm>
-          <a:prstGeom prst="rect">
-            <a:avLst/>
-          </a:prstGeom>
-          <a:noFill/>
-          <a:ln/>
-        </p:spPr>
-        <p:txBody>
-          <a:bodyPr wrap="none" lIns="0" tIns="0" rIns="0" bIns="0" rtlCol="0" anchor="t">
-            <a:spAutoFit/>
-          </a:bodyPr>
-          <a:lstStyle/>
-          <a:p>
-            <a:r>
-              <a:rPr lang="en-US" sz="867" dirty="0">
-                <a:solidFill>
-                  <a:srgbClr val="FFFFFF"/>
-                </a:solidFill>
-                <a:latin typeface="Space Grotesk" pitchFamily="34" charset="0"/>
-                <a:ea typeface="Space Grotesk" pitchFamily="34" charset="-122"/>
-                <a:cs typeface="Space Grotesk" pitchFamily="34" charset="-120"/>
-              </a:rPr>
-              <a:t>SQ: 숨겨진 기억 단서</a:t>
-            </a:r>
-            <a:endParaRPr lang="en-US" sz="867" dirty="0"/>
-          </a:p>
-        </p:txBody>
-      </p:sp>
-      <p:sp>
-        <p:nvSpPr>
-          <p:cNvPr id="68" name="Shape 57"/>
-          <p:cNvSpPr/>
-          <p:nvPr/>
-        </p:nvSpPr>
-        <p:spPr>
-          <a:xfrm>
-            <a:off x="7774781" y="5777975"/>
-            <a:ext cx="1350169" cy="242888"/>
-          </a:xfrm>
-          <a:prstGeom prst="rect">
-            <a:avLst/>
-          </a:prstGeom>
-          <a:solidFill>
-            <a:srgbClr val="FFFFFF">
-              <a:alpha val="5000"/>
-            </a:srgbClr>
-          </a:solidFill>
-          <a:ln w="9144">
-            <a:solidFill>
-              <a:srgbClr val="00D1FF">
-                <a:alpha val="50000"/>
-              </a:srgbClr>
-            </a:solidFill>
-            <a:prstDash val="dash"/>
-          </a:ln>
-        </p:spPr>
-      </p:sp>
-      <p:pic>
-        <p:nvPicPr>
           <p:cNvPr id="69" name="Image 9" descr="preencoded.png"/>
           <p:cNvPicPr>
             <a:picLocks noChangeAspect="1"/>
@@ -8066,7 +7976,7 @@
         </p:blipFill>
         <p:spPr>
           <a:xfrm>
-            <a:off x="7850980" y="5842268"/>
+            <a:off x="3201826" y="6329811"/>
             <a:ext cx="95251" cy="95251"/>
           </a:xfrm>
           <a:prstGeom prst="rect">
@@ -8082,7 +7992,7 @@
         </p:nvSpPr>
         <p:spPr>
           <a:xfrm>
-            <a:off x="8003380" y="5806550"/>
+            <a:off x="3354226" y="6303618"/>
             <a:ext cx="897682" cy="133434"/>
           </a:xfrm>
           <a:prstGeom prst="rect">
@@ -8178,7 +8088,7 @@
         </p:nvSpPr>
         <p:spPr>
           <a:xfrm rot="5400000">
-            <a:off x="1063166" y="2131518"/>
+            <a:off x="756841" y="2131518"/>
             <a:ext cx="470179" cy="45720"/>
           </a:xfrm>
           <a:prstGeom prst="rect">
@@ -8204,7 +8114,7 @@
         </p:nvSpPr>
         <p:spPr>
           <a:xfrm rot="5400000">
-            <a:off x="1063166" y="3199748"/>
+            <a:off x="756841" y="3199748"/>
             <a:ext cx="470177" cy="45721"/>
           </a:xfrm>
           <a:prstGeom prst="rect">
@@ -8230,7 +8140,7 @@
         </p:nvSpPr>
         <p:spPr>
           <a:xfrm rot="5400000">
-            <a:off x="1063165" y="4276192"/>
+            <a:off x="756840" y="4276192"/>
             <a:ext cx="470177" cy="45721"/>
           </a:xfrm>
           <a:prstGeom prst="rect">
@@ -8256,34 +8166,8 @@
         </p:nvSpPr>
         <p:spPr>
           <a:xfrm rot="5400000">
-            <a:off x="1068474" y="5363832"/>
+            <a:off x="762149" y="5363832"/>
             <a:ext cx="447793" cy="45719"/>
-          </a:xfrm>
-          <a:prstGeom prst="rect">
-            <a:avLst/>
-          </a:prstGeom>
-          <a:solidFill>
-            <a:srgbClr val="00D1FF"/>
-          </a:solidFill>
-          <a:ln/>
-        </p:spPr>
-      </p:sp>
-      <p:sp>
-        <p:nvSpPr>
-          <p:cNvPr id="101" name="Shape 2">
-            <a:extLst>
-              <a:ext uri="{FF2B5EF4-FFF2-40B4-BE49-F238E27FC236}">
-                <a16:creationId xmlns:a16="http://schemas.microsoft.com/office/drawing/2014/main" id="{AC88A0E9-EC3F-D65D-1DAD-C6B1604786B1}"/>
-              </a:ext>
-            </a:extLst>
-          </p:cNvPr>
-          <p:cNvSpPr/>
-          <p:nvPr/>
-        </p:nvSpPr>
-        <p:spPr>
-          <a:xfrm>
-            <a:off x="7487800" y="3735052"/>
-            <a:ext cx="394480" cy="45719"/>
           </a:xfrm>
           <a:prstGeom prst="rect">
             <a:avLst/>
@@ -8308,8 +8192,8 @@
         </p:nvSpPr>
         <p:spPr>
           <a:xfrm>
-            <a:off x="7103652" y="4811263"/>
-            <a:ext cx="394480" cy="45719"/>
+            <a:off x="2691459" y="5249496"/>
+            <a:ext cx="76199" cy="45719"/>
           </a:xfrm>
           <a:prstGeom prst="rect">
             <a:avLst/>
@@ -8322,20 +8206,14 @@
       </p:sp>
       <p:sp>
         <p:nvSpPr>
-          <p:cNvPr id="105" name="Shape 2">
-            <a:extLst>
-              <a:ext uri="{FF2B5EF4-FFF2-40B4-BE49-F238E27FC236}">
-                <a16:creationId xmlns:a16="http://schemas.microsoft.com/office/drawing/2014/main" id="{8A576445-D622-86BD-207E-CD4083D8E688}"/>
-              </a:ext>
-            </a:extLst>
-          </p:cNvPr>
-          <p:cNvSpPr/>
-          <p:nvPr/>
-        </p:nvSpPr>
-        <p:spPr>
-          <a:xfrm>
-            <a:off x="9215820" y="4819005"/>
-            <a:ext cx="394480" cy="45719"/>
+          <p:cNvPr id="77" name="Shape 28"/>
+          <p:cNvSpPr/>
+          <p:nvPr/>
+        </p:nvSpPr>
+        <p:spPr>
+          <a:xfrm>
+            <a:off x="4828196" y="5827766"/>
+            <a:ext cx="700088" cy="159544"/>
           </a:xfrm>
           <a:prstGeom prst="rect">
             <a:avLst/>
@@ -8348,10 +8226,88 @@
       </p:sp>
       <p:sp>
         <p:nvSpPr>
-          <p:cNvPr id="109" name="Shape 2">
+          <p:cNvPr id="78" name="Text 29"/>
+          <p:cNvSpPr/>
+          <p:nvPr/>
+        </p:nvSpPr>
+        <p:spPr>
+          <a:xfrm>
+            <a:off x="4828196" y="5827766"/>
+            <a:ext cx="624786" cy="148482"/>
+          </a:xfrm>
+          <a:prstGeom prst="rect">
+            <a:avLst/>
+          </a:prstGeom>
+          <a:noFill/>
+          <a:ln/>
+        </p:spPr>
+        <p:txBody>
+          <a:bodyPr wrap="none" lIns="68072" tIns="22691" rIns="68072" bIns="22691" rtlCol="0" anchor="t">
+            <a:spAutoFit/>
+          </a:bodyPr>
+          <a:lstStyle/>
+          <a:p>
+            <a:r>
+              <a:rPr lang="en-US" sz="667" b="1" dirty="0">
+                <a:solidFill>
+                  <a:srgbClr val="001F3F"/>
+                </a:solidFill>
+                <a:latin typeface="Space Grotesk Bold" pitchFamily="34" charset="0"/>
+                <a:ea typeface="Space Grotesk Bold" pitchFamily="34" charset="-122"/>
+                <a:cs typeface="Space Grotesk Bold" pitchFamily="34" charset="-120"/>
+              </a:rPr>
+              <a:t>MAIN_QUEST</a:t>
+            </a:r>
+            <a:endParaRPr lang="en-US" sz="667" dirty="0"/>
+          </a:p>
+        </p:txBody>
+      </p:sp>
+      <p:sp>
+        <p:nvSpPr>
+          <p:cNvPr id="79" name="Text 36"/>
+          <p:cNvSpPr/>
+          <p:nvPr/>
+        </p:nvSpPr>
+        <p:spPr>
+          <a:xfrm>
+            <a:off x="864060" y="5717521"/>
+            <a:ext cx="232436" cy="102657"/>
+          </a:xfrm>
+          <a:prstGeom prst="rect">
+            <a:avLst/>
+          </a:prstGeom>
+          <a:noFill/>
+          <a:ln/>
+        </p:spPr>
+        <p:txBody>
+          <a:bodyPr wrap="none" lIns="0" tIns="0" rIns="0" bIns="0" rtlCol="0" anchor="t">
+            <a:spAutoFit/>
+          </a:bodyPr>
+          <a:lstStyle/>
+          <a:p>
+            <a:r>
+              <a:rPr lang="en-US" sz="667" b="1" dirty="0">
+                <a:solidFill>
+                  <a:srgbClr val="FFFFFF">
+                    <a:alpha val="70000"/>
+                  </a:srgbClr>
+                </a:solidFill>
+                <a:latin typeface="Space Grotesk Bold" pitchFamily="34" charset="0"/>
+                <a:ea typeface="Space Grotesk Bold" pitchFamily="34" charset="-122"/>
+                <a:cs typeface="Space Grotesk Bold" pitchFamily="34" charset="-120"/>
+              </a:rPr>
+              <a:t>PHASE</a:t>
+            </a:r>
+            <a:endParaRPr lang="en-US" sz="667" dirty="0"/>
+          </a:p>
+        </p:txBody>
+      </p:sp>
+      <p:sp>
+        <p:nvSpPr>
+          <p:cNvPr id="80" name="Shape 2">
             <a:extLst>
               <a:ext uri="{FF2B5EF4-FFF2-40B4-BE49-F238E27FC236}">
-                <a16:creationId xmlns:a16="http://schemas.microsoft.com/office/drawing/2014/main" id="{E51EC4B1-34CE-C014-B5DC-04A9A2907C60}"/>
+                <a16:creationId xmlns:a16="http://schemas.microsoft.com/office/drawing/2014/main" id="{288E2F80-8957-06A6-C284-DD3F4B8486A1}"/>
               </a:ext>
             </a:extLst>
           </p:cNvPr>
@@ -8360,8 +8316,8 @@
         </p:nvSpPr>
         <p:spPr>
           <a:xfrm>
-            <a:off x="7380301" y="5884323"/>
-            <a:ext cx="394480" cy="45719"/>
+            <a:off x="4310707" y="5249496"/>
+            <a:ext cx="76199" cy="45719"/>
           </a:xfrm>
           <a:prstGeom prst="rect">
             <a:avLst/>
@@ -8372,11 +8328,3404 @@
           <a:ln/>
         </p:spPr>
       </p:sp>
+      <p:sp>
+        <p:nvSpPr>
+          <p:cNvPr id="81" name="Shape 2">
+            <a:extLst>
+              <a:ext uri="{FF2B5EF4-FFF2-40B4-BE49-F238E27FC236}">
+                <a16:creationId xmlns:a16="http://schemas.microsoft.com/office/drawing/2014/main" id="{288E2F80-8957-06A6-C284-DD3F4B8486A1}"/>
+              </a:ext>
+            </a:extLst>
+          </p:cNvPr>
+          <p:cNvSpPr/>
+          <p:nvPr/>
+        </p:nvSpPr>
+        <p:spPr>
+          <a:xfrm>
+            <a:off x="3165539" y="4173649"/>
+            <a:ext cx="76199" cy="45719"/>
+          </a:xfrm>
+          <a:prstGeom prst="rect">
+            <a:avLst/>
+          </a:prstGeom>
+          <a:solidFill>
+            <a:srgbClr val="00D1FF"/>
+          </a:solidFill>
+          <a:ln/>
+        </p:spPr>
+      </p:sp>
+      <p:sp>
+        <p:nvSpPr>
+          <p:cNvPr id="82" name="Shape 2">
+            <a:extLst>
+              <a:ext uri="{FF2B5EF4-FFF2-40B4-BE49-F238E27FC236}">
+                <a16:creationId xmlns:a16="http://schemas.microsoft.com/office/drawing/2014/main" id="{288E2F80-8957-06A6-C284-DD3F4B8486A1}"/>
+              </a:ext>
+            </a:extLst>
+          </p:cNvPr>
+          <p:cNvSpPr/>
+          <p:nvPr/>
+        </p:nvSpPr>
+        <p:spPr>
+          <a:xfrm>
+            <a:off x="3051264" y="6354576"/>
+            <a:ext cx="76199" cy="45719"/>
+          </a:xfrm>
+          <a:prstGeom prst="rect">
+            <a:avLst/>
+          </a:prstGeom>
+          <a:solidFill>
+            <a:srgbClr val="00D1FF"/>
+          </a:solidFill>
+          <a:ln/>
+        </p:spPr>
+      </p:sp>
+      <p:sp>
+        <p:nvSpPr>
+          <p:cNvPr id="83" name="Text 3"/>
+          <p:cNvSpPr/>
+          <p:nvPr/>
+        </p:nvSpPr>
+        <p:spPr>
+          <a:xfrm>
+            <a:off x="6351633" y="1440662"/>
+            <a:ext cx="2148602" cy="307777"/>
+          </a:xfrm>
+          <a:prstGeom prst="rect">
+            <a:avLst/>
+          </a:prstGeom>
+          <a:noFill/>
+          <a:ln/>
+        </p:spPr>
+        <p:txBody>
+          <a:bodyPr wrap="square" lIns="0" tIns="0" rIns="0" bIns="0" rtlCol="0" anchor="t">
+            <a:spAutoFit/>
+          </a:bodyPr>
+          <a:lstStyle/>
+          <a:p>
+            <a:r>
+              <a:rPr lang="ko-KR" altLang="en-US" sz="2000" b="1" kern="0" spc="3" smtClean="0">
+                <a:solidFill>
+                  <a:srgbClr val="FFFFFF"/>
+                </a:solidFill>
+                <a:latin typeface="Space Grotesk Bold" pitchFamily="34" charset="0"/>
+              </a:rPr>
+              <a:t>시놉시스</a:t>
+            </a:r>
+            <a:endParaRPr lang="en-US" sz="2000" dirty="0">
+              <a:solidFill>
+                <a:srgbClr val="FFFFFF"/>
+              </a:solidFill>
+            </a:endParaRPr>
+          </a:p>
+        </p:txBody>
+      </p:sp>
+      <p:sp>
+        <p:nvSpPr>
+          <p:cNvPr id="85" name="Text 3"/>
+          <p:cNvSpPr/>
+          <p:nvPr/>
+        </p:nvSpPr>
+        <p:spPr>
+          <a:xfrm>
+            <a:off x="6351633" y="1919288"/>
+            <a:ext cx="5257562" cy="2031325"/>
+          </a:xfrm>
+          <a:prstGeom prst="rect">
+            <a:avLst/>
+          </a:prstGeom>
+          <a:noFill/>
+          <a:ln/>
+        </p:spPr>
+        <p:txBody>
+          <a:bodyPr wrap="square" lIns="0" tIns="0" rIns="0" bIns="0" rtlCol="0" anchor="t">
+            <a:spAutoFit/>
+          </a:bodyPr>
+          <a:lstStyle/>
+          <a:p>
+            <a:pPr>
+              <a:lnSpc>
+                <a:spcPct val="120000"/>
+              </a:lnSpc>
+            </a:pPr>
+            <a:r>
+              <a:rPr lang="ko-KR" altLang="en-US" sz="1000" b="1">
+                <a:solidFill>
+                  <a:schemeClr val="bg1"/>
+                </a:solidFill>
+              </a:rPr>
+              <a:t>평범한 일상에서 시작된 차한해의 여정은</a:t>
+            </a:r>
+            <a:br>
+              <a:rPr lang="ko-KR" altLang="en-US" sz="1000" b="1">
+                <a:solidFill>
+                  <a:schemeClr val="bg1"/>
+                </a:solidFill>
+              </a:rPr>
+            </a:br>
+            <a:r>
+              <a:rPr lang="ko-KR" altLang="en-US" sz="1000" b="1">
+                <a:solidFill>
+                  <a:schemeClr val="bg1"/>
+                </a:solidFill>
+              </a:rPr>
+              <a:t>공원에 나타난 균열과 괴물의 출현을 계기로 재난으로 </a:t>
+            </a:r>
+            <a:r>
+              <a:rPr lang="ko-KR" altLang="en-US" sz="1000" b="1">
+                <a:solidFill>
+                  <a:schemeClr val="bg1"/>
+                </a:solidFill>
+              </a:rPr>
+              <a:t>확장된다</a:t>
+            </a:r>
+            <a:r>
+              <a:rPr lang="en-US" altLang="ko-KR" sz="1000" b="1" smtClean="0">
+                <a:solidFill>
+                  <a:schemeClr val="bg1"/>
+                </a:solidFill>
+              </a:rPr>
+              <a:t>.</a:t>
+            </a:r>
+          </a:p>
+          <a:p>
+            <a:pPr>
+              <a:lnSpc>
+                <a:spcPct val="120000"/>
+              </a:lnSpc>
+            </a:pPr>
+            <a:endParaRPr lang="ko-KR" altLang="en-US" sz="1000">
+              <a:solidFill>
+                <a:schemeClr val="bg1"/>
+              </a:solidFill>
+            </a:endParaRPr>
+          </a:p>
+          <a:p>
+            <a:pPr>
+              <a:lnSpc>
+                <a:spcPct val="120000"/>
+              </a:lnSpc>
+            </a:pPr>
+            <a:r>
+              <a:rPr lang="ko-KR" altLang="en-US" sz="1000">
+                <a:solidFill>
+                  <a:schemeClr val="bg1"/>
+                </a:solidFill>
+              </a:rPr>
+              <a:t>세상은 괴물을 처치할 수 있는 힘이 ‘선의’와 관련되어 있음을 알게 </a:t>
+            </a:r>
+            <a:r>
+              <a:rPr lang="ko-KR" altLang="en-US" sz="1000">
+                <a:solidFill>
+                  <a:schemeClr val="bg1"/>
+                </a:solidFill>
+              </a:rPr>
+              <a:t>되고</a:t>
+            </a:r>
+            <a:r>
+              <a:rPr lang="en-US" altLang="ko-KR" sz="1000" smtClean="0">
+                <a:solidFill>
+                  <a:schemeClr val="bg1"/>
+                </a:solidFill>
+              </a:rPr>
+              <a:t>,</a:t>
+            </a:r>
+            <a:r>
+              <a:rPr lang="en-US" altLang="ko-KR" sz="1000">
+                <a:solidFill>
+                  <a:schemeClr val="bg1"/>
+                </a:solidFill>
+              </a:rPr>
+              <a:t/>
+            </a:r>
+            <a:br>
+              <a:rPr lang="en-US" altLang="ko-KR" sz="1000">
+                <a:solidFill>
+                  <a:schemeClr val="bg1"/>
+                </a:solidFill>
+              </a:rPr>
+            </a:br>
+            <a:r>
+              <a:rPr lang="ko-KR" altLang="en-US" sz="1000">
+                <a:solidFill>
+                  <a:schemeClr val="bg1"/>
+                </a:solidFill>
+              </a:rPr>
+              <a:t>사람들은 선의 수치를 측정해 등급화하기 </a:t>
+            </a:r>
+            <a:r>
+              <a:rPr lang="ko-KR" altLang="en-US" sz="1000">
+                <a:solidFill>
+                  <a:schemeClr val="bg1"/>
+                </a:solidFill>
+              </a:rPr>
+              <a:t>시작한다</a:t>
+            </a:r>
+            <a:r>
+              <a:rPr lang="en-US" altLang="ko-KR" sz="1000" smtClean="0">
+                <a:solidFill>
+                  <a:schemeClr val="bg1"/>
+                </a:solidFill>
+              </a:rPr>
+              <a:t>.</a:t>
+            </a:r>
+          </a:p>
+          <a:p>
+            <a:pPr>
+              <a:lnSpc>
+                <a:spcPct val="120000"/>
+              </a:lnSpc>
+            </a:pPr>
+            <a:endParaRPr lang="en-US" altLang="ko-KR" sz="1000">
+              <a:solidFill>
+                <a:schemeClr val="bg1"/>
+              </a:solidFill>
+            </a:endParaRPr>
+          </a:p>
+          <a:p>
+            <a:pPr>
+              <a:lnSpc>
+                <a:spcPct val="120000"/>
+              </a:lnSpc>
+            </a:pPr>
+            <a:r>
+              <a:rPr lang="ko-KR" altLang="en-US" sz="1000">
+                <a:solidFill>
+                  <a:schemeClr val="bg1"/>
+                </a:solidFill>
+              </a:rPr>
+              <a:t>무한에 가까운 선의를 가진 차한해는 점점 더 많은 기대와 희생을 요구받고</a:t>
+            </a:r>
+            <a:r>
+              <a:rPr lang="en-US" altLang="ko-KR" sz="1000">
+                <a:solidFill>
+                  <a:schemeClr val="bg1"/>
+                </a:solidFill>
+              </a:rPr>
+              <a:t>,</a:t>
+            </a:r>
+            <a:br>
+              <a:rPr lang="en-US" altLang="ko-KR" sz="1000">
+                <a:solidFill>
+                  <a:schemeClr val="bg1"/>
+                </a:solidFill>
+              </a:rPr>
+            </a:br>
+            <a:r>
+              <a:rPr lang="ko-KR" altLang="en-US" sz="1000">
+                <a:solidFill>
+                  <a:schemeClr val="bg1"/>
+                </a:solidFill>
+              </a:rPr>
+              <a:t>플레이어는 재난 대응</a:t>
+            </a:r>
+            <a:r>
+              <a:rPr lang="en-US" altLang="ko-KR" sz="1000">
+                <a:solidFill>
+                  <a:schemeClr val="bg1"/>
+                </a:solidFill>
+              </a:rPr>
+              <a:t>, </a:t>
+            </a:r>
+            <a:r>
+              <a:rPr lang="ko-KR" altLang="en-US" sz="1000">
+                <a:solidFill>
+                  <a:schemeClr val="bg1"/>
+                </a:solidFill>
+              </a:rPr>
+              <a:t>폐교 조사</a:t>
+            </a:r>
+            <a:r>
+              <a:rPr lang="en-US" altLang="ko-KR" sz="1000">
+                <a:solidFill>
+                  <a:schemeClr val="bg1"/>
+                </a:solidFill>
+              </a:rPr>
+              <a:t>, </a:t>
+            </a:r>
+            <a:r>
+              <a:rPr lang="ko-KR" altLang="en-US" sz="1000">
+                <a:solidFill>
+                  <a:schemeClr val="bg1"/>
+                </a:solidFill>
+              </a:rPr>
+              <a:t>균열 탐색을 통해 괴물의 정체와 선의의 </a:t>
+            </a:r>
+            <a:r>
+              <a:rPr lang="ko-KR" altLang="en-US" sz="1000">
+                <a:solidFill>
+                  <a:schemeClr val="bg1"/>
+                </a:solidFill>
+              </a:rPr>
+              <a:t>의미를 </a:t>
+            </a:r>
+            <a:r>
+              <a:rPr lang="ko-KR" altLang="en-US" sz="1000" smtClean="0">
+                <a:solidFill>
+                  <a:schemeClr val="bg1"/>
+                </a:solidFill>
+              </a:rPr>
+              <a:t>마주한다</a:t>
+            </a:r>
+            <a:r>
+              <a:rPr lang="en-US" altLang="ko-KR" sz="1000" smtClean="0">
+                <a:solidFill>
+                  <a:schemeClr val="bg1"/>
+                </a:solidFill>
+              </a:rPr>
+              <a:t>.</a:t>
+            </a:r>
+          </a:p>
+          <a:p>
+            <a:pPr>
+              <a:lnSpc>
+                <a:spcPct val="120000"/>
+              </a:lnSpc>
+            </a:pPr>
+            <a:endParaRPr lang="en-US" altLang="ko-KR" sz="1000">
+              <a:solidFill>
+                <a:schemeClr val="bg1"/>
+              </a:solidFill>
+            </a:endParaRPr>
+          </a:p>
+          <a:p>
+            <a:pPr>
+              <a:lnSpc>
+                <a:spcPct val="120000"/>
+              </a:lnSpc>
+            </a:pPr>
+            <a:r>
+              <a:rPr lang="ko-KR" altLang="en-US" sz="1000">
+                <a:solidFill>
+                  <a:schemeClr val="bg1"/>
+                </a:solidFill>
+              </a:rPr>
+              <a:t>마지막 순간</a:t>
+            </a:r>
+            <a:r>
+              <a:rPr lang="en-US" altLang="ko-KR" sz="1000">
+                <a:solidFill>
+                  <a:schemeClr val="bg1"/>
+                </a:solidFill>
+              </a:rPr>
+              <a:t>, </a:t>
+            </a:r>
+            <a:r>
+              <a:rPr lang="ko-KR" altLang="en-US" sz="1000">
+                <a:solidFill>
+                  <a:schemeClr val="bg1"/>
+                </a:solidFill>
+              </a:rPr>
+              <a:t>플레이어는</a:t>
+            </a:r>
+            <a:br>
+              <a:rPr lang="ko-KR" altLang="en-US" sz="1000">
+                <a:solidFill>
+                  <a:schemeClr val="bg1"/>
+                </a:solidFill>
+              </a:rPr>
+            </a:br>
+            <a:r>
+              <a:rPr lang="ko-KR" altLang="en-US" sz="1000" b="1">
+                <a:solidFill>
+                  <a:schemeClr val="bg1"/>
+                </a:solidFill>
+              </a:rPr>
+              <a:t>강요된 희생</a:t>
+            </a:r>
+            <a:r>
+              <a:rPr lang="ko-KR" altLang="en-US" sz="1000">
+                <a:solidFill>
+                  <a:schemeClr val="bg1"/>
+                </a:solidFill>
+              </a:rPr>
+              <a:t>과 </a:t>
+            </a:r>
+            <a:r>
+              <a:rPr lang="ko-KR" altLang="en-US" sz="1000" b="1">
+                <a:solidFill>
+                  <a:schemeClr val="bg1"/>
+                </a:solidFill>
+              </a:rPr>
+              <a:t>진짜 선택</a:t>
+            </a:r>
+            <a:r>
+              <a:rPr lang="ko-KR" altLang="en-US" sz="1000">
+                <a:solidFill>
+                  <a:schemeClr val="bg1"/>
+                </a:solidFill>
+              </a:rPr>
+              <a:t> 사이에서 결말을 결정하게 된다</a:t>
+            </a:r>
+            <a:r>
+              <a:rPr lang="en-US" altLang="ko-KR" sz="1000">
+                <a:solidFill>
+                  <a:schemeClr val="bg1"/>
+                </a:solidFill>
+              </a:rPr>
+              <a:t>.</a:t>
+            </a:r>
+          </a:p>
+        </p:txBody>
+      </p:sp>
+      <p:pic>
+        <p:nvPicPr>
+          <p:cNvPr id="3" name="그림 2"/>
+          <p:cNvPicPr>
+            <a:picLocks noChangeAspect="1"/>
+          </p:cNvPicPr>
+          <p:nvPr/>
+        </p:nvPicPr>
+        <p:blipFill rotWithShape="1">
+          <a:blip r:embed="rId12" cstate="print">
+            <a:extLst>
+              <a:ext uri="{28A0092B-C50C-407E-A947-70E740481C1C}">
+                <a14:useLocalDpi xmlns:a14="http://schemas.microsoft.com/office/drawing/2010/main" val="0"/>
+              </a:ext>
+            </a:extLst>
+          </a:blip>
+          <a:srcRect b="26022"/>
+          <a:stretch/>
+        </p:blipFill>
+        <p:spPr>
+          <a:xfrm>
+            <a:off x="6351632" y="4299052"/>
+            <a:ext cx="5272556" cy="2195219"/>
+          </a:xfrm>
+          <a:prstGeom prst="rect">
+            <a:avLst/>
+          </a:prstGeom>
+        </p:spPr>
+      </p:pic>
     </p:spTree>
   </p:cSld>
   <p:clrMapOvr>
     <a:masterClrMapping/>
   </p:clrMapOvr>
+  <p:timing>
+    <p:tnLst>
+      <p:par>
+        <p:cTn id="1" dur="indefinite" restart="never" nodeType="tmRoot"/>
+      </p:par>
+    </p:tnLst>
+  </p:timing>
+</p:sld>
+</file>
+
+<file path=ppt/slides/slide12.xml><?xml version="1.0" encoding="utf-8"?>
+<p:sld xmlns:a="http://schemas.openxmlformats.org/drawingml/2006/main" xmlns:r="http://schemas.openxmlformats.org/officeDocument/2006/relationships" xmlns:p="http://schemas.openxmlformats.org/presentationml/2006/main">
+  <p:cSld>
+    <p:bg>
+      <p:bgPr>
+        <a:solidFill>
+          <a:srgbClr val="F4F1EA"/>
+        </a:solidFill>
+        <a:effectLst/>
+      </p:bgPr>
+    </p:bg>
+    <p:spTree>
+      <p:nvGrpSpPr>
+        <p:cNvPr id="1" name=""/>
+        <p:cNvGrpSpPr/>
+        <p:nvPr/>
+      </p:nvGrpSpPr>
+      <p:grpSpPr>
+        <a:xfrm>
+          <a:off x="0" y="0"/>
+          <a:ext cx="0" cy="0"/>
+          <a:chOff x="0" y="0"/>
+          <a:chExt cx="0" cy="0"/>
+        </a:xfrm>
+      </p:grpSpPr>
+      <p:sp>
+        <p:nvSpPr>
+          <p:cNvPr id="5" name="Shape 20"/>
+          <p:cNvSpPr/>
+          <p:nvPr/>
+        </p:nvSpPr>
+        <p:spPr>
+          <a:xfrm>
+            <a:off x="857251" y="2674144"/>
+            <a:ext cx="10477500" cy="19051"/>
+          </a:xfrm>
+          <a:prstGeom prst="rect">
+            <a:avLst/>
+          </a:prstGeom>
+          <a:solidFill>
+            <a:srgbClr val="000000"/>
+          </a:solidFill>
+          <a:ln/>
+        </p:spPr>
+      </p:sp>
+      <p:sp>
+        <p:nvSpPr>
+          <p:cNvPr id="42" name="Shape 57"/>
+          <p:cNvSpPr/>
+          <p:nvPr/>
+        </p:nvSpPr>
+        <p:spPr>
+          <a:xfrm>
+            <a:off x="8191500" y="2293144"/>
+            <a:ext cx="1524000" cy="757237"/>
+          </a:xfrm>
+          <a:prstGeom prst="rect">
+            <a:avLst/>
+          </a:prstGeom>
+          <a:solidFill>
+            <a:srgbClr val="F4F1EA"/>
+          </a:solidFill>
+          <a:ln/>
+        </p:spPr>
+      </p:sp>
+      <p:sp>
+        <p:nvSpPr>
+          <p:cNvPr id="75" name="Shape 21"/>
+          <p:cNvSpPr/>
+          <p:nvPr/>
+        </p:nvSpPr>
+        <p:spPr>
+          <a:xfrm>
+            <a:off x="10097401" y="2296429"/>
+            <a:ext cx="1524000" cy="793825"/>
+          </a:xfrm>
+          <a:prstGeom prst="rect">
+            <a:avLst/>
+          </a:prstGeom>
+          <a:solidFill>
+            <a:srgbClr val="F4F1EA"/>
+          </a:solidFill>
+          <a:ln/>
+        </p:spPr>
+      </p:sp>
+      <p:sp>
+        <p:nvSpPr>
+          <p:cNvPr id="76" name="Shape 35"/>
+          <p:cNvSpPr/>
+          <p:nvPr/>
+        </p:nvSpPr>
+        <p:spPr>
+          <a:xfrm>
+            <a:off x="10103413" y="2299172"/>
+            <a:ext cx="1524000" cy="626269"/>
+          </a:xfrm>
+          <a:prstGeom prst="rect">
+            <a:avLst/>
+          </a:prstGeom>
+          <a:solidFill>
+            <a:srgbClr val="F4F1EA"/>
+          </a:solidFill>
+          <a:ln/>
+        </p:spPr>
+      </p:sp>
+      <p:sp>
+        <p:nvSpPr>
+          <p:cNvPr id="72" name="Shape 35"/>
+          <p:cNvSpPr/>
+          <p:nvPr/>
+        </p:nvSpPr>
+        <p:spPr>
+          <a:xfrm>
+            <a:off x="8198784" y="2291184"/>
+            <a:ext cx="1524000" cy="626269"/>
+          </a:xfrm>
+          <a:prstGeom prst="rect">
+            <a:avLst/>
+          </a:prstGeom>
+          <a:solidFill>
+            <a:srgbClr val="F4F1EA"/>
+          </a:solidFill>
+          <a:ln/>
+        </p:spPr>
+      </p:sp>
+      <p:sp>
+        <p:nvSpPr>
+          <p:cNvPr id="68" name="Shape 21"/>
+          <p:cNvSpPr/>
+          <p:nvPr/>
+        </p:nvSpPr>
+        <p:spPr>
+          <a:xfrm>
+            <a:off x="6283990" y="2289894"/>
+            <a:ext cx="1524000" cy="793825"/>
+          </a:xfrm>
+          <a:prstGeom prst="rect">
+            <a:avLst/>
+          </a:prstGeom>
+          <a:solidFill>
+            <a:srgbClr val="F4F1EA"/>
+          </a:solidFill>
+          <a:ln/>
+        </p:spPr>
+      </p:sp>
+      <p:sp>
+        <p:nvSpPr>
+          <p:cNvPr id="66" name="Shape 21"/>
+          <p:cNvSpPr/>
+          <p:nvPr/>
+        </p:nvSpPr>
+        <p:spPr>
+          <a:xfrm>
+            <a:off x="4375488" y="2290401"/>
+            <a:ext cx="1524000" cy="793825"/>
+          </a:xfrm>
+          <a:prstGeom prst="rect">
+            <a:avLst/>
+          </a:prstGeom>
+          <a:solidFill>
+            <a:srgbClr val="F4F1EA"/>
+          </a:solidFill>
+          <a:ln/>
+        </p:spPr>
+      </p:sp>
+      <p:sp>
+        <p:nvSpPr>
+          <p:cNvPr id="64" name="Shape 21"/>
+          <p:cNvSpPr/>
+          <p:nvPr/>
+        </p:nvSpPr>
+        <p:spPr>
+          <a:xfrm>
+            <a:off x="2476501" y="2292500"/>
+            <a:ext cx="1524000" cy="793825"/>
+          </a:xfrm>
+          <a:prstGeom prst="rect">
+            <a:avLst/>
+          </a:prstGeom>
+          <a:solidFill>
+            <a:srgbClr val="F4F1EA"/>
+          </a:solidFill>
+          <a:ln/>
+        </p:spPr>
+      </p:sp>
+      <p:sp>
+        <p:nvSpPr>
+          <p:cNvPr id="2" name="직사각형 1">
+            <a:extLst>
+              <a:ext uri="{FF2B5EF4-FFF2-40B4-BE49-F238E27FC236}">
+                <a16:creationId xmlns:a16="http://schemas.microsoft.com/office/drawing/2014/main" id="{3AB0D54F-59A7-F0A7-706C-4DF788184FC0}"/>
+              </a:ext>
+            </a:extLst>
+          </p:cNvPr>
+          <p:cNvSpPr/>
+          <p:nvPr/>
+        </p:nvSpPr>
+        <p:spPr>
+          <a:xfrm>
+            <a:off x="0" y="0"/>
+            <a:ext cx="12192000" cy="6858000"/>
+          </a:xfrm>
+          <a:prstGeom prst="rect">
+            <a:avLst/>
+          </a:prstGeom>
+          <a:noFill/>
+          <a:ln w="38100">
+            <a:solidFill>
+              <a:srgbClr val="001F3E"/>
+            </a:solidFill>
+          </a:ln>
+        </p:spPr>
+        <p:style>
+          <a:lnRef idx="2">
+            <a:schemeClr val="accent1">
+              <a:shade val="15000"/>
+            </a:schemeClr>
+          </a:lnRef>
+          <a:fillRef idx="1">
+            <a:schemeClr val="accent1"/>
+          </a:fillRef>
+          <a:effectRef idx="0">
+            <a:schemeClr val="accent1"/>
+          </a:effectRef>
+          <a:fontRef idx="minor">
+            <a:schemeClr val="lt1"/>
+          </a:fontRef>
+        </p:style>
+        <p:txBody>
+          <a:bodyPr rtlCol="0" anchor="ctr"/>
+          <a:lstStyle/>
+          <a:p>
+            <a:pPr algn="ctr"/>
+            <a:endParaRPr lang="ko-KR" altLang="en-US"/>
+          </a:p>
+        </p:txBody>
+      </p:sp>
+      <p:sp>
+        <p:nvSpPr>
+          <p:cNvPr id="3" name="Text 18"/>
+          <p:cNvSpPr/>
+          <p:nvPr/>
+        </p:nvSpPr>
+        <p:spPr>
+          <a:xfrm>
+            <a:off x="343664" y="344424"/>
+            <a:ext cx="4376737" cy="384721"/>
+          </a:xfrm>
+          <a:prstGeom prst="rect">
+            <a:avLst/>
+          </a:prstGeom>
+          <a:noFill/>
+          <a:ln/>
+        </p:spPr>
+        <p:txBody>
+          <a:bodyPr wrap="square" lIns="0" tIns="0" rIns="0" bIns="0" rtlCol="0" anchor="t">
+            <a:spAutoFit/>
+          </a:bodyPr>
+          <a:lstStyle/>
+          <a:p>
+            <a:r>
+              <a:rPr lang="ko-KR" altLang="en-US" sz="2500" b="1" kern="0" spc="4" smtClean="0">
+                <a:solidFill>
+                  <a:srgbClr val="000000"/>
+                </a:solidFill>
+                <a:latin typeface="Space Grotesk Bold" pitchFamily="34" charset="0"/>
+              </a:rPr>
+              <a:t>퀘스트 전개 도면</a:t>
+            </a:r>
+            <a:endParaRPr lang="en-US" sz="2500" dirty="0"/>
+          </a:p>
+        </p:txBody>
+      </p:sp>
+      <p:sp>
+        <p:nvSpPr>
+          <p:cNvPr id="4" name="Shape 17"/>
+          <p:cNvSpPr/>
+          <p:nvPr/>
+        </p:nvSpPr>
+        <p:spPr>
+          <a:xfrm>
+            <a:off x="209551" y="891825"/>
+            <a:ext cx="11772900" cy="19051"/>
+          </a:xfrm>
+          <a:prstGeom prst="rect">
+            <a:avLst/>
+          </a:prstGeom>
+          <a:solidFill>
+            <a:srgbClr val="000000"/>
+          </a:solidFill>
+          <a:ln/>
+        </p:spPr>
+      </p:sp>
+      <p:sp>
+        <p:nvSpPr>
+          <p:cNvPr id="6" name="Shape 21"/>
+          <p:cNvSpPr/>
+          <p:nvPr/>
+        </p:nvSpPr>
+        <p:spPr>
+          <a:xfrm>
+            <a:off x="571500" y="2293144"/>
+            <a:ext cx="1524000" cy="793825"/>
+          </a:xfrm>
+          <a:prstGeom prst="rect">
+            <a:avLst/>
+          </a:prstGeom>
+          <a:solidFill>
+            <a:srgbClr val="F4F1EA"/>
+          </a:solidFill>
+          <a:ln/>
+        </p:spPr>
+      </p:sp>
+      <p:sp>
+        <p:nvSpPr>
+          <p:cNvPr id="10" name="Text 25"/>
+          <p:cNvSpPr/>
+          <p:nvPr/>
+        </p:nvSpPr>
+        <p:spPr>
+          <a:xfrm>
+            <a:off x="720938" y="2436782"/>
+            <a:ext cx="822341" cy="230832"/>
+          </a:xfrm>
+          <a:prstGeom prst="rect">
+            <a:avLst/>
+          </a:prstGeom>
+          <a:noFill/>
+          <a:ln/>
+        </p:spPr>
+        <p:txBody>
+          <a:bodyPr wrap="none" lIns="0" tIns="0" rIns="0" bIns="0" rtlCol="0" anchor="t">
+            <a:spAutoFit/>
+          </a:bodyPr>
+          <a:lstStyle/>
+          <a:p>
+            <a:r>
+              <a:rPr lang="en-US" sz="1500" b="1" dirty="0">
+                <a:solidFill>
+                  <a:srgbClr val="000000"/>
+                </a:solidFill>
+                <a:latin typeface="Space Grotesk Bold" pitchFamily="34" charset="0"/>
+                <a:ea typeface="Space Grotesk Bold" pitchFamily="34" charset="-122"/>
+                <a:cs typeface="Space Grotesk Bold" pitchFamily="34" charset="-120"/>
+              </a:rPr>
+              <a:t>일상 조작</a:t>
+            </a:r>
+            <a:endParaRPr lang="en-US" sz="1500" dirty="0"/>
+          </a:p>
+        </p:txBody>
+      </p:sp>
+      <p:sp>
+        <p:nvSpPr>
+          <p:cNvPr id="11" name="Text 26"/>
+          <p:cNvSpPr/>
+          <p:nvPr/>
+        </p:nvSpPr>
+        <p:spPr>
+          <a:xfrm>
+            <a:off x="720938" y="2727906"/>
+            <a:ext cx="676467" cy="153888"/>
+          </a:xfrm>
+          <a:prstGeom prst="rect">
+            <a:avLst/>
+          </a:prstGeom>
+          <a:noFill/>
+          <a:ln/>
+        </p:spPr>
+        <p:txBody>
+          <a:bodyPr wrap="none" lIns="0" tIns="0" rIns="0" bIns="0" rtlCol="0" anchor="t">
+            <a:spAutoFit/>
+          </a:bodyPr>
+          <a:lstStyle/>
+          <a:p>
+            <a:r>
+              <a:rPr lang="ko-KR" altLang="en-US" sz="1000" smtClean="0">
+                <a:solidFill>
+                  <a:srgbClr val="000000">
+                    <a:alpha val="70000"/>
+                  </a:srgbClr>
+                </a:solidFill>
+                <a:latin typeface="monospace" pitchFamily="34" charset="0"/>
+              </a:rPr>
+              <a:t>조작법 학습</a:t>
+            </a:r>
+            <a:endParaRPr lang="en-US" sz="1000" dirty="0"/>
+          </a:p>
+        </p:txBody>
+      </p:sp>
+      <p:sp>
+        <p:nvSpPr>
+          <p:cNvPr id="12" name="Shape 27"/>
+          <p:cNvSpPr/>
+          <p:nvPr/>
+        </p:nvSpPr>
+        <p:spPr>
+          <a:xfrm>
+            <a:off x="2476500" y="2293144"/>
+            <a:ext cx="1524000" cy="626269"/>
+          </a:xfrm>
+          <a:prstGeom prst="rect">
+            <a:avLst/>
+          </a:prstGeom>
+          <a:solidFill>
+            <a:srgbClr val="F4F1EA"/>
+          </a:solidFill>
+          <a:ln/>
+        </p:spPr>
+      </p:sp>
+      <p:sp>
+        <p:nvSpPr>
+          <p:cNvPr id="13" name="Shape 28"/>
+          <p:cNvSpPr/>
+          <p:nvPr/>
+        </p:nvSpPr>
+        <p:spPr>
+          <a:xfrm>
+            <a:off x="2447925" y="2264569"/>
+            <a:ext cx="95251" cy="95251"/>
+          </a:xfrm>
+          <a:prstGeom prst="rect">
+            <a:avLst/>
+          </a:prstGeom>
+          <a:solidFill>
+            <a:srgbClr val="001F3E"/>
+          </a:solidFill>
+          <a:ln/>
+        </p:spPr>
+      </p:sp>
+      <p:sp>
+        <p:nvSpPr>
+          <p:cNvPr id="16" name="Text 31"/>
+          <p:cNvSpPr/>
+          <p:nvPr/>
+        </p:nvSpPr>
+        <p:spPr>
+          <a:xfrm>
+            <a:off x="2644666" y="2436782"/>
+            <a:ext cx="1014701" cy="230832"/>
+          </a:xfrm>
+          <a:prstGeom prst="rect">
+            <a:avLst/>
+          </a:prstGeom>
+          <a:noFill/>
+          <a:ln/>
+        </p:spPr>
+        <p:txBody>
+          <a:bodyPr wrap="none" lIns="0" tIns="0" rIns="0" bIns="0" rtlCol="0" anchor="t">
+            <a:spAutoFit/>
+          </a:bodyPr>
+          <a:lstStyle/>
+          <a:p>
+            <a:r>
+              <a:rPr lang="en-US" sz="1500" b="1" dirty="0">
+                <a:solidFill>
+                  <a:srgbClr val="000000"/>
+                </a:solidFill>
+                <a:latin typeface="Space Grotesk Bold" pitchFamily="34" charset="0"/>
+                <a:ea typeface="Space Grotesk Bold" pitchFamily="34" charset="-122"/>
+                <a:cs typeface="Space Grotesk Bold" pitchFamily="34" charset="-120"/>
+              </a:rPr>
+              <a:t>동생 심부름</a:t>
+            </a:r>
+            <a:endParaRPr lang="en-US" sz="1500" dirty="0"/>
+          </a:p>
+        </p:txBody>
+      </p:sp>
+      <p:sp>
+        <p:nvSpPr>
+          <p:cNvPr id="17" name="Text 32"/>
+          <p:cNvSpPr/>
+          <p:nvPr/>
+        </p:nvSpPr>
+        <p:spPr>
+          <a:xfrm>
+            <a:off x="2628895" y="2728820"/>
+            <a:ext cx="618759" cy="153888"/>
+          </a:xfrm>
+          <a:prstGeom prst="rect">
+            <a:avLst/>
+          </a:prstGeom>
+          <a:noFill/>
+          <a:ln/>
+        </p:spPr>
+        <p:txBody>
+          <a:bodyPr wrap="none" lIns="0" tIns="0" rIns="0" bIns="0" rtlCol="0" anchor="t">
+            <a:spAutoFit/>
+          </a:bodyPr>
+          <a:lstStyle/>
+          <a:p>
+            <a:r>
+              <a:rPr lang="ko-KR" altLang="en-US" sz="1000" smtClean="0">
+                <a:solidFill>
+                  <a:srgbClr val="000000">
+                    <a:alpha val="70000"/>
+                  </a:srgbClr>
+                </a:solidFill>
+                <a:latin typeface="monospace" pitchFamily="34" charset="0"/>
+                <a:ea typeface="monospace" pitchFamily="34" charset="-122"/>
+                <a:cs typeface="monospace" pitchFamily="34" charset="-120"/>
+              </a:rPr>
+              <a:t>장소</a:t>
+            </a:r>
+            <a:r>
+              <a:rPr lang="en-US" sz="1000" smtClean="0">
+                <a:solidFill>
+                  <a:srgbClr val="000000">
+                    <a:alpha val="70000"/>
+                  </a:srgbClr>
+                </a:solidFill>
+                <a:latin typeface="monospace" pitchFamily="34" charset="0"/>
+                <a:ea typeface="monospace" pitchFamily="34" charset="-122"/>
+                <a:cs typeface="monospace" pitchFamily="34" charset="-120"/>
+              </a:rPr>
+              <a:t> : </a:t>
+            </a:r>
+            <a:r>
+              <a:rPr lang="ko-KR" altLang="en-US" sz="1000" smtClean="0">
+                <a:solidFill>
+                  <a:srgbClr val="000000">
+                    <a:alpha val="70000"/>
+                  </a:srgbClr>
+                </a:solidFill>
+                <a:latin typeface="monospace" pitchFamily="34" charset="0"/>
+                <a:ea typeface="monospace" pitchFamily="34" charset="-122"/>
+                <a:cs typeface="monospace" pitchFamily="34" charset="-120"/>
+              </a:rPr>
+              <a:t>도심</a:t>
+            </a:r>
+            <a:endParaRPr lang="en-US" sz="1000" dirty="0"/>
+          </a:p>
+        </p:txBody>
+      </p:sp>
+      <p:sp>
+        <p:nvSpPr>
+          <p:cNvPr id="18" name="Text 33"/>
+          <p:cNvSpPr/>
+          <p:nvPr/>
+        </p:nvSpPr>
+        <p:spPr>
+          <a:xfrm>
+            <a:off x="2705099" y="3044932"/>
+            <a:ext cx="347852" cy="153888"/>
+          </a:xfrm>
+          <a:prstGeom prst="rect">
+            <a:avLst/>
+          </a:prstGeom>
+          <a:noFill/>
+          <a:ln/>
+        </p:spPr>
+        <p:txBody>
+          <a:bodyPr wrap="none" lIns="0" tIns="0" rIns="0" bIns="0" rtlCol="0" anchor="t">
+            <a:spAutoFit/>
+          </a:bodyPr>
+          <a:lstStyle/>
+          <a:p>
+            <a:r>
+              <a:rPr lang="en-US" sz="1000" b="1" smtClean="0">
+                <a:solidFill>
+                  <a:srgbClr val="4272D2"/>
+                </a:solidFill>
+                <a:latin typeface="Space Grotesk Bold" pitchFamily="34" charset="0"/>
+                <a:ea typeface="Space Grotesk Bold" pitchFamily="34" charset="-122"/>
+                <a:cs typeface="Space Grotesk Bold" pitchFamily="34" charset="-120"/>
+              </a:rPr>
+              <a:t>Sub 1</a:t>
+            </a:r>
+            <a:endParaRPr lang="en-US" sz="1000" dirty="0">
+              <a:solidFill>
+                <a:srgbClr val="4272D2"/>
+              </a:solidFill>
+            </a:endParaRPr>
+          </a:p>
+        </p:txBody>
+      </p:sp>
+      <p:sp>
+        <p:nvSpPr>
+          <p:cNvPr id="19" name="Text 34"/>
+          <p:cNvSpPr/>
+          <p:nvPr/>
+        </p:nvSpPr>
+        <p:spPr>
+          <a:xfrm>
+            <a:off x="2705100" y="3244927"/>
+            <a:ext cx="676467" cy="153888"/>
+          </a:xfrm>
+          <a:prstGeom prst="rect">
+            <a:avLst/>
+          </a:prstGeom>
+          <a:noFill/>
+          <a:ln/>
+        </p:spPr>
+        <p:txBody>
+          <a:bodyPr wrap="none" lIns="0" tIns="0" rIns="0" bIns="0" rtlCol="0" anchor="t">
+            <a:spAutoFit/>
+          </a:bodyPr>
+          <a:lstStyle/>
+          <a:p>
+            <a:r>
+              <a:rPr lang="en-US" sz="1000" dirty="0">
+                <a:solidFill>
+                  <a:srgbClr val="000000"/>
+                </a:solidFill>
+                <a:latin typeface="Space Grotesk Bold" pitchFamily="34" charset="0"/>
+                <a:ea typeface="Space Grotesk Bold" pitchFamily="34" charset="-122"/>
+                <a:cs typeface="Space Grotesk Bold" pitchFamily="34" charset="-120"/>
+              </a:rPr>
+              <a:t>치킨 심부름</a:t>
+            </a:r>
+            <a:endParaRPr lang="en-US" sz="1000" dirty="0"/>
+          </a:p>
+        </p:txBody>
+      </p:sp>
+      <p:sp>
+        <p:nvSpPr>
+          <p:cNvPr id="20" name="Shape 35"/>
+          <p:cNvSpPr/>
+          <p:nvPr/>
+        </p:nvSpPr>
+        <p:spPr>
+          <a:xfrm>
+            <a:off x="4381500" y="2293144"/>
+            <a:ext cx="1524000" cy="626269"/>
+          </a:xfrm>
+          <a:prstGeom prst="rect">
+            <a:avLst/>
+          </a:prstGeom>
+          <a:solidFill>
+            <a:srgbClr val="F4F1EA"/>
+          </a:solidFill>
+          <a:ln/>
+        </p:spPr>
+      </p:sp>
+      <p:sp>
+        <p:nvSpPr>
+          <p:cNvPr id="21" name="Shape 36"/>
+          <p:cNvSpPr/>
+          <p:nvPr/>
+        </p:nvSpPr>
+        <p:spPr>
+          <a:xfrm>
+            <a:off x="4352925" y="2264569"/>
+            <a:ext cx="95251" cy="95251"/>
+          </a:xfrm>
+          <a:prstGeom prst="rect">
+            <a:avLst/>
+          </a:prstGeom>
+          <a:solidFill>
+            <a:srgbClr val="001F3E"/>
+          </a:solidFill>
+          <a:ln/>
+        </p:spPr>
+      </p:sp>
+      <p:sp>
+        <p:nvSpPr>
+          <p:cNvPr id="24" name="Text 39"/>
+          <p:cNvSpPr/>
+          <p:nvPr/>
+        </p:nvSpPr>
+        <p:spPr>
+          <a:xfrm>
+            <a:off x="4549665" y="2436782"/>
+            <a:ext cx="822341" cy="230832"/>
+          </a:xfrm>
+          <a:prstGeom prst="rect">
+            <a:avLst/>
+          </a:prstGeom>
+          <a:noFill/>
+          <a:ln/>
+        </p:spPr>
+        <p:txBody>
+          <a:bodyPr wrap="none" lIns="0" tIns="0" rIns="0" bIns="0" rtlCol="0" anchor="t">
+            <a:spAutoFit/>
+          </a:bodyPr>
+          <a:lstStyle/>
+          <a:p>
+            <a:r>
+              <a:rPr lang="en-US" sz="1500" b="1" dirty="0">
+                <a:solidFill>
+                  <a:srgbClr val="000000"/>
+                </a:solidFill>
+                <a:latin typeface="Space Grotesk Bold" pitchFamily="34" charset="0"/>
+                <a:ea typeface="Space Grotesk Bold" pitchFamily="34" charset="-122"/>
+                <a:cs typeface="Space Grotesk Bold" pitchFamily="34" charset="-120"/>
+              </a:rPr>
+              <a:t>공원 청소</a:t>
+            </a:r>
+            <a:endParaRPr lang="en-US" sz="1500" dirty="0"/>
+          </a:p>
+        </p:txBody>
+      </p:sp>
+      <p:sp>
+        <p:nvSpPr>
+          <p:cNvPr id="25" name="Text 40"/>
+          <p:cNvSpPr/>
+          <p:nvPr/>
+        </p:nvSpPr>
+        <p:spPr>
+          <a:xfrm>
+            <a:off x="4533895" y="2728820"/>
+            <a:ext cx="910506" cy="153888"/>
+          </a:xfrm>
+          <a:prstGeom prst="rect">
+            <a:avLst/>
+          </a:prstGeom>
+          <a:noFill/>
+          <a:ln/>
+        </p:spPr>
+        <p:txBody>
+          <a:bodyPr wrap="none" lIns="0" tIns="0" rIns="0" bIns="0" rtlCol="0" anchor="t">
+            <a:spAutoFit/>
+          </a:bodyPr>
+          <a:lstStyle/>
+          <a:p>
+            <a:r>
+              <a:rPr lang="ko-KR" altLang="en-US" sz="1000" smtClean="0">
+                <a:solidFill>
+                  <a:srgbClr val="000000">
+                    <a:alpha val="70000"/>
+                  </a:srgbClr>
+                </a:solidFill>
+                <a:latin typeface="monospace" pitchFamily="34" charset="0"/>
+                <a:ea typeface="monospace" pitchFamily="34" charset="-122"/>
+                <a:cs typeface="monospace" pitchFamily="34" charset="-120"/>
+              </a:rPr>
+              <a:t>장소 </a:t>
+            </a:r>
+            <a:r>
+              <a:rPr lang="en-US" altLang="ko-KR" sz="1000" smtClean="0">
+                <a:solidFill>
+                  <a:srgbClr val="000000">
+                    <a:alpha val="70000"/>
+                  </a:srgbClr>
+                </a:solidFill>
+                <a:latin typeface="monospace" pitchFamily="34" charset="0"/>
+                <a:ea typeface="monospace" pitchFamily="34" charset="-122"/>
+                <a:cs typeface="monospace" pitchFamily="34" charset="-120"/>
+              </a:rPr>
+              <a:t>: </a:t>
+            </a:r>
+            <a:r>
+              <a:rPr lang="ko-KR" altLang="en-US" sz="1000" smtClean="0">
+                <a:solidFill>
+                  <a:srgbClr val="000000">
+                    <a:alpha val="70000"/>
+                  </a:srgbClr>
+                </a:solidFill>
+                <a:latin typeface="monospace" pitchFamily="34" charset="0"/>
+                <a:ea typeface="monospace" pitchFamily="34" charset="-122"/>
+                <a:cs typeface="monospace" pitchFamily="34" charset="-120"/>
+              </a:rPr>
+              <a:t>도심 공원</a:t>
+            </a:r>
+            <a:endParaRPr lang="en-US" sz="1000" dirty="0"/>
+          </a:p>
+        </p:txBody>
+      </p:sp>
+      <p:sp>
+        <p:nvSpPr>
+          <p:cNvPr id="26" name="Text 41"/>
+          <p:cNvSpPr/>
+          <p:nvPr/>
+        </p:nvSpPr>
+        <p:spPr>
+          <a:xfrm>
+            <a:off x="4610100" y="3044932"/>
+            <a:ext cx="347852" cy="153888"/>
+          </a:xfrm>
+          <a:prstGeom prst="rect">
+            <a:avLst/>
+          </a:prstGeom>
+          <a:noFill/>
+          <a:ln/>
+        </p:spPr>
+        <p:txBody>
+          <a:bodyPr wrap="none" lIns="0" tIns="0" rIns="0" bIns="0" rtlCol="0" anchor="t">
+            <a:spAutoFit/>
+          </a:bodyPr>
+          <a:lstStyle/>
+          <a:p>
+            <a:r>
+              <a:rPr lang="en-US" sz="1000" b="1" smtClean="0">
+                <a:solidFill>
+                  <a:srgbClr val="4272D2"/>
+                </a:solidFill>
+                <a:latin typeface="Space Grotesk Bold" pitchFamily="34" charset="0"/>
+                <a:ea typeface="Space Grotesk Bold" pitchFamily="34" charset="-122"/>
+                <a:cs typeface="Space Grotesk Bold" pitchFamily="34" charset="-120"/>
+              </a:rPr>
+              <a:t>Sub 1</a:t>
+            </a:r>
+            <a:endParaRPr lang="en-US" sz="1000" dirty="0">
+              <a:solidFill>
+                <a:srgbClr val="4272D2"/>
+              </a:solidFill>
+            </a:endParaRPr>
+          </a:p>
+        </p:txBody>
+      </p:sp>
+      <p:sp>
+        <p:nvSpPr>
+          <p:cNvPr id="27" name="Text 42"/>
+          <p:cNvSpPr/>
+          <p:nvPr/>
+        </p:nvSpPr>
+        <p:spPr>
+          <a:xfrm>
+            <a:off x="4610100" y="3244927"/>
+            <a:ext cx="839974" cy="153888"/>
+          </a:xfrm>
+          <a:prstGeom prst="rect">
+            <a:avLst/>
+          </a:prstGeom>
+          <a:noFill/>
+          <a:ln/>
+        </p:spPr>
+        <p:txBody>
+          <a:bodyPr wrap="none" lIns="0" tIns="0" rIns="0" bIns="0" rtlCol="0" anchor="t">
+            <a:spAutoFit/>
+          </a:bodyPr>
+          <a:lstStyle/>
+          <a:p>
+            <a:r>
+              <a:rPr lang="en-US" sz="1000" dirty="0">
+                <a:solidFill>
+                  <a:srgbClr val="000000"/>
+                </a:solidFill>
+                <a:latin typeface="Space Grotesk Bold" pitchFamily="34" charset="0"/>
+                <a:ea typeface="Space Grotesk Bold" pitchFamily="34" charset="-122"/>
+                <a:cs typeface="Space Grotesk Bold" pitchFamily="34" charset="-120"/>
+              </a:rPr>
+              <a:t>우정 반지 찾기</a:t>
+            </a:r>
+            <a:endParaRPr lang="en-US" sz="1000" dirty="0"/>
+          </a:p>
+        </p:txBody>
+      </p:sp>
+      <p:sp>
+        <p:nvSpPr>
+          <p:cNvPr id="28" name="Text 43"/>
+          <p:cNvSpPr/>
+          <p:nvPr/>
+        </p:nvSpPr>
+        <p:spPr>
+          <a:xfrm>
+            <a:off x="4610100" y="3648450"/>
+            <a:ext cx="347852" cy="153888"/>
+          </a:xfrm>
+          <a:prstGeom prst="rect">
+            <a:avLst/>
+          </a:prstGeom>
+          <a:noFill/>
+          <a:ln/>
+        </p:spPr>
+        <p:txBody>
+          <a:bodyPr wrap="none" lIns="0" tIns="0" rIns="0" bIns="0" rtlCol="0" anchor="t">
+            <a:spAutoFit/>
+          </a:bodyPr>
+          <a:lstStyle/>
+          <a:p>
+            <a:r>
+              <a:rPr lang="en-US" sz="1000" b="1" smtClean="0">
+                <a:solidFill>
+                  <a:srgbClr val="4272D2"/>
+                </a:solidFill>
+                <a:latin typeface="Space Grotesk Bold" pitchFamily="34" charset="0"/>
+                <a:ea typeface="Space Grotesk Bold" pitchFamily="34" charset="-122"/>
+                <a:cs typeface="Space Grotesk Bold" pitchFamily="34" charset="-120"/>
+              </a:rPr>
+              <a:t>Sub 2</a:t>
+            </a:r>
+            <a:endParaRPr lang="en-US" sz="1000" dirty="0">
+              <a:solidFill>
+                <a:srgbClr val="4272D2"/>
+              </a:solidFill>
+            </a:endParaRPr>
+          </a:p>
+        </p:txBody>
+      </p:sp>
+      <p:sp>
+        <p:nvSpPr>
+          <p:cNvPr id="29" name="Text 44"/>
+          <p:cNvSpPr/>
+          <p:nvPr/>
+        </p:nvSpPr>
+        <p:spPr>
+          <a:xfrm>
+            <a:off x="4610099" y="3844759"/>
+            <a:ext cx="711733" cy="153888"/>
+          </a:xfrm>
+          <a:prstGeom prst="rect">
+            <a:avLst/>
+          </a:prstGeom>
+          <a:noFill/>
+          <a:ln/>
+        </p:spPr>
+        <p:txBody>
+          <a:bodyPr wrap="none" lIns="0" tIns="0" rIns="0" bIns="0" rtlCol="0" anchor="t">
+            <a:spAutoFit/>
+          </a:bodyPr>
+          <a:lstStyle/>
+          <a:p>
+            <a:r>
+              <a:rPr lang="en-US" sz="1000" dirty="0">
+                <a:solidFill>
+                  <a:srgbClr val="000000"/>
+                </a:solidFill>
+                <a:latin typeface="Space Grotesk Bold" pitchFamily="34" charset="0"/>
+                <a:ea typeface="Space Grotesk Bold" pitchFamily="34" charset="-122"/>
+                <a:cs typeface="Space Grotesk Bold" pitchFamily="34" charset="-120"/>
+              </a:rPr>
+              <a:t>균열 앞 사진</a:t>
+            </a:r>
+            <a:endParaRPr lang="en-US" sz="1000" dirty="0"/>
+          </a:p>
+        </p:txBody>
+      </p:sp>
+      <p:sp>
+        <p:nvSpPr>
+          <p:cNvPr id="30" name="Shape 45"/>
+          <p:cNvSpPr/>
+          <p:nvPr/>
+        </p:nvSpPr>
+        <p:spPr>
+          <a:xfrm>
+            <a:off x="6286500" y="2293144"/>
+            <a:ext cx="1524000" cy="626269"/>
+          </a:xfrm>
+          <a:prstGeom prst="rect">
+            <a:avLst/>
+          </a:prstGeom>
+          <a:solidFill>
+            <a:srgbClr val="F4F1EA"/>
+          </a:solidFill>
+          <a:ln/>
+        </p:spPr>
+      </p:sp>
+      <p:sp>
+        <p:nvSpPr>
+          <p:cNvPr id="34" name="Text 49"/>
+          <p:cNvSpPr/>
+          <p:nvPr/>
+        </p:nvSpPr>
+        <p:spPr>
+          <a:xfrm>
+            <a:off x="6454665" y="2436782"/>
+            <a:ext cx="822341" cy="230832"/>
+          </a:xfrm>
+          <a:prstGeom prst="rect">
+            <a:avLst/>
+          </a:prstGeom>
+          <a:noFill/>
+          <a:ln/>
+        </p:spPr>
+        <p:txBody>
+          <a:bodyPr wrap="none" lIns="0" tIns="0" rIns="0" bIns="0" rtlCol="0" anchor="t">
+            <a:spAutoFit/>
+          </a:bodyPr>
+          <a:lstStyle/>
+          <a:p>
+            <a:r>
+              <a:rPr lang="en-US" sz="1500" b="1" dirty="0">
+                <a:solidFill>
+                  <a:srgbClr val="F1B641"/>
+                </a:solidFill>
+                <a:latin typeface="Space Grotesk Bold" pitchFamily="34" charset="0"/>
+                <a:ea typeface="Space Grotesk Bold" pitchFamily="34" charset="-122"/>
+                <a:cs typeface="Space Grotesk Bold" pitchFamily="34" charset="-120"/>
+              </a:rPr>
+              <a:t>재난 대응</a:t>
+            </a:r>
+            <a:endParaRPr lang="en-US" sz="1500" dirty="0">
+              <a:solidFill>
+                <a:srgbClr val="F1B641"/>
+              </a:solidFill>
+            </a:endParaRPr>
+          </a:p>
+        </p:txBody>
+      </p:sp>
+      <p:sp>
+        <p:nvSpPr>
+          <p:cNvPr id="35" name="Text 50"/>
+          <p:cNvSpPr/>
+          <p:nvPr/>
+        </p:nvSpPr>
+        <p:spPr>
+          <a:xfrm>
+            <a:off x="6438895" y="2728820"/>
+            <a:ext cx="1038746" cy="153888"/>
+          </a:xfrm>
+          <a:prstGeom prst="rect">
+            <a:avLst/>
+          </a:prstGeom>
+          <a:noFill/>
+          <a:ln/>
+        </p:spPr>
+        <p:txBody>
+          <a:bodyPr wrap="none" lIns="0" tIns="0" rIns="0" bIns="0" rtlCol="0" anchor="t">
+            <a:spAutoFit/>
+          </a:bodyPr>
+          <a:lstStyle/>
+          <a:p>
+            <a:r>
+              <a:rPr lang="ko-KR" altLang="en-US" sz="1000" smtClean="0">
+                <a:solidFill>
+                  <a:srgbClr val="000000">
+                    <a:alpha val="70000"/>
+                  </a:srgbClr>
+                </a:solidFill>
+                <a:latin typeface="monospace" pitchFamily="34" charset="0"/>
+                <a:ea typeface="monospace" pitchFamily="34" charset="-122"/>
+                <a:cs typeface="monospace" pitchFamily="34" charset="-120"/>
+              </a:rPr>
+              <a:t>장소 </a:t>
+            </a:r>
+            <a:r>
+              <a:rPr lang="en-US" altLang="ko-KR" sz="1000" smtClean="0">
+                <a:solidFill>
+                  <a:srgbClr val="000000">
+                    <a:alpha val="70000"/>
+                  </a:srgbClr>
+                </a:solidFill>
+                <a:latin typeface="monospace" pitchFamily="34" charset="0"/>
+                <a:ea typeface="monospace" pitchFamily="34" charset="-122"/>
+                <a:cs typeface="monospace" pitchFamily="34" charset="-120"/>
+              </a:rPr>
+              <a:t>: </a:t>
+            </a:r>
+            <a:r>
+              <a:rPr lang="ko-KR" altLang="en-US" sz="1000" smtClean="0">
+                <a:solidFill>
+                  <a:srgbClr val="000000">
+                    <a:alpha val="70000"/>
+                  </a:srgbClr>
+                </a:solidFill>
+                <a:latin typeface="monospace" pitchFamily="34" charset="0"/>
+                <a:ea typeface="monospace" pitchFamily="34" charset="-122"/>
+                <a:cs typeface="monospace" pitchFamily="34" charset="-120"/>
+              </a:rPr>
+              <a:t>붕괴된 도시</a:t>
+            </a:r>
+            <a:endParaRPr lang="en-US" sz="1000" dirty="0"/>
+          </a:p>
+        </p:txBody>
+      </p:sp>
+      <p:sp>
+        <p:nvSpPr>
+          <p:cNvPr id="36" name="Text 51"/>
+          <p:cNvSpPr/>
+          <p:nvPr/>
+        </p:nvSpPr>
+        <p:spPr>
+          <a:xfrm>
+            <a:off x="6515100" y="3044932"/>
+            <a:ext cx="347852" cy="153888"/>
+          </a:xfrm>
+          <a:prstGeom prst="rect">
+            <a:avLst/>
+          </a:prstGeom>
+          <a:noFill/>
+          <a:ln/>
+        </p:spPr>
+        <p:txBody>
+          <a:bodyPr wrap="none" lIns="0" tIns="0" rIns="0" bIns="0" rtlCol="0" anchor="t">
+            <a:spAutoFit/>
+          </a:bodyPr>
+          <a:lstStyle/>
+          <a:p>
+            <a:r>
+              <a:rPr lang="en-US" sz="1000" b="1" smtClean="0">
+                <a:solidFill>
+                  <a:srgbClr val="4272D2"/>
+                </a:solidFill>
+                <a:latin typeface="Space Grotesk Bold" pitchFamily="34" charset="0"/>
+                <a:ea typeface="Space Grotesk Bold" pitchFamily="34" charset="-122"/>
+                <a:cs typeface="Space Grotesk Bold" pitchFamily="34" charset="-120"/>
+              </a:rPr>
+              <a:t>Sub 1</a:t>
+            </a:r>
+            <a:endParaRPr lang="en-US" sz="1000" dirty="0">
+              <a:solidFill>
+                <a:srgbClr val="4272D2"/>
+              </a:solidFill>
+            </a:endParaRPr>
+          </a:p>
+        </p:txBody>
+      </p:sp>
+      <p:sp>
+        <p:nvSpPr>
+          <p:cNvPr id="37" name="Text 52"/>
+          <p:cNvSpPr/>
+          <p:nvPr/>
+        </p:nvSpPr>
+        <p:spPr>
+          <a:xfrm>
+            <a:off x="6515100" y="3244927"/>
+            <a:ext cx="676467" cy="153888"/>
+          </a:xfrm>
+          <a:prstGeom prst="rect">
+            <a:avLst/>
+          </a:prstGeom>
+          <a:noFill/>
+          <a:ln/>
+        </p:spPr>
+        <p:txBody>
+          <a:bodyPr wrap="none" lIns="0" tIns="0" rIns="0" bIns="0" rtlCol="0" anchor="t">
+            <a:spAutoFit/>
+          </a:bodyPr>
+          <a:lstStyle/>
+          <a:p>
+            <a:r>
+              <a:rPr lang="en-US" sz="1000" dirty="0">
+                <a:solidFill>
+                  <a:srgbClr val="000000"/>
+                </a:solidFill>
+                <a:latin typeface="Space Grotesk Bold" pitchFamily="34" charset="0"/>
+                <a:ea typeface="Space Grotesk Bold" pitchFamily="34" charset="-122"/>
+                <a:cs typeface="Space Grotesk Bold" pitchFamily="34" charset="-120"/>
+              </a:rPr>
+              <a:t>대피소 지원</a:t>
+            </a:r>
+            <a:endParaRPr lang="en-US" sz="1000" dirty="0"/>
+          </a:p>
+        </p:txBody>
+      </p:sp>
+      <p:sp>
+        <p:nvSpPr>
+          <p:cNvPr id="38" name="Text 53"/>
+          <p:cNvSpPr/>
+          <p:nvPr/>
+        </p:nvSpPr>
+        <p:spPr>
+          <a:xfrm>
+            <a:off x="6515100" y="3648450"/>
+            <a:ext cx="347852" cy="153888"/>
+          </a:xfrm>
+          <a:prstGeom prst="rect">
+            <a:avLst/>
+          </a:prstGeom>
+          <a:noFill/>
+          <a:ln/>
+        </p:spPr>
+        <p:txBody>
+          <a:bodyPr wrap="none" lIns="0" tIns="0" rIns="0" bIns="0" rtlCol="0" anchor="t">
+            <a:spAutoFit/>
+          </a:bodyPr>
+          <a:lstStyle/>
+          <a:p>
+            <a:r>
+              <a:rPr lang="en-US" sz="1000" b="1" smtClean="0">
+                <a:solidFill>
+                  <a:srgbClr val="4272D2"/>
+                </a:solidFill>
+                <a:latin typeface="Space Grotesk Bold" pitchFamily="34" charset="0"/>
+                <a:ea typeface="Space Grotesk Bold" pitchFamily="34" charset="-122"/>
+                <a:cs typeface="Space Grotesk Bold" pitchFamily="34" charset="-120"/>
+              </a:rPr>
+              <a:t>Sub 2</a:t>
+            </a:r>
+            <a:endParaRPr lang="en-US" sz="1000" dirty="0">
+              <a:solidFill>
+                <a:srgbClr val="4272D2"/>
+              </a:solidFill>
+            </a:endParaRPr>
+          </a:p>
+        </p:txBody>
+      </p:sp>
+      <p:sp>
+        <p:nvSpPr>
+          <p:cNvPr id="39" name="Text 54"/>
+          <p:cNvSpPr/>
+          <p:nvPr/>
+        </p:nvSpPr>
+        <p:spPr>
+          <a:xfrm>
+            <a:off x="6515100" y="3844759"/>
+            <a:ext cx="676467" cy="153888"/>
+          </a:xfrm>
+          <a:prstGeom prst="rect">
+            <a:avLst/>
+          </a:prstGeom>
+          <a:noFill/>
+          <a:ln/>
+        </p:spPr>
+        <p:txBody>
+          <a:bodyPr wrap="none" lIns="0" tIns="0" rIns="0" bIns="0" rtlCol="0" anchor="t">
+            <a:spAutoFit/>
+          </a:bodyPr>
+          <a:lstStyle/>
+          <a:p>
+            <a:r>
+              <a:rPr lang="en-US" sz="1000" dirty="0">
+                <a:solidFill>
+                  <a:srgbClr val="000000"/>
+                </a:solidFill>
+                <a:latin typeface="Space Grotesk Bold" pitchFamily="34" charset="0"/>
+                <a:ea typeface="Space Grotesk Bold" pitchFamily="34" charset="-122"/>
+                <a:cs typeface="Space Grotesk Bold" pitchFamily="34" charset="-120"/>
+              </a:rPr>
+              <a:t>강아지 찾기</a:t>
+            </a:r>
+            <a:endParaRPr lang="en-US" sz="1000" dirty="0"/>
+          </a:p>
+        </p:txBody>
+      </p:sp>
+      <p:sp>
+        <p:nvSpPr>
+          <p:cNvPr id="40" name="Text 55"/>
+          <p:cNvSpPr/>
+          <p:nvPr/>
+        </p:nvSpPr>
+        <p:spPr>
+          <a:xfrm>
+            <a:off x="6515100" y="4248282"/>
+            <a:ext cx="347852" cy="153888"/>
+          </a:xfrm>
+          <a:prstGeom prst="rect">
+            <a:avLst/>
+          </a:prstGeom>
+          <a:noFill/>
+          <a:ln/>
+        </p:spPr>
+        <p:txBody>
+          <a:bodyPr wrap="none" lIns="0" tIns="0" rIns="0" bIns="0" rtlCol="0" anchor="t">
+            <a:spAutoFit/>
+          </a:bodyPr>
+          <a:lstStyle/>
+          <a:p>
+            <a:r>
+              <a:rPr lang="en-US" sz="1000" b="1" smtClean="0">
+                <a:solidFill>
+                  <a:srgbClr val="4272D2"/>
+                </a:solidFill>
+                <a:latin typeface="Space Grotesk Bold" pitchFamily="34" charset="0"/>
+                <a:ea typeface="Space Grotesk Bold" pitchFamily="34" charset="-122"/>
+                <a:cs typeface="Space Grotesk Bold" pitchFamily="34" charset="-120"/>
+              </a:rPr>
+              <a:t>Sub 2</a:t>
+            </a:r>
+            <a:endParaRPr lang="en-US" sz="1000" dirty="0">
+              <a:solidFill>
+                <a:srgbClr val="4272D2"/>
+              </a:solidFill>
+            </a:endParaRPr>
+          </a:p>
+        </p:txBody>
+      </p:sp>
+      <p:sp>
+        <p:nvSpPr>
+          <p:cNvPr id="41" name="Text 56"/>
+          <p:cNvSpPr/>
+          <p:nvPr/>
+        </p:nvSpPr>
+        <p:spPr>
+          <a:xfrm>
+            <a:off x="6515100" y="4454466"/>
+            <a:ext cx="676467" cy="153888"/>
+          </a:xfrm>
+          <a:prstGeom prst="rect">
+            <a:avLst/>
+          </a:prstGeom>
+          <a:noFill/>
+          <a:ln/>
+        </p:spPr>
+        <p:txBody>
+          <a:bodyPr wrap="none" lIns="0" tIns="0" rIns="0" bIns="0" rtlCol="0" anchor="t">
+            <a:spAutoFit/>
+          </a:bodyPr>
+          <a:lstStyle/>
+          <a:p>
+            <a:r>
+              <a:rPr lang="en-US" sz="1000" dirty="0">
+                <a:solidFill>
+                  <a:srgbClr val="000000"/>
+                </a:solidFill>
+                <a:latin typeface="Space Grotesk Bold" pitchFamily="34" charset="0"/>
+                <a:ea typeface="Space Grotesk Bold" pitchFamily="34" charset="-122"/>
+                <a:cs typeface="Space Grotesk Bold" pitchFamily="34" charset="-120"/>
+              </a:rPr>
+              <a:t>괴물 목격담</a:t>
+            </a:r>
+            <a:endParaRPr lang="en-US" sz="1000" dirty="0"/>
+          </a:p>
+        </p:txBody>
+      </p:sp>
+      <p:sp>
+        <p:nvSpPr>
+          <p:cNvPr id="43" name="Shape 58"/>
+          <p:cNvSpPr/>
+          <p:nvPr/>
+        </p:nvSpPr>
+        <p:spPr>
+          <a:xfrm>
+            <a:off x="8162925" y="2264569"/>
+            <a:ext cx="95251" cy="95251"/>
+          </a:xfrm>
+          <a:prstGeom prst="rect">
+            <a:avLst/>
+          </a:prstGeom>
+          <a:solidFill>
+            <a:srgbClr val="001F3E"/>
+          </a:solidFill>
+          <a:ln/>
+        </p:spPr>
+      </p:sp>
+      <p:sp>
+        <p:nvSpPr>
+          <p:cNvPr id="46" name="Text 61"/>
+          <p:cNvSpPr/>
+          <p:nvPr/>
+        </p:nvSpPr>
+        <p:spPr>
+          <a:xfrm>
+            <a:off x="8359665" y="2436782"/>
+            <a:ext cx="822341" cy="230832"/>
+          </a:xfrm>
+          <a:prstGeom prst="rect">
+            <a:avLst/>
+          </a:prstGeom>
+          <a:noFill/>
+          <a:ln/>
+        </p:spPr>
+        <p:txBody>
+          <a:bodyPr wrap="none" lIns="0" tIns="0" rIns="0" bIns="0" rtlCol="0" anchor="t">
+            <a:spAutoFit/>
+          </a:bodyPr>
+          <a:lstStyle/>
+          <a:p>
+            <a:r>
+              <a:rPr lang="en-US" sz="1500" b="1" dirty="0">
+                <a:solidFill>
+                  <a:srgbClr val="000000"/>
+                </a:solidFill>
+                <a:latin typeface="Space Grotesk Bold" pitchFamily="34" charset="0"/>
+                <a:ea typeface="Space Grotesk Bold" pitchFamily="34" charset="-122"/>
+                <a:cs typeface="Space Grotesk Bold" pitchFamily="34" charset="-120"/>
+              </a:rPr>
+              <a:t>폐교 챕터</a:t>
+            </a:r>
+            <a:endParaRPr lang="en-US" sz="1500" dirty="0"/>
+          </a:p>
+        </p:txBody>
+      </p:sp>
+      <p:sp>
+        <p:nvSpPr>
+          <p:cNvPr id="47" name="Text 62"/>
+          <p:cNvSpPr/>
+          <p:nvPr/>
+        </p:nvSpPr>
+        <p:spPr>
+          <a:xfrm>
+            <a:off x="8343895" y="2728820"/>
+            <a:ext cx="618759" cy="153888"/>
+          </a:xfrm>
+          <a:prstGeom prst="rect">
+            <a:avLst/>
+          </a:prstGeom>
+          <a:noFill/>
+          <a:ln/>
+        </p:spPr>
+        <p:txBody>
+          <a:bodyPr wrap="none" lIns="0" tIns="0" rIns="0" bIns="0" rtlCol="0" anchor="t">
+            <a:spAutoFit/>
+          </a:bodyPr>
+          <a:lstStyle/>
+          <a:p>
+            <a:r>
+              <a:rPr lang="ko-KR" altLang="en-US" sz="1000" smtClean="0">
+                <a:solidFill>
+                  <a:srgbClr val="000000">
+                    <a:alpha val="70000"/>
+                  </a:srgbClr>
+                </a:solidFill>
+                <a:latin typeface="monospace" pitchFamily="34" charset="0"/>
+                <a:ea typeface="monospace" pitchFamily="34" charset="-122"/>
+                <a:cs typeface="monospace" pitchFamily="34" charset="-120"/>
+              </a:rPr>
+              <a:t>장소 </a:t>
+            </a:r>
+            <a:r>
+              <a:rPr lang="en-US" altLang="ko-KR" sz="1000" smtClean="0">
+                <a:solidFill>
+                  <a:srgbClr val="000000">
+                    <a:alpha val="70000"/>
+                  </a:srgbClr>
+                </a:solidFill>
+                <a:latin typeface="monospace" pitchFamily="34" charset="0"/>
+                <a:ea typeface="monospace" pitchFamily="34" charset="-122"/>
+                <a:cs typeface="monospace" pitchFamily="34" charset="-120"/>
+              </a:rPr>
+              <a:t>: </a:t>
+            </a:r>
+            <a:r>
+              <a:rPr lang="ko-KR" altLang="en-US" sz="1000" smtClean="0">
+                <a:solidFill>
+                  <a:srgbClr val="000000">
+                    <a:alpha val="70000"/>
+                  </a:srgbClr>
+                </a:solidFill>
+                <a:latin typeface="monospace" pitchFamily="34" charset="0"/>
+                <a:ea typeface="monospace" pitchFamily="34" charset="-122"/>
+                <a:cs typeface="monospace" pitchFamily="34" charset="-120"/>
+              </a:rPr>
+              <a:t>폐교</a:t>
+            </a:r>
+            <a:endParaRPr lang="en-US" sz="1000" dirty="0"/>
+          </a:p>
+        </p:txBody>
+      </p:sp>
+      <p:sp>
+        <p:nvSpPr>
+          <p:cNvPr id="48" name="Text 63"/>
+          <p:cNvSpPr/>
+          <p:nvPr/>
+        </p:nvSpPr>
+        <p:spPr>
+          <a:xfrm>
+            <a:off x="8420099" y="3044932"/>
+            <a:ext cx="347852" cy="153888"/>
+          </a:xfrm>
+          <a:prstGeom prst="rect">
+            <a:avLst/>
+          </a:prstGeom>
+          <a:noFill/>
+          <a:ln/>
+        </p:spPr>
+        <p:txBody>
+          <a:bodyPr wrap="none" lIns="0" tIns="0" rIns="0" bIns="0" rtlCol="0" anchor="t">
+            <a:spAutoFit/>
+          </a:bodyPr>
+          <a:lstStyle/>
+          <a:p>
+            <a:r>
+              <a:rPr lang="en-US" sz="1000" b="1" smtClean="0">
+                <a:solidFill>
+                  <a:srgbClr val="4272D2"/>
+                </a:solidFill>
+                <a:latin typeface="Space Grotesk Bold" pitchFamily="34" charset="0"/>
+                <a:ea typeface="Space Grotesk Bold" pitchFamily="34" charset="-122"/>
+                <a:cs typeface="Space Grotesk Bold" pitchFamily="34" charset="-120"/>
+              </a:rPr>
+              <a:t>Sub 1</a:t>
+            </a:r>
+            <a:endParaRPr lang="en-US" sz="1000" dirty="0">
+              <a:solidFill>
+                <a:srgbClr val="4272D2"/>
+              </a:solidFill>
+            </a:endParaRPr>
+          </a:p>
+        </p:txBody>
+      </p:sp>
+      <p:sp>
+        <p:nvSpPr>
+          <p:cNvPr id="49" name="Text 64"/>
+          <p:cNvSpPr/>
+          <p:nvPr/>
+        </p:nvSpPr>
+        <p:spPr>
+          <a:xfrm>
+            <a:off x="8420100" y="3244927"/>
+            <a:ext cx="839974" cy="153888"/>
+          </a:xfrm>
+          <a:prstGeom prst="rect">
+            <a:avLst/>
+          </a:prstGeom>
+          <a:noFill/>
+          <a:ln/>
+        </p:spPr>
+        <p:txBody>
+          <a:bodyPr wrap="none" lIns="0" tIns="0" rIns="0" bIns="0" rtlCol="0" anchor="t">
+            <a:spAutoFit/>
+          </a:bodyPr>
+          <a:lstStyle/>
+          <a:p>
+            <a:r>
+              <a:rPr lang="en-US" sz="1000" dirty="0">
+                <a:solidFill>
+                  <a:srgbClr val="000000"/>
+                </a:solidFill>
+                <a:latin typeface="Space Grotesk Bold" pitchFamily="34" charset="0"/>
+                <a:ea typeface="Space Grotesk Bold" pitchFamily="34" charset="-122"/>
+                <a:cs typeface="Space Grotesk Bold" pitchFamily="34" charset="-120"/>
+              </a:rPr>
+              <a:t>기억 단서 수집</a:t>
+            </a:r>
+            <a:endParaRPr lang="en-US" sz="1000" dirty="0"/>
+          </a:p>
+        </p:txBody>
+      </p:sp>
+      <p:sp>
+        <p:nvSpPr>
+          <p:cNvPr id="50" name="Shape 65"/>
+          <p:cNvSpPr/>
+          <p:nvPr/>
+        </p:nvSpPr>
+        <p:spPr>
+          <a:xfrm>
+            <a:off x="10096500" y="2293144"/>
+            <a:ext cx="1524000" cy="626269"/>
+          </a:xfrm>
+          <a:prstGeom prst="rect">
+            <a:avLst/>
+          </a:prstGeom>
+          <a:solidFill>
+            <a:srgbClr val="F4F1EA"/>
+          </a:solidFill>
+          <a:ln/>
+        </p:spPr>
+      </p:sp>
+      <p:sp>
+        <p:nvSpPr>
+          <p:cNvPr id="54" name="Text 69"/>
+          <p:cNvSpPr/>
+          <p:nvPr/>
+        </p:nvSpPr>
+        <p:spPr>
+          <a:xfrm>
+            <a:off x="10264665" y="2436782"/>
+            <a:ext cx="822341" cy="230832"/>
+          </a:xfrm>
+          <a:prstGeom prst="rect">
+            <a:avLst/>
+          </a:prstGeom>
+          <a:noFill/>
+          <a:ln/>
+        </p:spPr>
+        <p:txBody>
+          <a:bodyPr wrap="none" lIns="0" tIns="0" rIns="0" bIns="0" rtlCol="0" anchor="t">
+            <a:spAutoFit/>
+          </a:bodyPr>
+          <a:lstStyle/>
+          <a:p>
+            <a:r>
+              <a:rPr lang="en-US" sz="1500" b="1" dirty="0">
+                <a:solidFill>
+                  <a:srgbClr val="001F3E"/>
+                </a:solidFill>
+                <a:latin typeface="Space Grotesk Bold" pitchFamily="34" charset="0"/>
+                <a:ea typeface="Space Grotesk Bold" pitchFamily="34" charset="-122"/>
+                <a:cs typeface="Space Grotesk Bold" pitchFamily="34" charset="-120"/>
+              </a:rPr>
+              <a:t>균열 탐색</a:t>
+            </a:r>
+            <a:endParaRPr lang="en-US" sz="1500" dirty="0">
+              <a:solidFill>
+                <a:srgbClr val="001F3E"/>
+              </a:solidFill>
+            </a:endParaRPr>
+          </a:p>
+        </p:txBody>
+      </p:sp>
+      <p:sp>
+        <p:nvSpPr>
+          <p:cNvPr id="55" name="Text 70"/>
+          <p:cNvSpPr/>
+          <p:nvPr/>
+        </p:nvSpPr>
+        <p:spPr>
+          <a:xfrm>
+            <a:off x="10248895" y="2728820"/>
+            <a:ext cx="910506" cy="153888"/>
+          </a:xfrm>
+          <a:prstGeom prst="rect">
+            <a:avLst/>
+          </a:prstGeom>
+          <a:noFill/>
+          <a:ln/>
+        </p:spPr>
+        <p:txBody>
+          <a:bodyPr wrap="none" lIns="0" tIns="0" rIns="0" bIns="0" rtlCol="0" anchor="t">
+            <a:spAutoFit/>
+          </a:bodyPr>
+          <a:lstStyle/>
+          <a:p>
+            <a:r>
+              <a:rPr lang="ko-KR" altLang="en-US" sz="1000" smtClean="0">
+                <a:solidFill>
+                  <a:srgbClr val="000000">
+                    <a:alpha val="70000"/>
+                  </a:srgbClr>
+                </a:solidFill>
+                <a:latin typeface="monospace" pitchFamily="34" charset="0"/>
+                <a:ea typeface="monospace" pitchFamily="34" charset="-122"/>
+                <a:cs typeface="monospace" pitchFamily="34" charset="-120"/>
+              </a:rPr>
+              <a:t>장소 </a:t>
+            </a:r>
+            <a:r>
+              <a:rPr lang="en-US" altLang="ko-KR" sz="1000" smtClean="0">
+                <a:solidFill>
+                  <a:srgbClr val="000000">
+                    <a:alpha val="70000"/>
+                  </a:srgbClr>
+                </a:solidFill>
+                <a:latin typeface="monospace" pitchFamily="34" charset="0"/>
+                <a:ea typeface="monospace" pitchFamily="34" charset="-122"/>
+                <a:cs typeface="monospace" pitchFamily="34" charset="-120"/>
+              </a:rPr>
+              <a:t>: </a:t>
+            </a:r>
+            <a:r>
+              <a:rPr lang="ko-KR" altLang="en-US" sz="1000" smtClean="0">
+                <a:solidFill>
+                  <a:srgbClr val="000000">
+                    <a:alpha val="70000"/>
+                  </a:srgbClr>
+                </a:solidFill>
+                <a:latin typeface="monospace" pitchFamily="34" charset="0"/>
+                <a:ea typeface="monospace" pitchFamily="34" charset="-122"/>
+                <a:cs typeface="monospace" pitchFamily="34" charset="-120"/>
+              </a:rPr>
+              <a:t>균열 내부</a:t>
+            </a:r>
+            <a:endParaRPr lang="en-US" sz="1000" dirty="0"/>
+          </a:p>
+        </p:txBody>
+      </p:sp>
+      <p:sp>
+        <p:nvSpPr>
+          <p:cNvPr id="56" name="Text 71"/>
+          <p:cNvSpPr/>
+          <p:nvPr/>
+        </p:nvSpPr>
+        <p:spPr>
+          <a:xfrm>
+            <a:off x="10325099" y="3044932"/>
+            <a:ext cx="347852" cy="153888"/>
+          </a:xfrm>
+          <a:prstGeom prst="rect">
+            <a:avLst/>
+          </a:prstGeom>
+          <a:noFill/>
+          <a:ln/>
+        </p:spPr>
+        <p:txBody>
+          <a:bodyPr wrap="none" lIns="0" tIns="0" rIns="0" bIns="0" rtlCol="0" anchor="t">
+            <a:spAutoFit/>
+          </a:bodyPr>
+          <a:lstStyle/>
+          <a:p>
+            <a:r>
+              <a:rPr lang="en-US" sz="1000" b="1" smtClean="0">
+                <a:solidFill>
+                  <a:srgbClr val="001F3E"/>
+                </a:solidFill>
+                <a:latin typeface="Space Grotesk Bold" pitchFamily="34" charset="0"/>
+                <a:ea typeface="Space Grotesk Bold" pitchFamily="34" charset="-122"/>
+                <a:cs typeface="Space Grotesk Bold" pitchFamily="34" charset="-120"/>
+              </a:rPr>
+              <a:t>Sub 2</a:t>
+            </a:r>
+            <a:endParaRPr lang="en-US" sz="1000" dirty="0">
+              <a:solidFill>
+                <a:srgbClr val="001F3E"/>
+              </a:solidFill>
+            </a:endParaRPr>
+          </a:p>
+        </p:txBody>
+      </p:sp>
+      <p:sp>
+        <p:nvSpPr>
+          <p:cNvPr id="57" name="Text 72"/>
+          <p:cNvSpPr/>
+          <p:nvPr/>
+        </p:nvSpPr>
+        <p:spPr>
+          <a:xfrm>
+            <a:off x="10325100" y="3244927"/>
+            <a:ext cx="839974" cy="153888"/>
+          </a:xfrm>
+          <a:prstGeom prst="rect">
+            <a:avLst/>
+          </a:prstGeom>
+          <a:noFill/>
+          <a:ln/>
+        </p:spPr>
+        <p:txBody>
+          <a:bodyPr wrap="none" lIns="0" tIns="0" rIns="0" bIns="0" rtlCol="0" anchor="t">
+            <a:spAutoFit/>
+          </a:bodyPr>
+          <a:lstStyle/>
+          <a:p>
+            <a:r>
+              <a:rPr lang="en-US" sz="1000" dirty="0">
+                <a:solidFill>
+                  <a:srgbClr val="000000"/>
+                </a:solidFill>
+                <a:latin typeface="Space Grotesk Bold" pitchFamily="34" charset="0"/>
+                <a:ea typeface="Space Grotesk Bold" pitchFamily="34" charset="-122"/>
+                <a:cs typeface="Space Grotesk Bold" pitchFamily="34" charset="-120"/>
+              </a:rPr>
+              <a:t>기억 조각 수집</a:t>
+            </a:r>
+            <a:endParaRPr lang="en-US" sz="1000" dirty="0"/>
+          </a:p>
+        </p:txBody>
+      </p:sp>
+      <p:sp>
+        <p:nvSpPr>
+          <p:cNvPr id="58" name="Text 75"/>
+          <p:cNvSpPr/>
+          <p:nvPr/>
+        </p:nvSpPr>
+        <p:spPr>
+          <a:xfrm>
+            <a:off x="781052" y="6262103"/>
+            <a:ext cx="652423" cy="153888"/>
+          </a:xfrm>
+          <a:prstGeom prst="rect">
+            <a:avLst/>
+          </a:prstGeom>
+          <a:noFill/>
+          <a:ln/>
+        </p:spPr>
+        <p:txBody>
+          <a:bodyPr wrap="none" lIns="0" tIns="0" rIns="0" bIns="0" rtlCol="0" anchor="t">
+            <a:spAutoFit/>
+          </a:bodyPr>
+          <a:lstStyle/>
+          <a:p>
+            <a:r>
+              <a:rPr lang="en-US" sz="1000" smtClean="0">
+                <a:solidFill>
+                  <a:srgbClr val="000000"/>
+                </a:solidFill>
+                <a:latin typeface="monospace" pitchFamily="34" charset="0"/>
+                <a:ea typeface="monospace" pitchFamily="34" charset="-122"/>
+              </a:rPr>
+              <a:t>Main Quest</a:t>
+            </a:r>
+            <a:endParaRPr lang="en-US" sz="1000" dirty="0"/>
+          </a:p>
+        </p:txBody>
+      </p:sp>
+      <p:sp>
+        <p:nvSpPr>
+          <p:cNvPr id="59" name="Text 76"/>
+          <p:cNvSpPr/>
+          <p:nvPr/>
+        </p:nvSpPr>
+        <p:spPr>
+          <a:xfrm>
+            <a:off x="2095501" y="6262103"/>
+            <a:ext cx="426399" cy="153888"/>
+          </a:xfrm>
+          <a:prstGeom prst="rect">
+            <a:avLst/>
+          </a:prstGeom>
+          <a:noFill/>
+          <a:ln/>
+        </p:spPr>
+        <p:txBody>
+          <a:bodyPr wrap="none" lIns="0" tIns="0" rIns="0" bIns="0" rtlCol="0" anchor="t">
+            <a:spAutoFit/>
+          </a:bodyPr>
+          <a:lstStyle/>
+          <a:p>
+            <a:r>
+              <a:rPr lang="en-US" sz="1000" smtClean="0">
+                <a:solidFill>
+                  <a:srgbClr val="000000"/>
+                </a:solidFill>
+                <a:latin typeface="monospace" pitchFamily="34" charset="0"/>
+                <a:ea typeface="monospace" pitchFamily="34" charset="-122"/>
+                <a:cs typeface="monospace" pitchFamily="34" charset="-120"/>
+              </a:rPr>
+              <a:t>Tutorial</a:t>
+            </a:r>
+            <a:endParaRPr lang="en-US" sz="1000" dirty="0"/>
+          </a:p>
+        </p:txBody>
+      </p:sp>
+      <p:sp>
+        <p:nvSpPr>
+          <p:cNvPr id="60" name="Text 77"/>
+          <p:cNvSpPr/>
+          <p:nvPr/>
+        </p:nvSpPr>
+        <p:spPr>
+          <a:xfrm>
+            <a:off x="3238501" y="6262103"/>
+            <a:ext cx="601127" cy="153888"/>
+          </a:xfrm>
+          <a:prstGeom prst="rect">
+            <a:avLst/>
+          </a:prstGeom>
+          <a:noFill/>
+          <a:ln/>
+        </p:spPr>
+        <p:txBody>
+          <a:bodyPr wrap="none" lIns="0" tIns="0" rIns="0" bIns="0" rtlCol="0" anchor="t">
+            <a:spAutoFit/>
+          </a:bodyPr>
+          <a:lstStyle/>
+          <a:p>
+            <a:r>
+              <a:rPr lang="en-US" sz="1000" smtClean="0">
+                <a:solidFill>
+                  <a:srgbClr val="000000"/>
+                </a:solidFill>
+                <a:latin typeface="monospace" pitchFamily="34" charset="0"/>
+                <a:ea typeface="monospace" pitchFamily="34" charset="-122"/>
+                <a:cs typeface="monospace" pitchFamily="34" charset="-120"/>
+              </a:rPr>
+              <a:t>Sub Quest</a:t>
+            </a:r>
+            <a:endParaRPr lang="en-US" sz="1000" dirty="0"/>
+          </a:p>
+        </p:txBody>
+      </p:sp>
+      <p:sp>
+        <p:nvSpPr>
+          <p:cNvPr id="61" name="Text 78"/>
+          <p:cNvSpPr/>
+          <p:nvPr/>
+        </p:nvSpPr>
+        <p:spPr>
+          <a:xfrm>
+            <a:off x="4610100" y="6262103"/>
+            <a:ext cx="283732" cy="153888"/>
+          </a:xfrm>
+          <a:prstGeom prst="rect">
+            <a:avLst/>
+          </a:prstGeom>
+          <a:noFill/>
+          <a:ln/>
+        </p:spPr>
+        <p:txBody>
+          <a:bodyPr wrap="none" lIns="0" tIns="0" rIns="0" bIns="0" rtlCol="0" anchor="t">
+            <a:spAutoFit/>
+          </a:bodyPr>
+          <a:lstStyle/>
+          <a:p>
+            <a:r>
+              <a:rPr lang="en-US" sz="1000" smtClean="0">
+                <a:solidFill>
+                  <a:srgbClr val="000000"/>
+                </a:solidFill>
+                <a:latin typeface="monospace" pitchFamily="34" charset="0"/>
+                <a:ea typeface="monospace" pitchFamily="34" charset="-122"/>
+              </a:rPr>
+              <a:t>Boss</a:t>
+            </a:r>
+            <a:endParaRPr lang="en-US" sz="1000" dirty="0"/>
+          </a:p>
+        </p:txBody>
+      </p:sp>
+      <p:sp>
+        <p:nvSpPr>
+          <p:cNvPr id="62" name="Shape 74"/>
+          <p:cNvSpPr/>
+          <p:nvPr/>
+        </p:nvSpPr>
+        <p:spPr>
+          <a:xfrm>
+            <a:off x="590551" y="6174582"/>
+            <a:ext cx="11010900" cy="9525"/>
+          </a:xfrm>
+          <a:prstGeom prst="rect">
+            <a:avLst/>
+          </a:prstGeom>
+          <a:solidFill>
+            <a:srgbClr val="CCCCCC"/>
+          </a:solidFill>
+          <a:ln/>
+        </p:spPr>
+      </p:sp>
+      <p:sp>
+        <p:nvSpPr>
+          <p:cNvPr id="63" name="직사각형 62"/>
+          <p:cNvSpPr/>
+          <p:nvPr/>
+        </p:nvSpPr>
+        <p:spPr>
+          <a:xfrm>
+            <a:off x="571503" y="2296299"/>
+            <a:ext cx="1517985" cy="677882"/>
+          </a:xfrm>
+          <a:prstGeom prst="rect">
+            <a:avLst/>
+          </a:prstGeom>
+          <a:noFill/>
+          <a:ln w="28575">
+            <a:solidFill>
+              <a:srgbClr val="A9AAB7"/>
+            </a:solidFill>
+          </a:ln>
+        </p:spPr>
+        <p:style>
+          <a:lnRef idx="2">
+            <a:schemeClr val="accent1">
+              <a:shade val="50000"/>
+            </a:schemeClr>
+          </a:lnRef>
+          <a:fillRef idx="1">
+            <a:schemeClr val="accent1"/>
+          </a:fillRef>
+          <a:effectRef idx="0">
+            <a:schemeClr val="accent1"/>
+          </a:effectRef>
+          <a:fontRef idx="minor">
+            <a:schemeClr val="lt1"/>
+          </a:fontRef>
+        </p:style>
+        <p:txBody>
+          <a:bodyPr rtlCol="0" anchor="ctr"/>
+          <a:lstStyle/>
+          <a:p>
+            <a:pPr algn="ctr"/>
+            <a:endParaRPr lang="ko-KR" altLang="en-US"/>
+          </a:p>
+        </p:txBody>
+      </p:sp>
+      <p:sp>
+        <p:nvSpPr>
+          <p:cNvPr id="9" name="Text 24"/>
+          <p:cNvSpPr/>
+          <p:nvPr/>
+        </p:nvSpPr>
+        <p:spPr>
+          <a:xfrm>
+            <a:off x="1626028" y="2218903"/>
+            <a:ext cx="407440" cy="148482"/>
+          </a:xfrm>
+          <a:prstGeom prst="rect">
+            <a:avLst/>
+          </a:prstGeom>
+          <a:solidFill>
+            <a:srgbClr val="A9AAB7"/>
+          </a:solidFill>
+          <a:ln/>
+        </p:spPr>
+        <p:txBody>
+          <a:bodyPr wrap="none" lIns="45381" tIns="22691" rIns="45381" bIns="22691" rtlCol="0" anchor="t">
+            <a:spAutoFit/>
+          </a:bodyPr>
+          <a:lstStyle/>
+          <a:p>
+            <a:r>
+              <a:rPr lang="en-US" sz="667" b="1" smtClean="0">
+                <a:solidFill>
+                  <a:srgbClr val="F4F1EA"/>
+                </a:solidFill>
+              </a:rPr>
+              <a:t>Tutorial</a:t>
+            </a:r>
+            <a:endParaRPr lang="en-US" sz="667" b="1" dirty="0">
+              <a:solidFill>
+                <a:srgbClr val="F4F1EA"/>
+              </a:solidFill>
+            </a:endParaRPr>
+          </a:p>
+        </p:txBody>
+      </p:sp>
+      <p:sp>
+        <p:nvSpPr>
+          <p:cNvPr id="65" name="직사각형 64"/>
+          <p:cNvSpPr/>
+          <p:nvPr/>
+        </p:nvSpPr>
+        <p:spPr>
+          <a:xfrm>
+            <a:off x="2476504" y="2295655"/>
+            <a:ext cx="1517985" cy="677882"/>
+          </a:xfrm>
+          <a:prstGeom prst="rect">
+            <a:avLst/>
+          </a:prstGeom>
+          <a:noFill/>
+          <a:ln w="28575">
+            <a:solidFill>
+              <a:srgbClr val="001F3E"/>
+            </a:solidFill>
+          </a:ln>
+        </p:spPr>
+        <p:style>
+          <a:lnRef idx="2">
+            <a:schemeClr val="accent1">
+              <a:shade val="50000"/>
+            </a:schemeClr>
+          </a:lnRef>
+          <a:fillRef idx="1">
+            <a:schemeClr val="accent1"/>
+          </a:fillRef>
+          <a:effectRef idx="0">
+            <a:schemeClr val="accent1"/>
+          </a:effectRef>
+          <a:fontRef idx="minor">
+            <a:schemeClr val="lt1"/>
+          </a:fontRef>
+        </p:style>
+        <p:txBody>
+          <a:bodyPr rtlCol="0" anchor="ctr"/>
+          <a:lstStyle/>
+          <a:p>
+            <a:pPr algn="ctr"/>
+            <a:endParaRPr lang="ko-KR" altLang="en-US"/>
+          </a:p>
+        </p:txBody>
+      </p:sp>
+      <p:sp>
+        <p:nvSpPr>
+          <p:cNvPr id="15" name="Text 30"/>
+          <p:cNvSpPr/>
+          <p:nvPr/>
+        </p:nvSpPr>
+        <p:spPr>
+          <a:xfrm>
+            <a:off x="3498057" y="2197894"/>
+            <a:ext cx="359350" cy="148482"/>
+          </a:xfrm>
+          <a:prstGeom prst="rect">
+            <a:avLst/>
+          </a:prstGeom>
+          <a:solidFill>
+            <a:srgbClr val="001F3E"/>
+          </a:solidFill>
+          <a:ln/>
+        </p:spPr>
+        <p:txBody>
+          <a:bodyPr wrap="none" lIns="45381" tIns="22691" rIns="45381" bIns="22691" rtlCol="0" anchor="t">
+            <a:spAutoFit/>
+          </a:bodyPr>
+          <a:lstStyle/>
+          <a:p>
+            <a:r>
+              <a:rPr lang="en-US" sz="667" b="1" smtClean="0">
+                <a:solidFill>
+                  <a:srgbClr val="F4F1EA"/>
+                </a:solidFill>
+                <a:latin typeface="Space Grotesk Bold" pitchFamily="34" charset="0"/>
+                <a:ea typeface="Space Grotesk Bold" pitchFamily="34" charset="-122"/>
+                <a:cs typeface="Space Grotesk Bold" pitchFamily="34" charset="-120"/>
+              </a:rPr>
+              <a:t>Main 1</a:t>
+            </a:r>
+            <a:endParaRPr lang="en-US" sz="667" dirty="0"/>
+          </a:p>
+        </p:txBody>
+      </p:sp>
+      <p:sp>
+        <p:nvSpPr>
+          <p:cNvPr id="67" name="직사각형 66"/>
+          <p:cNvSpPr/>
+          <p:nvPr/>
+        </p:nvSpPr>
+        <p:spPr>
+          <a:xfrm>
+            <a:off x="4375491" y="2293556"/>
+            <a:ext cx="1517985" cy="677882"/>
+          </a:xfrm>
+          <a:prstGeom prst="rect">
+            <a:avLst/>
+          </a:prstGeom>
+          <a:noFill/>
+          <a:ln w="28575">
+            <a:solidFill>
+              <a:srgbClr val="001F3E"/>
+            </a:solidFill>
+          </a:ln>
+        </p:spPr>
+        <p:style>
+          <a:lnRef idx="2">
+            <a:schemeClr val="accent1">
+              <a:shade val="50000"/>
+            </a:schemeClr>
+          </a:lnRef>
+          <a:fillRef idx="1">
+            <a:schemeClr val="accent1"/>
+          </a:fillRef>
+          <a:effectRef idx="0">
+            <a:schemeClr val="accent1"/>
+          </a:effectRef>
+          <a:fontRef idx="minor">
+            <a:schemeClr val="lt1"/>
+          </a:fontRef>
+        </p:style>
+        <p:txBody>
+          <a:bodyPr rtlCol="0" anchor="ctr"/>
+          <a:lstStyle/>
+          <a:p>
+            <a:pPr algn="ctr"/>
+            <a:endParaRPr lang="ko-KR" altLang="en-US"/>
+          </a:p>
+        </p:txBody>
+      </p:sp>
+      <p:sp>
+        <p:nvSpPr>
+          <p:cNvPr id="23" name="Text 38"/>
+          <p:cNvSpPr/>
+          <p:nvPr/>
+        </p:nvSpPr>
+        <p:spPr>
+          <a:xfrm>
+            <a:off x="5388770" y="2197894"/>
+            <a:ext cx="359350" cy="148482"/>
+          </a:xfrm>
+          <a:prstGeom prst="rect">
+            <a:avLst/>
+          </a:prstGeom>
+          <a:solidFill>
+            <a:srgbClr val="001F3E"/>
+          </a:solidFill>
+          <a:ln/>
+        </p:spPr>
+        <p:txBody>
+          <a:bodyPr wrap="none" lIns="45381" tIns="22691" rIns="45381" bIns="22691" rtlCol="0" anchor="t">
+            <a:spAutoFit/>
+          </a:bodyPr>
+          <a:lstStyle/>
+          <a:p>
+            <a:r>
+              <a:rPr lang="en-US" sz="667" b="1" smtClean="0">
+                <a:solidFill>
+                  <a:srgbClr val="F4F1EA"/>
+                </a:solidFill>
+                <a:latin typeface="Space Grotesk Bold" pitchFamily="34" charset="0"/>
+                <a:ea typeface="Space Grotesk Bold" pitchFamily="34" charset="-122"/>
+                <a:cs typeface="Space Grotesk Bold" pitchFamily="34" charset="-120"/>
+              </a:rPr>
+              <a:t>Main 2</a:t>
+            </a:r>
+            <a:endParaRPr lang="en-US" sz="667" dirty="0"/>
+          </a:p>
+        </p:txBody>
+      </p:sp>
+      <p:sp>
+        <p:nvSpPr>
+          <p:cNvPr id="69" name="직사각형 68"/>
+          <p:cNvSpPr/>
+          <p:nvPr/>
+        </p:nvSpPr>
+        <p:spPr>
+          <a:xfrm>
+            <a:off x="6283993" y="2293049"/>
+            <a:ext cx="1517985" cy="677882"/>
+          </a:xfrm>
+          <a:prstGeom prst="rect">
+            <a:avLst/>
+          </a:prstGeom>
+          <a:noFill/>
+          <a:ln w="28575">
+            <a:solidFill>
+              <a:srgbClr val="F1B641"/>
+            </a:solidFill>
+          </a:ln>
+        </p:spPr>
+        <p:style>
+          <a:lnRef idx="2">
+            <a:schemeClr val="accent1">
+              <a:shade val="50000"/>
+            </a:schemeClr>
+          </a:lnRef>
+          <a:fillRef idx="1">
+            <a:schemeClr val="accent1"/>
+          </a:fillRef>
+          <a:effectRef idx="0">
+            <a:schemeClr val="accent1"/>
+          </a:effectRef>
+          <a:fontRef idx="minor">
+            <a:schemeClr val="lt1"/>
+          </a:fontRef>
+        </p:style>
+        <p:txBody>
+          <a:bodyPr rtlCol="0" anchor="ctr"/>
+          <a:lstStyle/>
+          <a:p>
+            <a:pPr algn="ctr"/>
+            <a:endParaRPr lang="ko-KR" altLang="en-US"/>
+          </a:p>
+        </p:txBody>
+      </p:sp>
+      <p:sp>
+        <p:nvSpPr>
+          <p:cNvPr id="33" name="Text 48"/>
+          <p:cNvSpPr/>
+          <p:nvPr/>
+        </p:nvSpPr>
+        <p:spPr>
+          <a:xfrm>
+            <a:off x="7293770" y="2197894"/>
+            <a:ext cx="359350" cy="148482"/>
+          </a:xfrm>
+          <a:prstGeom prst="rect">
+            <a:avLst/>
+          </a:prstGeom>
+          <a:solidFill>
+            <a:srgbClr val="F9CE63"/>
+          </a:solidFill>
+          <a:ln/>
+        </p:spPr>
+        <p:txBody>
+          <a:bodyPr wrap="none" lIns="45381" tIns="22691" rIns="45381" bIns="22691" rtlCol="0" anchor="t">
+            <a:spAutoFit/>
+          </a:bodyPr>
+          <a:lstStyle/>
+          <a:p>
+            <a:r>
+              <a:rPr lang="en-US" sz="667" b="1" smtClean="0">
+                <a:solidFill>
+                  <a:srgbClr val="F4F1EA"/>
+                </a:solidFill>
+                <a:latin typeface="Space Grotesk Bold" pitchFamily="34" charset="0"/>
+                <a:ea typeface="Space Grotesk Bold" pitchFamily="34" charset="-122"/>
+                <a:cs typeface="Space Grotesk Bold" pitchFamily="34" charset="-120"/>
+              </a:rPr>
+              <a:t>Main 3</a:t>
+            </a:r>
+            <a:endParaRPr lang="en-US" sz="667" dirty="0"/>
+          </a:p>
+        </p:txBody>
+      </p:sp>
+      <p:sp>
+        <p:nvSpPr>
+          <p:cNvPr id="31" name="Shape 46"/>
+          <p:cNvSpPr/>
+          <p:nvPr/>
+        </p:nvSpPr>
+        <p:spPr>
+          <a:xfrm>
+            <a:off x="6257925" y="2264569"/>
+            <a:ext cx="95251" cy="95251"/>
+          </a:xfrm>
+          <a:prstGeom prst="rect">
+            <a:avLst/>
+          </a:prstGeom>
+          <a:solidFill>
+            <a:srgbClr val="001F3E"/>
+          </a:solidFill>
+          <a:ln/>
+        </p:spPr>
+      </p:sp>
+      <p:sp>
+        <p:nvSpPr>
+          <p:cNvPr id="78" name="직사각형 77"/>
+          <p:cNvSpPr/>
+          <p:nvPr/>
+        </p:nvSpPr>
+        <p:spPr>
+          <a:xfrm>
+            <a:off x="10097404" y="2299584"/>
+            <a:ext cx="1517985" cy="677882"/>
+          </a:xfrm>
+          <a:prstGeom prst="rect">
+            <a:avLst/>
+          </a:prstGeom>
+          <a:noFill/>
+          <a:ln w="28575">
+            <a:solidFill>
+              <a:srgbClr val="001F3E"/>
+            </a:solidFill>
+          </a:ln>
+        </p:spPr>
+        <p:style>
+          <a:lnRef idx="2">
+            <a:schemeClr val="accent1">
+              <a:shade val="50000"/>
+            </a:schemeClr>
+          </a:lnRef>
+          <a:fillRef idx="1">
+            <a:schemeClr val="accent1"/>
+          </a:fillRef>
+          <a:effectRef idx="0">
+            <a:schemeClr val="accent1"/>
+          </a:effectRef>
+          <a:fontRef idx="minor">
+            <a:schemeClr val="lt1"/>
+          </a:fontRef>
+        </p:style>
+        <p:txBody>
+          <a:bodyPr rtlCol="0" anchor="ctr"/>
+          <a:lstStyle/>
+          <a:p>
+            <a:pPr algn="ctr"/>
+            <a:endParaRPr lang="ko-KR" altLang="en-US"/>
+          </a:p>
+        </p:txBody>
+      </p:sp>
+      <p:sp>
+        <p:nvSpPr>
+          <p:cNvPr id="53" name="Text 68"/>
+          <p:cNvSpPr/>
+          <p:nvPr/>
+        </p:nvSpPr>
+        <p:spPr>
+          <a:xfrm>
+            <a:off x="11103770" y="2197894"/>
+            <a:ext cx="359350" cy="148482"/>
+          </a:xfrm>
+          <a:prstGeom prst="rect">
+            <a:avLst/>
+          </a:prstGeom>
+          <a:solidFill>
+            <a:srgbClr val="001F3E"/>
+          </a:solidFill>
+          <a:ln/>
+        </p:spPr>
+        <p:txBody>
+          <a:bodyPr wrap="none" lIns="45381" tIns="22691" rIns="45381" bIns="22691" rtlCol="0" anchor="t">
+            <a:spAutoFit/>
+          </a:bodyPr>
+          <a:lstStyle/>
+          <a:p>
+            <a:r>
+              <a:rPr lang="en-US" sz="667" b="1" smtClean="0">
+                <a:solidFill>
+                  <a:srgbClr val="F4F1EA"/>
+                </a:solidFill>
+                <a:latin typeface="Space Grotesk Bold" pitchFamily="34" charset="0"/>
+                <a:ea typeface="Space Grotesk Bold" pitchFamily="34" charset="-122"/>
+                <a:cs typeface="Space Grotesk Bold" pitchFamily="34" charset="-120"/>
+              </a:rPr>
+              <a:t>Main 5</a:t>
+            </a:r>
+            <a:endParaRPr lang="en-US" sz="667" dirty="0"/>
+          </a:p>
+        </p:txBody>
+      </p:sp>
+      <p:sp>
+        <p:nvSpPr>
+          <p:cNvPr id="51" name="Shape 66"/>
+          <p:cNvSpPr/>
+          <p:nvPr/>
+        </p:nvSpPr>
+        <p:spPr>
+          <a:xfrm>
+            <a:off x="10067925" y="2264569"/>
+            <a:ext cx="95251" cy="95251"/>
+          </a:xfrm>
+          <a:prstGeom prst="rect">
+            <a:avLst/>
+          </a:prstGeom>
+          <a:solidFill>
+            <a:srgbClr val="001F3E"/>
+          </a:solidFill>
+          <a:ln/>
+        </p:spPr>
+      </p:sp>
+      <p:sp>
+        <p:nvSpPr>
+          <p:cNvPr id="45" name="Text 60"/>
+          <p:cNvSpPr/>
+          <p:nvPr/>
+        </p:nvSpPr>
+        <p:spPr>
+          <a:xfrm>
+            <a:off x="9196389" y="2197894"/>
+            <a:ext cx="359350" cy="148482"/>
+          </a:xfrm>
+          <a:prstGeom prst="rect">
+            <a:avLst/>
+          </a:prstGeom>
+          <a:solidFill>
+            <a:srgbClr val="001F3E"/>
+          </a:solidFill>
+          <a:ln/>
+        </p:spPr>
+        <p:txBody>
+          <a:bodyPr wrap="none" lIns="45381" tIns="22691" rIns="45381" bIns="22691" rtlCol="0" anchor="t">
+            <a:spAutoFit/>
+          </a:bodyPr>
+          <a:lstStyle/>
+          <a:p>
+            <a:r>
+              <a:rPr lang="en-US" sz="667" b="1" smtClean="0">
+                <a:solidFill>
+                  <a:srgbClr val="F4F1EA"/>
+                </a:solidFill>
+                <a:latin typeface="Space Grotesk Bold" pitchFamily="34" charset="0"/>
+                <a:ea typeface="Space Grotesk Bold" pitchFamily="34" charset="-122"/>
+                <a:cs typeface="Space Grotesk Bold" pitchFamily="34" charset="-120"/>
+              </a:rPr>
+              <a:t>Main 4</a:t>
+            </a:r>
+            <a:endParaRPr lang="en-US" sz="667" dirty="0"/>
+          </a:p>
+        </p:txBody>
+      </p:sp>
+      <p:sp>
+        <p:nvSpPr>
+          <p:cNvPr id="74" name="직사각형 73"/>
+          <p:cNvSpPr/>
+          <p:nvPr/>
+        </p:nvSpPr>
+        <p:spPr>
+          <a:xfrm>
+            <a:off x="8192775" y="2291596"/>
+            <a:ext cx="1517985" cy="677882"/>
+          </a:xfrm>
+          <a:prstGeom prst="rect">
+            <a:avLst/>
+          </a:prstGeom>
+          <a:noFill/>
+          <a:ln w="28575">
+            <a:solidFill>
+              <a:srgbClr val="001F3E"/>
+            </a:solidFill>
+          </a:ln>
+        </p:spPr>
+        <p:style>
+          <a:lnRef idx="2">
+            <a:schemeClr val="accent1">
+              <a:shade val="50000"/>
+            </a:schemeClr>
+          </a:lnRef>
+          <a:fillRef idx="1">
+            <a:schemeClr val="accent1"/>
+          </a:fillRef>
+          <a:effectRef idx="0">
+            <a:schemeClr val="accent1"/>
+          </a:effectRef>
+          <a:fontRef idx="minor">
+            <a:schemeClr val="lt1"/>
+          </a:fontRef>
+        </p:style>
+        <p:txBody>
+          <a:bodyPr rtlCol="0" anchor="ctr"/>
+          <a:lstStyle/>
+          <a:p>
+            <a:pPr algn="ctr"/>
+            <a:endParaRPr lang="ko-KR" altLang="en-US"/>
+          </a:p>
+        </p:txBody>
+      </p:sp>
+      <p:sp>
+        <p:nvSpPr>
+          <p:cNvPr id="7" name="Shape 22"/>
+          <p:cNvSpPr/>
+          <p:nvPr/>
+        </p:nvSpPr>
+        <p:spPr>
+          <a:xfrm>
+            <a:off x="542925" y="2264569"/>
+            <a:ext cx="95251" cy="95251"/>
+          </a:xfrm>
+          <a:prstGeom prst="rect">
+            <a:avLst/>
+          </a:prstGeom>
+          <a:solidFill>
+            <a:srgbClr val="001F3E"/>
+          </a:solidFill>
+          <a:ln/>
+        </p:spPr>
+      </p:sp>
+      <p:sp>
+        <p:nvSpPr>
+          <p:cNvPr id="80" name="직사각형 79"/>
+          <p:cNvSpPr/>
+          <p:nvPr/>
+        </p:nvSpPr>
+        <p:spPr>
+          <a:xfrm>
+            <a:off x="1829748" y="6261803"/>
+            <a:ext cx="154188" cy="154188"/>
+          </a:xfrm>
+          <a:prstGeom prst="rect">
+            <a:avLst/>
+          </a:prstGeom>
+          <a:noFill/>
+          <a:ln w="28575">
+            <a:solidFill>
+              <a:srgbClr val="A9AAB7"/>
+            </a:solidFill>
+          </a:ln>
+        </p:spPr>
+        <p:style>
+          <a:lnRef idx="2">
+            <a:schemeClr val="accent1">
+              <a:shade val="50000"/>
+            </a:schemeClr>
+          </a:lnRef>
+          <a:fillRef idx="1">
+            <a:schemeClr val="accent1"/>
+          </a:fillRef>
+          <a:effectRef idx="0">
+            <a:schemeClr val="accent1"/>
+          </a:effectRef>
+          <a:fontRef idx="minor">
+            <a:schemeClr val="lt1"/>
+          </a:fontRef>
+        </p:style>
+        <p:txBody>
+          <a:bodyPr rtlCol="0" anchor="ctr"/>
+          <a:lstStyle/>
+          <a:p>
+            <a:pPr algn="ctr"/>
+            <a:endParaRPr lang="ko-KR" altLang="en-US"/>
+          </a:p>
+        </p:txBody>
+      </p:sp>
+      <p:sp>
+        <p:nvSpPr>
+          <p:cNvPr id="81" name="직사각형 80"/>
+          <p:cNvSpPr/>
+          <p:nvPr/>
+        </p:nvSpPr>
+        <p:spPr>
+          <a:xfrm>
+            <a:off x="513456" y="6267004"/>
+            <a:ext cx="154188" cy="154188"/>
+          </a:xfrm>
+          <a:prstGeom prst="rect">
+            <a:avLst/>
+          </a:prstGeom>
+          <a:noFill/>
+          <a:ln w="28575">
+            <a:solidFill>
+              <a:srgbClr val="001F3E"/>
+            </a:solidFill>
+          </a:ln>
+        </p:spPr>
+        <p:style>
+          <a:lnRef idx="2">
+            <a:schemeClr val="accent1">
+              <a:shade val="50000"/>
+            </a:schemeClr>
+          </a:lnRef>
+          <a:fillRef idx="1">
+            <a:schemeClr val="accent1"/>
+          </a:fillRef>
+          <a:effectRef idx="0">
+            <a:schemeClr val="accent1"/>
+          </a:effectRef>
+          <a:fontRef idx="minor">
+            <a:schemeClr val="lt1"/>
+          </a:fontRef>
+        </p:style>
+        <p:txBody>
+          <a:bodyPr rtlCol="0" anchor="ctr"/>
+          <a:lstStyle/>
+          <a:p>
+            <a:pPr algn="ctr"/>
+            <a:endParaRPr lang="ko-KR" altLang="en-US"/>
+          </a:p>
+        </p:txBody>
+      </p:sp>
+      <p:cxnSp>
+        <p:nvCxnSpPr>
+          <p:cNvPr id="85" name="직선 연결선 84"/>
+          <p:cNvCxnSpPr/>
+          <p:nvPr/>
+        </p:nvCxnSpPr>
+        <p:spPr>
+          <a:xfrm>
+            <a:off x="2597804" y="2977466"/>
+            <a:ext cx="0" cy="482014"/>
+          </a:xfrm>
+          <a:prstGeom prst="line">
+            <a:avLst/>
+          </a:prstGeom>
+          <a:ln w="28575">
+            <a:solidFill>
+              <a:srgbClr val="001F3E"/>
+            </a:solidFill>
+          </a:ln>
+        </p:spPr>
+        <p:style>
+          <a:lnRef idx="1">
+            <a:schemeClr val="accent1"/>
+          </a:lnRef>
+          <a:fillRef idx="0">
+            <a:schemeClr val="accent1"/>
+          </a:fillRef>
+          <a:effectRef idx="0">
+            <a:schemeClr val="accent1"/>
+          </a:effectRef>
+          <a:fontRef idx="minor">
+            <a:schemeClr val="tx1"/>
+          </a:fontRef>
+        </p:style>
+      </p:cxnSp>
+      <p:cxnSp>
+        <p:nvCxnSpPr>
+          <p:cNvPr id="89" name="직선 연결선 88"/>
+          <p:cNvCxnSpPr/>
+          <p:nvPr/>
+        </p:nvCxnSpPr>
+        <p:spPr>
+          <a:xfrm>
+            <a:off x="4533279" y="2977466"/>
+            <a:ext cx="0" cy="482014"/>
+          </a:xfrm>
+          <a:prstGeom prst="line">
+            <a:avLst/>
+          </a:prstGeom>
+          <a:ln w="28575">
+            <a:solidFill>
+              <a:srgbClr val="001F3E"/>
+            </a:solidFill>
+          </a:ln>
+        </p:spPr>
+        <p:style>
+          <a:lnRef idx="1">
+            <a:schemeClr val="accent1"/>
+          </a:lnRef>
+          <a:fillRef idx="0">
+            <a:schemeClr val="accent1"/>
+          </a:fillRef>
+          <a:effectRef idx="0">
+            <a:schemeClr val="accent1"/>
+          </a:effectRef>
+          <a:fontRef idx="minor">
+            <a:schemeClr val="tx1"/>
+          </a:fontRef>
+        </p:style>
+      </p:cxnSp>
+      <p:cxnSp>
+        <p:nvCxnSpPr>
+          <p:cNvPr id="90" name="직선 연결선 89"/>
+          <p:cNvCxnSpPr/>
+          <p:nvPr/>
+        </p:nvCxnSpPr>
+        <p:spPr>
+          <a:xfrm>
+            <a:off x="4533279" y="3594312"/>
+            <a:ext cx="0" cy="482014"/>
+          </a:xfrm>
+          <a:prstGeom prst="line">
+            <a:avLst/>
+          </a:prstGeom>
+          <a:ln w="28575">
+            <a:solidFill>
+              <a:srgbClr val="001F3E"/>
+            </a:solidFill>
+          </a:ln>
+        </p:spPr>
+        <p:style>
+          <a:lnRef idx="1">
+            <a:schemeClr val="accent1"/>
+          </a:lnRef>
+          <a:fillRef idx="0">
+            <a:schemeClr val="accent1"/>
+          </a:fillRef>
+          <a:effectRef idx="0">
+            <a:schemeClr val="accent1"/>
+          </a:effectRef>
+          <a:fontRef idx="minor">
+            <a:schemeClr val="tx1"/>
+          </a:fontRef>
+        </p:style>
+      </p:cxnSp>
+      <p:cxnSp>
+        <p:nvCxnSpPr>
+          <p:cNvPr id="91" name="직선 연결선 90"/>
+          <p:cNvCxnSpPr/>
+          <p:nvPr/>
+        </p:nvCxnSpPr>
+        <p:spPr>
+          <a:xfrm>
+            <a:off x="6438895" y="2977466"/>
+            <a:ext cx="0" cy="482014"/>
+          </a:xfrm>
+          <a:prstGeom prst="line">
+            <a:avLst/>
+          </a:prstGeom>
+          <a:ln w="28575">
+            <a:solidFill>
+              <a:srgbClr val="001F3E"/>
+            </a:solidFill>
+          </a:ln>
+        </p:spPr>
+        <p:style>
+          <a:lnRef idx="1">
+            <a:schemeClr val="accent1"/>
+          </a:lnRef>
+          <a:fillRef idx="0">
+            <a:schemeClr val="accent1"/>
+          </a:fillRef>
+          <a:effectRef idx="0">
+            <a:schemeClr val="accent1"/>
+          </a:effectRef>
+          <a:fontRef idx="minor">
+            <a:schemeClr val="tx1"/>
+          </a:fontRef>
+        </p:style>
+      </p:cxnSp>
+      <p:cxnSp>
+        <p:nvCxnSpPr>
+          <p:cNvPr id="92" name="직선 연결선 91"/>
+          <p:cNvCxnSpPr/>
+          <p:nvPr/>
+        </p:nvCxnSpPr>
+        <p:spPr>
+          <a:xfrm>
+            <a:off x="6438895" y="3596132"/>
+            <a:ext cx="0" cy="482014"/>
+          </a:xfrm>
+          <a:prstGeom prst="line">
+            <a:avLst/>
+          </a:prstGeom>
+          <a:ln w="28575">
+            <a:solidFill>
+              <a:srgbClr val="001F3E"/>
+            </a:solidFill>
+          </a:ln>
+        </p:spPr>
+        <p:style>
+          <a:lnRef idx="1">
+            <a:schemeClr val="accent1"/>
+          </a:lnRef>
+          <a:fillRef idx="0">
+            <a:schemeClr val="accent1"/>
+          </a:fillRef>
+          <a:effectRef idx="0">
+            <a:schemeClr val="accent1"/>
+          </a:effectRef>
+          <a:fontRef idx="minor">
+            <a:schemeClr val="tx1"/>
+          </a:fontRef>
+        </p:style>
+      </p:cxnSp>
+      <p:cxnSp>
+        <p:nvCxnSpPr>
+          <p:cNvPr id="93" name="직선 연결선 92"/>
+          <p:cNvCxnSpPr/>
+          <p:nvPr/>
+        </p:nvCxnSpPr>
+        <p:spPr>
+          <a:xfrm>
+            <a:off x="6438895" y="4213459"/>
+            <a:ext cx="0" cy="482014"/>
+          </a:xfrm>
+          <a:prstGeom prst="line">
+            <a:avLst/>
+          </a:prstGeom>
+          <a:ln w="28575">
+            <a:solidFill>
+              <a:srgbClr val="001F3E"/>
+            </a:solidFill>
+          </a:ln>
+        </p:spPr>
+        <p:style>
+          <a:lnRef idx="1">
+            <a:schemeClr val="accent1"/>
+          </a:lnRef>
+          <a:fillRef idx="0">
+            <a:schemeClr val="accent1"/>
+          </a:fillRef>
+          <a:effectRef idx="0">
+            <a:schemeClr val="accent1"/>
+          </a:effectRef>
+          <a:fontRef idx="minor">
+            <a:schemeClr val="tx1"/>
+          </a:fontRef>
+        </p:style>
+      </p:cxnSp>
+      <p:cxnSp>
+        <p:nvCxnSpPr>
+          <p:cNvPr id="94" name="직선 연결선 93"/>
+          <p:cNvCxnSpPr/>
+          <p:nvPr/>
+        </p:nvCxnSpPr>
+        <p:spPr>
+          <a:xfrm>
+            <a:off x="8343274" y="2957813"/>
+            <a:ext cx="0" cy="482014"/>
+          </a:xfrm>
+          <a:prstGeom prst="line">
+            <a:avLst/>
+          </a:prstGeom>
+          <a:ln w="28575">
+            <a:solidFill>
+              <a:srgbClr val="001F3E"/>
+            </a:solidFill>
+          </a:ln>
+        </p:spPr>
+        <p:style>
+          <a:lnRef idx="1">
+            <a:schemeClr val="accent1"/>
+          </a:lnRef>
+          <a:fillRef idx="0">
+            <a:schemeClr val="accent1"/>
+          </a:fillRef>
+          <a:effectRef idx="0">
+            <a:schemeClr val="accent1"/>
+          </a:effectRef>
+          <a:fontRef idx="minor">
+            <a:schemeClr val="tx1"/>
+          </a:fontRef>
+        </p:style>
+      </p:cxnSp>
+      <p:cxnSp>
+        <p:nvCxnSpPr>
+          <p:cNvPr id="95" name="직선 연결선 94"/>
+          <p:cNvCxnSpPr/>
+          <p:nvPr/>
+        </p:nvCxnSpPr>
+        <p:spPr>
+          <a:xfrm>
+            <a:off x="10248895" y="2969478"/>
+            <a:ext cx="0" cy="482014"/>
+          </a:xfrm>
+          <a:prstGeom prst="line">
+            <a:avLst/>
+          </a:prstGeom>
+          <a:ln w="28575">
+            <a:solidFill>
+              <a:srgbClr val="001F3E"/>
+            </a:solidFill>
+          </a:ln>
+        </p:spPr>
+        <p:style>
+          <a:lnRef idx="1">
+            <a:schemeClr val="accent1"/>
+          </a:lnRef>
+          <a:fillRef idx="0">
+            <a:schemeClr val="accent1"/>
+          </a:fillRef>
+          <a:effectRef idx="0">
+            <a:schemeClr val="accent1"/>
+          </a:effectRef>
+          <a:fontRef idx="minor">
+            <a:schemeClr val="tx1"/>
+          </a:fontRef>
+        </p:style>
+      </p:cxnSp>
+      <p:sp>
+        <p:nvSpPr>
+          <p:cNvPr id="96" name="직사각형 95"/>
+          <p:cNvSpPr/>
+          <p:nvPr/>
+        </p:nvSpPr>
+        <p:spPr>
+          <a:xfrm>
+            <a:off x="4371082" y="6256273"/>
+            <a:ext cx="154188" cy="154188"/>
+          </a:xfrm>
+          <a:prstGeom prst="rect">
+            <a:avLst/>
+          </a:prstGeom>
+          <a:noFill/>
+          <a:ln w="28575">
+            <a:solidFill>
+              <a:srgbClr val="F1B641"/>
+            </a:solidFill>
+          </a:ln>
+        </p:spPr>
+        <p:style>
+          <a:lnRef idx="2">
+            <a:schemeClr val="accent1">
+              <a:shade val="50000"/>
+            </a:schemeClr>
+          </a:lnRef>
+          <a:fillRef idx="1">
+            <a:schemeClr val="accent1"/>
+          </a:fillRef>
+          <a:effectRef idx="0">
+            <a:schemeClr val="accent1"/>
+          </a:effectRef>
+          <a:fontRef idx="minor">
+            <a:schemeClr val="lt1"/>
+          </a:fontRef>
+        </p:style>
+        <p:txBody>
+          <a:bodyPr rtlCol="0" anchor="ctr"/>
+          <a:lstStyle/>
+          <a:p>
+            <a:pPr algn="ctr"/>
+            <a:endParaRPr lang="ko-KR" altLang="en-US"/>
+          </a:p>
+        </p:txBody>
+      </p:sp>
+      <p:cxnSp>
+        <p:nvCxnSpPr>
+          <p:cNvPr id="98" name="직선 연결선 97"/>
+          <p:cNvCxnSpPr/>
+          <p:nvPr/>
+        </p:nvCxnSpPr>
+        <p:spPr>
+          <a:xfrm>
+            <a:off x="3132961" y="6256273"/>
+            <a:ext cx="0" cy="164919"/>
+          </a:xfrm>
+          <a:prstGeom prst="line">
+            <a:avLst/>
+          </a:prstGeom>
+          <a:ln w="28575">
+            <a:solidFill>
+              <a:srgbClr val="001F3E"/>
+            </a:solidFill>
+          </a:ln>
+        </p:spPr>
+        <p:style>
+          <a:lnRef idx="1">
+            <a:schemeClr val="accent1"/>
+          </a:lnRef>
+          <a:fillRef idx="0">
+            <a:schemeClr val="accent1"/>
+          </a:fillRef>
+          <a:effectRef idx="0">
+            <a:schemeClr val="accent1"/>
+          </a:effectRef>
+          <a:fontRef idx="minor">
+            <a:schemeClr val="tx1"/>
+          </a:fontRef>
+        </p:style>
+      </p:cxnSp>
+    </p:spTree>
+    <p:extLst>
+      <p:ext uri="{BB962C8B-B14F-4D97-AF65-F5344CB8AC3E}">
+        <p14:creationId xmlns:p14="http://schemas.microsoft.com/office/powerpoint/2010/main" val="1302501076"/>
+      </p:ext>
+    </p:extLst>
+  </p:cSld>
+  <p:clrMapOvr>
+    <a:masterClrMapping/>
+  </p:clrMapOvr>
+  <p:timing>
+    <p:tnLst>
+      <p:par>
+        <p:cTn id="1" dur="indefinite" restart="never" nodeType="tmRoot"/>
+      </p:par>
+    </p:tnLst>
+  </p:timing>
 </p:sld>
 </file>
 
@@ -8519,6 +11868,10 @@
             <a:r>
               <a:rPr lang="ko-KR" altLang="en-US"/>
               <a:t>했을 때 불이 꺼지는 건</a:t>
+            </a:r>
+            <a:r>
+              <a:rPr lang="en-US" altLang="ko-KR"/>
+              <a:t/>
             </a:r>
             <a:br>
               <a:rPr lang="en-US" altLang="ko-KR"/>

--- a/(6.25) 트리거 및 퀘스트 전개 도면.pptx
+++ b/(6.25) 트리거 및 퀘스트 전개 도면.pptx
@@ -5,7 +5,7 @@
     <p:sldMasterId id="2147483648" r:id="rId1"/>
   </p:sldMasterIdLst>
   <p:notesMasterIdLst>
-    <p:notesMasterId r:id="rId14"/>
+    <p:notesMasterId r:id="rId15"/>
   </p:notesMasterIdLst>
   <p:sldIdLst>
     <p:sldId id="257" r:id="rId2"/>
@@ -19,7 +19,8 @@
     <p:sldId id="265" r:id="rId10"/>
     <p:sldId id="266" r:id="rId11"/>
     <p:sldId id="256" r:id="rId12"/>
-    <p:sldId id="268" r:id="rId13"/>
+    <p:sldId id="269" r:id="rId13"/>
+    <p:sldId id="268" r:id="rId14"/>
   </p:sldIdLst>
   <p:sldSz cx="12192000" cy="6858000"/>
   <p:notesSz cx="6858000" cy="9144000"/>
@@ -6390,15 +6391,13 @@
             <a:avLst/>
           </a:prstGeom>
           <a:solidFill>
-            <a:srgbClr val="FFFFFF">
-              <a:alpha val="5000"/>
+            <a:srgbClr val="5B5C6D">
+              <a:alpha val="49804"/>
             </a:srgbClr>
           </a:solidFill>
           <a:ln w="9144">
             <a:solidFill>
-              <a:srgbClr val="A9AAB7">
-                <a:alpha val="50000"/>
-              </a:srgbClr>
+              <a:srgbClr val="A9AAB7"/>
             </a:solidFill>
             <a:prstDash val="dash"/>
           </a:ln>
@@ -6702,6 +6701,747 @@
           <a:xfrm>
             <a:off x="1579626" y="2987520"/>
             <a:ext cx="1183481" cy="242888"/>
+          </a:xfrm>
+          <a:prstGeom prst="rect">
+            <a:avLst/>
+          </a:prstGeom>
+          <a:solidFill>
+            <a:srgbClr val="4272D2">
+              <a:alpha val="50000"/>
+            </a:srgbClr>
+          </a:solidFill>
+          <a:ln w="9144">
+            <a:solidFill>
+              <a:srgbClr val="4272D2"/>
+            </a:solidFill>
+            <a:prstDash val="dash"/>
+          </a:ln>
+        </p:spPr>
+      </p:sp>
+      <p:pic>
+        <p:nvPicPr>
+          <p:cNvPr id="26" name="Image 2" descr="preencoded.png"/>
+          <p:cNvPicPr>
+            <a:picLocks noChangeAspect="1"/>
+          </p:cNvPicPr>
+          <p:nvPr/>
+        </p:nvPicPr>
+        <p:blipFill>
+          <a:blip r:embed="rId4"/>
+          <a:stretch>
+            <a:fillRect/>
+          </a:stretch>
+        </p:blipFill>
+        <p:spPr>
+          <a:xfrm>
+            <a:off x="1655825" y="3070864"/>
+            <a:ext cx="83344" cy="95251"/>
+          </a:xfrm>
+          <a:prstGeom prst="rect">
+            <a:avLst/>
+          </a:prstGeom>
+        </p:spPr>
+      </p:pic>
+      <p:sp>
+        <p:nvSpPr>
+          <p:cNvPr id="27" name="Text 22"/>
+          <p:cNvSpPr/>
+          <p:nvPr/>
+        </p:nvSpPr>
+        <p:spPr>
+          <a:xfrm>
+            <a:off x="1796319" y="3044670"/>
+            <a:ext cx="787075" cy="133434"/>
+          </a:xfrm>
+          <a:prstGeom prst="rect">
+            <a:avLst/>
+          </a:prstGeom>
+          <a:noFill/>
+          <a:ln/>
+        </p:spPr>
+        <p:txBody>
+          <a:bodyPr wrap="none" lIns="0" tIns="0" rIns="0" bIns="0" rtlCol="0" anchor="t">
+            <a:spAutoFit/>
+          </a:bodyPr>
+          <a:lstStyle/>
+          <a:p>
+            <a:r>
+              <a:rPr lang="en-US" sz="867" dirty="0">
+                <a:solidFill>
+                  <a:srgbClr val="FFFFFF"/>
+                </a:solidFill>
+                <a:latin typeface="Space Grotesk" pitchFamily="34" charset="0"/>
+                <a:ea typeface="Space Grotesk" pitchFamily="34" charset="-122"/>
+                <a:cs typeface="Space Grotesk" pitchFamily="34" charset="-120"/>
+              </a:rPr>
+              <a:t>SQ: 치킨 심부름</a:t>
+            </a:r>
+            <a:endParaRPr lang="en-US" sz="867" dirty="0"/>
+          </a:p>
+        </p:txBody>
+      </p:sp>
+      <p:sp>
+        <p:nvSpPr>
+          <p:cNvPr id="28" name="Shape 23"/>
+          <p:cNvSpPr/>
+          <p:nvPr/>
+        </p:nvSpPr>
+        <p:spPr>
+          <a:xfrm>
+            <a:off x="627125" y="3457696"/>
+            <a:ext cx="762000" cy="609600"/>
+          </a:xfrm>
+          <a:prstGeom prst="rect">
+            <a:avLst/>
+          </a:prstGeom>
+          <a:solidFill>
+            <a:srgbClr val="001F3F"/>
+          </a:solidFill>
+          <a:ln w="18288">
+            <a:solidFill>
+              <a:srgbClr val="00D1FF"/>
+            </a:solidFill>
+            <a:prstDash val="solid"/>
+          </a:ln>
+        </p:spPr>
+      </p:sp>
+      <p:sp>
+        <p:nvSpPr>
+          <p:cNvPr id="29" name="Text 24"/>
+          <p:cNvSpPr/>
+          <p:nvPr/>
+        </p:nvSpPr>
+        <p:spPr>
+          <a:xfrm>
+            <a:off x="864060" y="3556518"/>
+            <a:ext cx="232436" cy="102657"/>
+          </a:xfrm>
+          <a:prstGeom prst="rect">
+            <a:avLst/>
+          </a:prstGeom>
+          <a:noFill/>
+          <a:ln/>
+        </p:spPr>
+        <p:txBody>
+          <a:bodyPr wrap="none" lIns="0" tIns="0" rIns="0" bIns="0" rtlCol="0" anchor="t">
+            <a:spAutoFit/>
+          </a:bodyPr>
+          <a:lstStyle/>
+          <a:p>
+            <a:r>
+              <a:rPr lang="en-US" sz="667" b="1" dirty="0">
+                <a:solidFill>
+                  <a:srgbClr val="FFFFFF">
+                    <a:alpha val="70000"/>
+                  </a:srgbClr>
+                </a:solidFill>
+                <a:latin typeface="Space Grotesk Bold" pitchFamily="34" charset="0"/>
+                <a:ea typeface="Space Grotesk Bold" pitchFamily="34" charset="-122"/>
+                <a:cs typeface="Space Grotesk Bold" pitchFamily="34" charset="-120"/>
+              </a:rPr>
+              <a:t>PHASE</a:t>
+            </a:r>
+            <a:endParaRPr lang="en-US" sz="667" dirty="0"/>
+          </a:p>
+        </p:txBody>
+      </p:sp>
+      <p:sp>
+        <p:nvSpPr>
+          <p:cNvPr id="30" name="Text 25"/>
+          <p:cNvSpPr/>
+          <p:nvPr/>
+        </p:nvSpPr>
+        <p:spPr>
+          <a:xfrm>
+            <a:off x="866441" y="3677962"/>
+            <a:ext cx="208390" cy="246221"/>
+          </a:xfrm>
+          <a:prstGeom prst="rect">
+            <a:avLst/>
+          </a:prstGeom>
+          <a:noFill/>
+          <a:ln/>
+        </p:spPr>
+        <p:txBody>
+          <a:bodyPr wrap="none" lIns="0" tIns="0" rIns="0" bIns="0" rtlCol="0" anchor="t">
+            <a:spAutoFit/>
+          </a:bodyPr>
+          <a:lstStyle/>
+          <a:p>
+            <a:r>
+              <a:rPr lang="en-US" sz="1600" b="1" dirty="0">
+                <a:solidFill>
+                  <a:srgbClr val="00D1FF"/>
+                </a:solidFill>
+                <a:latin typeface="Space Grotesk Bold" pitchFamily="34" charset="0"/>
+                <a:ea typeface="Space Grotesk Bold" pitchFamily="34" charset="-122"/>
+                <a:cs typeface="Space Grotesk Bold" pitchFamily="34" charset="-120"/>
+              </a:rPr>
+              <a:t>02</a:t>
+            </a:r>
+            <a:endParaRPr lang="en-US" sz="1600" dirty="0"/>
+          </a:p>
+        </p:txBody>
+      </p:sp>
+      <p:sp>
+        <p:nvSpPr>
+          <p:cNvPr id="31" name="Shape 26"/>
+          <p:cNvSpPr/>
+          <p:nvPr/>
+        </p:nvSpPr>
+        <p:spPr>
+          <a:xfrm>
+            <a:off x="1579626" y="3543303"/>
+            <a:ext cx="4144393" cy="438149"/>
+          </a:xfrm>
+          <a:prstGeom prst="rect">
+            <a:avLst/>
+          </a:prstGeom>
+          <a:solidFill>
+            <a:srgbClr val="003366">
+              <a:alpha val="60000"/>
+            </a:srgbClr>
+          </a:solidFill>
+          <a:ln w="9144">
+            <a:solidFill>
+              <a:srgbClr val="00D1FF"/>
+            </a:solidFill>
+            <a:prstDash val="solid"/>
+          </a:ln>
+        </p:spPr>
+      </p:sp>
+      <p:sp>
+        <p:nvSpPr>
+          <p:cNvPr id="32" name="Text 27"/>
+          <p:cNvSpPr/>
+          <p:nvPr/>
+        </p:nvSpPr>
+        <p:spPr>
+          <a:xfrm>
+            <a:off x="1693926" y="3663953"/>
+            <a:ext cx="729367" cy="205121"/>
+          </a:xfrm>
+          <a:prstGeom prst="rect">
+            <a:avLst/>
+          </a:prstGeom>
+          <a:noFill/>
+          <a:ln/>
+        </p:spPr>
+        <p:txBody>
+          <a:bodyPr wrap="none" lIns="0" tIns="0" rIns="0" bIns="0" rtlCol="0" anchor="t">
+            <a:spAutoFit/>
+          </a:bodyPr>
+          <a:lstStyle/>
+          <a:p>
+            <a:r>
+              <a:rPr lang="en-US" sz="1333" b="1" dirty="0">
+                <a:solidFill>
+                  <a:srgbClr val="FFFFFF"/>
+                </a:solidFill>
+                <a:latin typeface="Space Grotesk Bold" pitchFamily="34" charset="0"/>
+                <a:ea typeface="Space Grotesk Bold" pitchFamily="34" charset="-122"/>
+                <a:cs typeface="Space Grotesk Bold" pitchFamily="34" charset="-120"/>
+              </a:rPr>
+              <a:t>공원 청소</a:t>
+            </a:r>
+            <a:endParaRPr lang="en-US" sz="1333" dirty="0"/>
+          </a:p>
+        </p:txBody>
+      </p:sp>
+      <p:sp>
+        <p:nvSpPr>
+          <p:cNvPr id="33" name="Shape 28"/>
+          <p:cNvSpPr/>
+          <p:nvPr/>
+        </p:nvSpPr>
+        <p:spPr>
+          <a:xfrm>
+            <a:off x="4828196" y="3668319"/>
+            <a:ext cx="700088" cy="159544"/>
+          </a:xfrm>
+          <a:prstGeom prst="rect">
+            <a:avLst/>
+          </a:prstGeom>
+          <a:solidFill>
+            <a:srgbClr val="00D1FF"/>
+          </a:solidFill>
+          <a:ln/>
+        </p:spPr>
+      </p:sp>
+      <p:sp>
+        <p:nvSpPr>
+          <p:cNvPr id="34" name="Text 29"/>
+          <p:cNvSpPr/>
+          <p:nvPr/>
+        </p:nvSpPr>
+        <p:spPr>
+          <a:xfrm>
+            <a:off x="4828196" y="3668319"/>
+            <a:ext cx="624786" cy="148482"/>
+          </a:xfrm>
+          <a:prstGeom prst="rect">
+            <a:avLst/>
+          </a:prstGeom>
+          <a:noFill/>
+          <a:ln/>
+        </p:spPr>
+        <p:txBody>
+          <a:bodyPr wrap="none" lIns="68072" tIns="22691" rIns="68072" bIns="22691" rtlCol="0" anchor="t">
+            <a:spAutoFit/>
+          </a:bodyPr>
+          <a:lstStyle/>
+          <a:p>
+            <a:r>
+              <a:rPr lang="en-US" sz="667" b="1" dirty="0">
+                <a:solidFill>
+                  <a:srgbClr val="001F3F"/>
+                </a:solidFill>
+                <a:latin typeface="Space Grotesk Bold" pitchFamily="34" charset="0"/>
+                <a:ea typeface="Space Grotesk Bold" pitchFamily="34" charset="-122"/>
+                <a:cs typeface="Space Grotesk Bold" pitchFamily="34" charset="-120"/>
+              </a:rPr>
+              <a:t>MAIN_QUEST</a:t>
+            </a:r>
+            <a:endParaRPr lang="en-US" sz="667" dirty="0"/>
+          </a:p>
+        </p:txBody>
+      </p:sp>
+      <p:sp>
+        <p:nvSpPr>
+          <p:cNvPr id="35" name="Shape 30"/>
+          <p:cNvSpPr/>
+          <p:nvPr/>
+        </p:nvSpPr>
+        <p:spPr>
+          <a:xfrm>
+            <a:off x="1579626" y="4065539"/>
+            <a:ext cx="1585912" cy="242888"/>
+          </a:xfrm>
+          <a:prstGeom prst="rect">
+            <a:avLst/>
+          </a:prstGeom>
+          <a:solidFill>
+            <a:srgbClr val="4272D2">
+              <a:alpha val="50000"/>
+            </a:srgbClr>
+          </a:solidFill>
+          <a:ln w="9144">
+            <a:solidFill>
+              <a:srgbClr val="00D1FF"/>
+            </a:solidFill>
+            <a:prstDash val="dash"/>
+          </a:ln>
+        </p:spPr>
+      </p:sp>
+      <p:pic>
+        <p:nvPicPr>
+          <p:cNvPr id="36" name="Image 3" descr="preencoded.png"/>
+          <p:cNvPicPr>
+            <a:picLocks noChangeAspect="1"/>
+          </p:cNvPicPr>
+          <p:nvPr/>
+        </p:nvPicPr>
+        <p:blipFill>
+          <a:blip r:embed="rId5"/>
+          <a:stretch>
+            <a:fillRect/>
+          </a:stretch>
+        </p:blipFill>
+        <p:spPr>
+          <a:xfrm>
+            <a:off x="1655826" y="4158408"/>
+            <a:ext cx="83344" cy="95251"/>
+          </a:xfrm>
+          <a:prstGeom prst="rect">
+            <a:avLst/>
+          </a:prstGeom>
+        </p:spPr>
+      </p:pic>
+      <p:sp>
+        <p:nvSpPr>
+          <p:cNvPr id="37" name="Text 31"/>
+          <p:cNvSpPr/>
+          <p:nvPr/>
+        </p:nvSpPr>
+        <p:spPr>
+          <a:xfrm>
+            <a:off x="1796320" y="4132214"/>
+            <a:ext cx="1146148" cy="133434"/>
+          </a:xfrm>
+          <a:prstGeom prst="rect">
+            <a:avLst/>
+          </a:prstGeom>
+          <a:noFill/>
+          <a:ln/>
+        </p:spPr>
+        <p:txBody>
+          <a:bodyPr wrap="none" lIns="0" tIns="0" rIns="0" bIns="0" rtlCol="0" anchor="t">
+            <a:spAutoFit/>
+          </a:bodyPr>
+          <a:lstStyle/>
+          <a:p>
+            <a:r>
+              <a:rPr lang="en-US" sz="867" dirty="0">
+                <a:solidFill>
+                  <a:srgbClr val="FFFFFF"/>
+                </a:solidFill>
+                <a:latin typeface="Space Grotesk" pitchFamily="34" charset="0"/>
+                <a:ea typeface="Space Grotesk" pitchFamily="34" charset="-122"/>
+                <a:cs typeface="Space Grotesk" pitchFamily="34" charset="-120"/>
+              </a:rPr>
+              <a:t>SQ: 우정 반지 찾아주기</a:t>
+            </a:r>
+            <a:endParaRPr lang="en-US" sz="867" dirty="0"/>
+          </a:p>
+        </p:txBody>
+      </p:sp>
+      <p:sp>
+        <p:nvSpPr>
+          <p:cNvPr id="38" name="Shape 32"/>
+          <p:cNvSpPr/>
+          <p:nvPr/>
+        </p:nvSpPr>
+        <p:spPr>
+          <a:xfrm>
+            <a:off x="3241738" y="4065539"/>
+            <a:ext cx="1493044" cy="242888"/>
+          </a:xfrm>
+          <a:prstGeom prst="rect">
+            <a:avLst/>
+          </a:prstGeom>
+          <a:solidFill>
+            <a:srgbClr val="4272D2">
+              <a:alpha val="50000"/>
+            </a:srgbClr>
+          </a:solidFill>
+          <a:ln w="9144">
+            <a:solidFill>
+              <a:srgbClr val="00D1FF"/>
+            </a:solidFill>
+            <a:prstDash val="dash"/>
+          </a:ln>
+        </p:spPr>
+      </p:sp>
+      <p:pic>
+        <p:nvPicPr>
+          <p:cNvPr id="39" name="Image 4" descr="preencoded.png"/>
+          <p:cNvPicPr>
+            <a:picLocks noChangeAspect="1"/>
+          </p:cNvPicPr>
+          <p:nvPr/>
+        </p:nvPicPr>
+        <p:blipFill>
+          <a:blip r:embed="rId6"/>
+          <a:stretch>
+            <a:fillRect/>
+          </a:stretch>
+        </p:blipFill>
+        <p:spPr>
+          <a:xfrm>
+            <a:off x="3317938" y="4148884"/>
+            <a:ext cx="83344" cy="95251"/>
+          </a:xfrm>
+          <a:prstGeom prst="rect">
+            <a:avLst/>
+          </a:prstGeom>
+        </p:spPr>
+      </p:pic>
+      <p:sp>
+        <p:nvSpPr>
+          <p:cNvPr id="40" name="Text 33"/>
+          <p:cNvSpPr/>
+          <p:nvPr/>
+        </p:nvSpPr>
+        <p:spPr>
+          <a:xfrm>
+            <a:off x="3458432" y="4122690"/>
+            <a:ext cx="1062791" cy="133434"/>
+          </a:xfrm>
+          <a:prstGeom prst="rect">
+            <a:avLst/>
+          </a:prstGeom>
+          <a:noFill/>
+          <a:ln/>
+        </p:spPr>
+        <p:txBody>
+          <a:bodyPr wrap="none" lIns="0" tIns="0" rIns="0" bIns="0" rtlCol="0" anchor="t">
+            <a:spAutoFit/>
+          </a:bodyPr>
+          <a:lstStyle/>
+          <a:p>
+            <a:r>
+              <a:rPr lang="en-US" sz="867" dirty="0">
+                <a:solidFill>
+                  <a:srgbClr val="FFFFFF"/>
+                </a:solidFill>
+                <a:latin typeface="Space Grotesk" pitchFamily="34" charset="0"/>
+                <a:ea typeface="Space Grotesk" pitchFamily="34" charset="-122"/>
+                <a:cs typeface="Space Grotesk" pitchFamily="34" charset="-120"/>
+              </a:rPr>
+              <a:t>SQ: 균열 앞 커플 사진</a:t>
+            </a:r>
+            <a:endParaRPr lang="en-US" sz="867" dirty="0"/>
+          </a:p>
+        </p:txBody>
+      </p:sp>
+      <p:sp>
+        <p:nvSpPr>
+          <p:cNvPr id="41" name="Shape 34"/>
+          <p:cNvSpPr/>
+          <p:nvPr/>
+        </p:nvSpPr>
+        <p:spPr>
+          <a:xfrm>
+            <a:off x="1579626" y="4619746"/>
+            <a:ext cx="3733799" cy="438151"/>
+          </a:xfrm>
+          <a:prstGeom prst="rect">
+            <a:avLst/>
+          </a:prstGeom>
+          <a:solidFill>
+            <a:srgbClr val="FF4136">
+              <a:alpha val="10000"/>
+            </a:srgbClr>
+          </a:solidFill>
+          <a:ln/>
+        </p:spPr>
+      </p:sp>
+      <p:sp>
+        <p:nvSpPr>
+          <p:cNvPr id="42" name="Shape 35"/>
+          <p:cNvSpPr/>
+          <p:nvPr/>
+        </p:nvSpPr>
+        <p:spPr>
+          <a:xfrm>
+            <a:off x="627125" y="4534142"/>
+            <a:ext cx="762000" cy="609600"/>
+          </a:xfrm>
+          <a:prstGeom prst="rect">
+            <a:avLst/>
+          </a:prstGeom>
+          <a:solidFill>
+            <a:srgbClr val="001F3F"/>
+          </a:solidFill>
+          <a:ln w="18288">
+            <a:solidFill>
+              <a:srgbClr val="FF4136"/>
+            </a:solidFill>
+            <a:prstDash val="solid"/>
+          </a:ln>
+        </p:spPr>
+      </p:sp>
+      <p:sp>
+        <p:nvSpPr>
+          <p:cNvPr id="43" name="Text 36"/>
+          <p:cNvSpPr/>
+          <p:nvPr/>
+        </p:nvSpPr>
+        <p:spPr>
+          <a:xfrm>
+            <a:off x="864060" y="4632964"/>
+            <a:ext cx="232436" cy="102657"/>
+          </a:xfrm>
+          <a:prstGeom prst="rect">
+            <a:avLst/>
+          </a:prstGeom>
+          <a:noFill/>
+          <a:ln/>
+        </p:spPr>
+        <p:txBody>
+          <a:bodyPr wrap="none" lIns="0" tIns="0" rIns="0" bIns="0" rtlCol="0" anchor="t">
+            <a:spAutoFit/>
+          </a:bodyPr>
+          <a:lstStyle/>
+          <a:p>
+            <a:r>
+              <a:rPr lang="en-US" sz="667" b="1" dirty="0">
+                <a:solidFill>
+                  <a:srgbClr val="FFFFFF">
+                    <a:alpha val="70000"/>
+                  </a:srgbClr>
+                </a:solidFill>
+                <a:latin typeface="Space Grotesk Bold" pitchFamily="34" charset="0"/>
+                <a:ea typeface="Space Grotesk Bold" pitchFamily="34" charset="-122"/>
+                <a:cs typeface="Space Grotesk Bold" pitchFamily="34" charset="-120"/>
+              </a:rPr>
+              <a:t>PHASE</a:t>
+            </a:r>
+            <a:endParaRPr lang="en-US" sz="667" dirty="0"/>
+          </a:p>
+        </p:txBody>
+      </p:sp>
+      <p:sp>
+        <p:nvSpPr>
+          <p:cNvPr id="44" name="Text 37"/>
+          <p:cNvSpPr/>
+          <p:nvPr/>
+        </p:nvSpPr>
+        <p:spPr>
+          <a:xfrm>
+            <a:off x="865251" y="4754408"/>
+            <a:ext cx="243656" cy="246221"/>
+          </a:xfrm>
+          <a:prstGeom prst="rect">
+            <a:avLst/>
+          </a:prstGeom>
+          <a:noFill/>
+          <a:ln/>
+        </p:spPr>
+        <p:txBody>
+          <a:bodyPr wrap="none" lIns="0" tIns="0" rIns="0" bIns="0" rtlCol="0" anchor="t">
+            <a:spAutoFit/>
+          </a:bodyPr>
+          <a:lstStyle/>
+          <a:p>
+            <a:r>
+              <a:rPr lang="en-US" sz="1600" b="1" dirty="0">
+                <a:solidFill>
+                  <a:srgbClr val="FF4136"/>
+                </a:solidFill>
+                <a:latin typeface="Space Grotesk Bold" pitchFamily="34" charset="0"/>
+                <a:ea typeface="Space Grotesk Bold" pitchFamily="34" charset="-122"/>
+                <a:cs typeface="Space Grotesk Bold" pitchFamily="34" charset="-120"/>
+              </a:rPr>
+              <a:t>03</a:t>
+            </a:r>
+            <a:endParaRPr lang="en-US" sz="1600" dirty="0"/>
+          </a:p>
+        </p:txBody>
+      </p:sp>
+      <p:sp>
+        <p:nvSpPr>
+          <p:cNvPr id="45" name="Shape 38"/>
+          <p:cNvSpPr/>
+          <p:nvPr/>
+        </p:nvSpPr>
+        <p:spPr>
+          <a:xfrm>
+            <a:off x="1579626" y="4619749"/>
+            <a:ext cx="4144393" cy="438149"/>
+          </a:xfrm>
+          <a:prstGeom prst="rect">
+            <a:avLst/>
+          </a:prstGeom>
+          <a:solidFill>
+            <a:srgbClr val="003366">
+              <a:alpha val="60000"/>
+            </a:srgbClr>
+          </a:solidFill>
+          <a:ln w="9144">
+            <a:solidFill>
+              <a:srgbClr val="00D1FF"/>
+            </a:solidFill>
+            <a:prstDash val="solid"/>
+          </a:ln>
+        </p:spPr>
+      </p:sp>
+      <p:sp>
+        <p:nvSpPr>
+          <p:cNvPr id="46" name="Text 39"/>
+          <p:cNvSpPr/>
+          <p:nvPr/>
+        </p:nvSpPr>
+        <p:spPr>
+          <a:xfrm>
+            <a:off x="1693925" y="4740399"/>
+            <a:ext cx="2436019" cy="205121"/>
+          </a:xfrm>
+          <a:prstGeom prst="rect">
+            <a:avLst/>
+          </a:prstGeom>
+          <a:noFill/>
+          <a:ln/>
+        </p:spPr>
+        <p:txBody>
+          <a:bodyPr wrap="square" lIns="0" tIns="0" rIns="0" bIns="0" rtlCol="0" anchor="t">
+            <a:spAutoFit/>
+          </a:bodyPr>
+          <a:lstStyle/>
+          <a:p>
+            <a:r>
+              <a:rPr lang="en-US" sz="1333" b="1" dirty="0">
+                <a:solidFill>
+                  <a:srgbClr val="FF4136"/>
+                </a:solidFill>
+                <a:latin typeface="Space Grotesk Bold" pitchFamily="34" charset="0"/>
+                <a:ea typeface="Space Grotesk Bold" pitchFamily="34" charset="-122"/>
+                <a:cs typeface="Space Grotesk Bold" pitchFamily="34" charset="-120"/>
+              </a:rPr>
+              <a:t>재난 대응 (첫 전투 튜토리얼)</a:t>
+            </a:r>
+            <a:endParaRPr lang="en-US" sz="1333" dirty="0"/>
+          </a:p>
+        </p:txBody>
+      </p:sp>
+      <p:sp>
+        <p:nvSpPr>
+          <p:cNvPr id="47" name="Shape 40"/>
+          <p:cNvSpPr/>
+          <p:nvPr/>
+        </p:nvSpPr>
+        <p:spPr>
+          <a:xfrm>
+            <a:off x="5143741" y="4744763"/>
+            <a:ext cx="384543" cy="159544"/>
+          </a:xfrm>
+          <a:prstGeom prst="rect">
+            <a:avLst/>
+          </a:prstGeom>
+          <a:solidFill>
+            <a:srgbClr val="FF4136"/>
+          </a:solidFill>
+          <a:ln/>
+        </p:spPr>
+      </p:sp>
+      <p:sp>
+        <p:nvSpPr>
+          <p:cNvPr id="48" name="Text 41"/>
+          <p:cNvSpPr/>
+          <p:nvPr/>
+        </p:nvSpPr>
+        <p:spPr>
+          <a:xfrm>
+            <a:off x="5143741" y="4744764"/>
+            <a:ext cx="382733" cy="148482"/>
+          </a:xfrm>
+          <a:prstGeom prst="rect">
+            <a:avLst/>
+          </a:prstGeom>
+          <a:noFill/>
+          <a:ln/>
+        </p:spPr>
+        <p:txBody>
+          <a:bodyPr wrap="none" lIns="68072" tIns="22691" rIns="68072" bIns="22691" rtlCol="0" anchor="t">
+            <a:spAutoFit/>
+          </a:bodyPr>
+          <a:lstStyle/>
+          <a:p>
+            <a:r>
+              <a:rPr lang="en-US" sz="667" b="1" smtClean="0">
+                <a:solidFill>
+                  <a:srgbClr val="FFFFFF"/>
+                </a:solidFill>
+                <a:latin typeface="Space Grotesk Bold" pitchFamily="34" charset="0"/>
+                <a:ea typeface="Space Grotesk Bold" pitchFamily="34" charset="-122"/>
+                <a:cs typeface="Space Grotesk Bold" pitchFamily="34" charset="-120"/>
+              </a:rPr>
+              <a:t>BOSS</a:t>
+            </a:r>
+            <a:endParaRPr lang="en-US" sz="667" dirty="0"/>
+          </a:p>
+        </p:txBody>
+      </p:sp>
+      <p:sp>
+        <p:nvSpPr>
+          <p:cNvPr id="49" name="Shape 42"/>
+          <p:cNvSpPr/>
+          <p:nvPr/>
+        </p:nvSpPr>
+        <p:spPr>
+          <a:xfrm>
+            <a:off x="1579626" y="5147738"/>
+            <a:ext cx="1111833" cy="242888"/>
           </a:xfrm>
           <a:prstGeom prst="rect">
             <a:avLst/>
@@ -6723,22 +7463,22 @@
       </p:sp>
       <p:pic>
         <p:nvPicPr>
-          <p:cNvPr id="26" name="Image 2" descr="preencoded.png"/>
+          <p:cNvPr id="50" name="Image 5" descr="preencoded.png"/>
           <p:cNvPicPr>
             <a:picLocks noChangeAspect="1"/>
           </p:cNvPicPr>
           <p:nvPr/>
         </p:nvPicPr>
         <p:blipFill>
-          <a:blip r:embed="rId4"/>
+          <a:blip r:embed="rId7"/>
           <a:stretch>
             <a:fillRect/>
           </a:stretch>
         </p:blipFill>
         <p:spPr>
           <a:xfrm>
-            <a:off x="1655825" y="3070864"/>
-            <a:ext cx="83344" cy="95251"/>
+            <a:off x="1655825" y="5240607"/>
+            <a:ext cx="95251" cy="95251"/>
           </a:xfrm>
           <a:prstGeom prst="rect">
             <a:avLst/>
@@ -6747,13 +7487,13 @@
       </p:pic>
       <p:sp>
         <p:nvSpPr>
-          <p:cNvPr id="27" name="Text 22"/>
-          <p:cNvSpPr/>
-          <p:nvPr/>
-        </p:nvSpPr>
-        <p:spPr>
-          <a:xfrm>
-            <a:off x="1796319" y="3044670"/>
+          <p:cNvPr id="51" name="Text 43"/>
+          <p:cNvSpPr/>
+          <p:nvPr/>
+        </p:nvSpPr>
+        <p:spPr>
+          <a:xfrm>
+            <a:off x="1808226" y="5214413"/>
             <a:ext cx="787075" cy="133434"/>
           </a:xfrm>
           <a:prstGeom prst="rect">
@@ -6777,7 +7517,7 @@
                 <a:ea typeface="Space Grotesk" pitchFamily="34" charset="-122"/>
                 <a:cs typeface="Space Grotesk" pitchFamily="34" charset="-120"/>
               </a:rPr>
-              <a:t>SQ: 치킨 심부름</a:t>
+              <a:t>SQ: 대피소 지원</a:t>
             </a:r>
             <a:endParaRPr lang="en-US" sz="867" dirty="0"/>
           </a:p>
@@ -6785,240 +7525,14 @@
       </p:sp>
       <p:sp>
         <p:nvSpPr>
-          <p:cNvPr id="28" name="Shape 23"/>
-          <p:cNvSpPr/>
-          <p:nvPr/>
-        </p:nvSpPr>
-        <p:spPr>
-          <a:xfrm>
-            <a:off x="627125" y="3457696"/>
-            <a:ext cx="762000" cy="609600"/>
-          </a:xfrm>
-          <a:prstGeom prst="rect">
-            <a:avLst/>
-          </a:prstGeom>
-          <a:solidFill>
-            <a:srgbClr val="001F3F"/>
-          </a:solidFill>
-          <a:ln w="18288">
-            <a:solidFill>
-              <a:srgbClr val="00D1FF"/>
-            </a:solidFill>
-            <a:prstDash val="solid"/>
-          </a:ln>
-        </p:spPr>
-      </p:sp>
-      <p:sp>
-        <p:nvSpPr>
-          <p:cNvPr id="29" name="Text 24"/>
-          <p:cNvSpPr/>
-          <p:nvPr/>
-        </p:nvSpPr>
-        <p:spPr>
-          <a:xfrm>
-            <a:off x="864060" y="3556518"/>
-            <a:ext cx="232436" cy="102657"/>
-          </a:xfrm>
-          <a:prstGeom prst="rect">
-            <a:avLst/>
-          </a:prstGeom>
-          <a:noFill/>
-          <a:ln/>
-        </p:spPr>
-        <p:txBody>
-          <a:bodyPr wrap="none" lIns="0" tIns="0" rIns="0" bIns="0" rtlCol="0" anchor="t">
-            <a:spAutoFit/>
-          </a:bodyPr>
-          <a:lstStyle/>
-          <a:p>
-            <a:r>
-              <a:rPr lang="en-US" sz="667" b="1" dirty="0">
-                <a:solidFill>
-                  <a:srgbClr val="FFFFFF">
-                    <a:alpha val="70000"/>
-                  </a:srgbClr>
-                </a:solidFill>
-                <a:latin typeface="Space Grotesk Bold" pitchFamily="34" charset="0"/>
-                <a:ea typeface="Space Grotesk Bold" pitchFamily="34" charset="-122"/>
-                <a:cs typeface="Space Grotesk Bold" pitchFamily="34" charset="-120"/>
-              </a:rPr>
-              <a:t>PHASE</a:t>
-            </a:r>
-            <a:endParaRPr lang="en-US" sz="667" dirty="0"/>
-          </a:p>
-        </p:txBody>
-      </p:sp>
-      <p:sp>
-        <p:nvSpPr>
-          <p:cNvPr id="30" name="Text 25"/>
-          <p:cNvSpPr/>
-          <p:nvPr/>
-        </p:nvSpPr>
-        <p:spPr>
-          <a:xfrm>
-            <a:off x="866441" y="3677962"/>
-            <a:ext cx="208390" cy="246221"/>
-          </a:xfrm>
-          <a:prstGeom prst="rect">
-            <a:avLst/>
-          </a:prstGeom>
-          <a:noFill/>
-          <a:ln/>
-        </p:spPr>
-        <p:txBody>
-          <a:bodyPr wrap="none" lIns="0" tIns="0" rIns="0" bIns="0" rtlCol="0" anchor="t">
-            <a:spAutoFit/>
-          </a:bodyPr>
-          <a:lstStyle/>
-          <a:p>
-            <a:r>
-              <a:rPr lang="en-US" sz="1600" b="1" dirty="0">
-                <a:solidFill>
-                  <a:srgbClr val="00D1FF"/>
-                </a:solidFill>
-                <a:latin typeface="Space Grotesk Bold" pitchFamily="34" charset="0"/>
-                <a:ea typeface="Space Grotesk Bold" pitchFamily="34" charset="-122"/>
-                <a:cs typeface="Space Grotesk Bold" pitchFamily="34" charset="-120"/>
-              </a:rPr>
-              <a:t>02</a:t>
-            </a:r>
-            <a:endParaRPr lang="en-US" sz="1600" dirty="0"/>
-          </a:p>
-        </p:txBody>
-      </p:sp>
-      <p:sp>
-        <p:nvSpPr>
-          <p:cNvPr id="31" name="Shape 26"/>
-          <p:cNvSpPr/>
-          <p:nvPr/>
-        </p:nvSpPr>
-        <p:spPr>
-          <a:xfrm>
-            <a:off x="1579626" y="3543303"/>
-            <a:ext cx="4144393" cy="438149"/>
-          </a:xfrm>
-          <a:prstGeom prst="rect">
-            <a:avLst/>
-          </a:prstGeom>
-          <a:solidFill>
-            <a:srgbClr val="003366">
-              <a:alpha val="60000"/>
-            </a:srgbClr>
-          </a:solidFill>
-          <a:ln w="9144">
-            <a:solidFill>
-              <a:srgbClr val="00D1FF"/>
-            </a:solidFill>
-            <a:prstDash val="solid"/>
-          </a:ln>
-        </p:spPr>
-      </p:sp>
-      <p:sp>
-        <p:nvSpPr>
-          <p:cNvPr id="32" name="Text 27"/>
-          <p:cNvSpPr/>
-          <p:nvPr/>
-        </p:nvSpPr>
-        <p:spPr>
-          <a:xfrm>
-            <a:off x="1693926" y="3663953"/>
-            <a:ext cx="729367" cy="205121"/>
-          </a:xfrm>
-          <a:prstGeom prst="rect">
-            <a:avLst/>
-          </a:prstGeom>
-          <a:noFill/>
-          <a:ln/>
-        </p:spPr>
-        <p:txBody>
-          <a:bodyPr wrap="none" lIns="0" tIns="0" rIns="0" bIns="0" rtlCol="0" anchor="t">
-            <a:spAutoFit/>
-          </a:bodyPr>
-          <a:lstStyle/>
-          <a:p>
-            <a:r>
-              <a:rPr lang="en-US" sz="1333" b="1" dirty="0">
-                <a:solidFill>
-                  <a:srgbClr val="FFFFFF"/>
-                </a:solidFill>
-                <a:latin typeface="Space Grotesk Bold" pitchFamily="34" charset="0"/>
-                <a:ea typeface="Space Grotesk Bold" pitchFamily="34" charset="-122"/>
-                <a:cs typeface="Space Grotesk Bold" pitchFamily="34" charset="-120"/>
-              </a:rPr>
-              <a:t>공원 청소</a:t>
-            </a:r>
-            <a:endParaRPr lang="en-US" sz="1333" dirty="0"/>
-          </a:p>
-        </p:txBody>
-      </p:sp>
-      <p:sp>
-        <p:nvSpPr>
-          <p:cNvPr id="33" name="Shape 28"/>
-          <p:cNvSpPr/>
-          <p:nvPr/>
-        </p:nvSpPr>
-        <p:spPr>
-          <a:xfrm>
-            <a:off x="4828196" y="3668319"/>
-            <a:ext cx="700088" cy="159544"/>
-          </a:xfrm>
-          <a:prstGeom prst="rect">
-            <a:avLst/>
-          </a:prstGeom>
-          <a:solidFill>
-            <a:srgbClr val="00D1FF"/>
-          </a:solidFill>
-          <a:ln/>
-        </p:spPr>
-      </p:sp>
-      <p:sp>
-        <p:nvSpPr>
-          <p:cNvPr id="34" name="Text 29"/>
-          <p:cNvSpPr/>
-          <p:nvPr/>
-        </p:nvSpPr>
-        <p:spPr>
-          <a:xfrm>
-            <a:off x="4828196" y="3668319"/>
-            <a:ext cx="624786" cy="148482"/>
-          </a:xfrm>
-          <a:prstGeom prst="rect">
-            <a:avLst/>
-          </a:prstGeom>
-          <a:noFill/>
-          <a:ln/>
-        </p:spPr>
-        <p:txBody>
-          <a:bodyPr wrap="none" lIns="68072" tIns="22691" rIns="68072" bIns="22691" rtlCol="0" anchor="t">
-            <a:spAutoFit/>
-          </a:bodyPr>
-          <a:lstStyle/>
-          <a:p>
-            <a:r>
-              <a:rPr lang="en-US" sz="667" b="1" dirty="0">
-                <a:solidFill>
-                  <a:srgbClr val="001F3F"/>
-                </a:solidFill>
-                <a:latin typeface="Space Grotesk Bold" pitchFamily="34" charset="0"/>
-                <a:ea typeface="Space Grotesk Bold" pitchFamily="34" charset="-122"/>
-                <a:cs typeface="Space Grotesk Bold" pitchFamily="34" charset="-120"/>
-              </a:rPr>
-              <a:t>MAIN_QUEST</a:t>
-            </a:r>
-            <a:endParaRPr lang="en-US" sz="667" dirty="0"/>
-          </a:p>
-        </p:txBody>
-      </p:sp>
-      <p:sp>
-        <p:nvSpPr>
-          <p:cNvPr id="35" name="Shape 30"/>
-          <p:cNvSpPr/>
-          <p:nvPr/>
-        </p:nvSpPr>
-        <p:spPr>
-          <a:xfrm>
-            <a:off x="1579626" y="4065539"/>
-            <a:ext cx="1585912" cy="242888"/>
+          <p:cNvPr id="52" name="Shape 44"/>
+          <p:cNvSpPr/>
+          <p:nvPr/>
+        </p:nvSpPr>
+        <p:spPr>
+          <a:xfrm>
+            <a:off x="2768809" y="5147738"/>
+            <a:ext cx="1541899" cy="242888"/>
           </a:xfrm>
           <a:prstGeom prst="rect">
             <a:avLst/>
@@ -7040,22 +7554,22 @@
       </p:sp>
       <p:pic>
         <p:nvPicPr>
-          <p:cNvPr id="36" name="Image 3" descr="preencoded.png"/>
+          <p:cNvPr id="53" name="Image 6" descr="preencoded.png"/>
           <p:cNvPicPr>
             <a:picLocks noChangeAspect="1"/>
           </p:cNvPicPr>
           <p:nvPr/>
         </p:nvPicPr>
         <p:blipFill>
-          <a:blip r:embed="rId5"/>
+          <a:blip r:embed="rId8"/>
           <a:stretch>
             <a:fillRect/>
           </a:stretch>
         </p:blipFill>
         <p:spPr>
           <a:xfrm>
-            <a:off x="1655826" y="4158408"/>
-            <a:ext cx="83344" cy="95251"/>
+            <a:off x="2845008" y="5240607"/>
+            <a:ext cx="95251" cy="95251"/>
           </a:xfrm>
           <a:prstGeom prst="rect">
             <a:avLst/>
@@ -7064,14 +7578,14 @@
       </p:pic>
       <p:sp>
         <p:nvSpPr>
-          <p:cNvPr id="37" name="Text 31"/>
-          <p:cNvSpPr/>
-          <p:nvPr/>
-        </p:nvSpPr>
-        <p:spPr>
-          <a:xfrm>
-            <a:off x="1796320" y="4132214"/>
-            <a:ext cx="1146148" cy="133434"/>
+          <p:cNvPr id="54" name="Text 45"/>
+          <p:cNvSpPr/>
+          <p:nvPr/>
+        </p:nvSpPr>
+        <p:spPr>
+          <a:xfrm>
+            <a:off x="2997408" y="5214413"/>
+            <a:ext cx="1256754" cy="133434"/>
           </a:xfrm>
           <a:prstGeom prst="rect">
             <a:avLst/>
@@ -7094,7 +7608,7 @@
                 <a:ea typeface="Space Grotesk" pitchFamily="34" charset="-122"/>
                 <a:cs typeface="Space Grotesk" pitchFamily="34" charset="-120"/>
               </a:rPr>
-              <a:t>SQ: 우정 반지 찾아주기</a:t>
+              <a:t>SQ: 잃어버린 강아지 찾기</a:t>
             </a:r>
             <a:endParaRPr lang="en-US" sz="867" dirty="0"/>
           </a:p>
@@ -7102,14 +7616,14 @@
       </p:sp>
       <p:sp>
         <p:nvSpPr>
-          <p:cNvPr id="38" name="Shape 32"/>
-          <p:cNvSpPr/>
-          <p:nvPr/>
-        </p:nvSpPr>
-        <p:spPr>
-          <a:xfrm>
-            <a:off x="3241738" y="4065539"/>
-            <a:ext cx="1493044" cy="242888"/>
+          <p:cNvPr id="55" name="Shape 46"/>
+          <p:cNvSpPr/>
+          <p:nvPr/>
+        </p:nvSpPr>
+        <p:spPr>
+          <a:xfrm>
+            <a:off x="4386907" y="5147738"/>
+            <a:ext cx="1337112" cy="242888"/>
           </a:xfrm>
           <a:prstGeom prst="rect">
             <a:avLst/>
@@ -7131,22 +7645,22 @@
       </p:sp>
       <p:pic>
         <p:nvPicPr>
-          <p:cNvPr id="39" name="Image 4" descr="preencoded.png"/>
+          <p:cNvPr id="56" name="Image 7" descr="preencoded.png"/>
           <p:cNvPicPr>
             <a:picLocks noChangeAspect="1"/>
           </p:cNvPicPr>
           <p:nvPr/>
         </p:nvPicPr>
         <p:blipFill>
-          <a:blip r:embed="rId6"/>
+          <a:blip r:embed="rId9"/>
           <a:stretch>
             <a:fillRect/>
           </a:stretch>
         </p:blipFill>
         <p:spPr>
           <a:xfrm>
-            <a:off x="3317938" y="4148884"/>
-            <a:ext cx="83344" cy="95251"/>
+            <a:off x="4463105" y="5231081"/>
+            <a:ext cx="95251" cy="95251"/>
           </a:xfrm>
           <a:prstGeom prst="rect">
             <a:avLst/>
@@ -7155,14 +7669,14 @@
       </p:pic>
       <p:sp>
         <p:nvSpPr>
-          <p:cNvPr id="40" name="Text 33"/>
-          <p:cNvSpPr/>
-          <p:nvPr/>
-        </p:nvSpPr>
-        <p:spPr>
-          <a:xfrm>
-            <a:off x="3458432" y="4122690"/>
-            <a:ext cx="1062791" cy="133434"/>
+          <p:cNvPr id="57" name="Text 47"/>
+          <p:cNvSpPr/>
+          <p:nvPr/>
+        </p:nvSpPr>
+        <p:spPr>
+          <a:xfrm>
+            <a:off x="4615506" y="5204888"/>
+            <a:ext cx="1008289" cy="133434"/>
           </a:xfrm>
           <a:prstGeom prst="rect">
             <a:avLst/>
@@ -7185,7 +7699,7 @@
                 <a:ea typeface="Space Grotesk" pitchFamily="34" charset="-122"/>
                 <a:cs typeface="Space Grotesk" pitchFamily="34" charset="-120"/>
               </a:rPr>
-              <a:t>SQ: 균열 앞 커플 사진</a:t>
+              <a:t>SQ: 괴물 목격담 수집</a:t>
             </a:r>
             <a:endParaRPr lang="en-US" sz="867" dirty="0"/>
           </a:p>
@@ -7193,35 +7707,13 @@
       </p:sp>
       <p:sp>
         <p:nvSpPr>
-          <p:cNvPr id="41" name="Shape 34"/>
-          <p:cNvSpPr/>
-          <p:nvPr/>
-        </p:nvSpPr>
-        <p:spPr>
-          <a:xfrm>
-            <a:off x="1579626" y="4619746"/>
-            <a:ext cx="3733799" cy="438151"/>
-          </a:xfrm>
-          <a:prstGeom prst="rect">
-            <a:avLst/>
-          </a:prstGeom>
-          <a:solidFill>
-            <a:srgbClr val="FF4136">
-              <a:alpha val="10000"/>
-            </a:srgbClr>
-          </a:solidFill>
-          <a:ln/>
-        </p:spPr>
-      </p:sp>
-      <p:sp>
-        <p:nvSpPr>
-          <p:cNvPr id="42" name="Shape 35"/>
-          <p:cNvSpPr/>
-          <p:nvPr/>
-        </p:nvSpPr>
-        <p:spPr>
-          <a:xfrm>
-            <a:off x="627125" y="4534142"/>
+          <p:cNvPr id="58" name="Shape 48"/>
+          <p:cNvSpPr/>
+          <p:nvPr/>
+        </p:nvSpPr>
+        <p:spPr>
+          <a:xfrm>
+            <a:off x="627125" y="5613920"/>
             <a:ext cx="762000" cy="609600"/>
           </a:xfrm>
           <a:prstGeom prst="rect">
@@ -7232,7 +7724,7 @@
           </a:solidFill>
           <a:ln w="18288">
             <a:solidFill>
-              <a:srgbClr val="FF4136"/>
+              <a:srgbClr val="00D1FF"/>
             </a:solidFill>
             <a:prstDash val="solid"/>
           </a:ln>
@@ -7240,14 +7732,14 @@
       </p:sp>
       <p:sp>
         <p:nvSpPr>
-          <p:cNvPr id="43" name="Text 36"/>
-          <p:cNvSpPr/>
-          <p:nvPr/>
-        </p:nvSpPr>
-        <p:spPr>
-          <a:xfrm>
-            <a:off x="864060" y="4632964"/>
-            <a:ext cx="232436" cy="102657"/>
+          <p:cNvPr id="60" name="Text 50"/>
+          <p:cNvSpPr/>
+          <p:nvPr/>
+        </p:nvSpPr>
+        <p:spPr>
+          <a:xfrm>
+            <a:off x="861552" y="5834187"/>
+            <a:ext cx="503633" cy="246221"/>
           </a:xfrm>
           <a:prstGeom prst="rect">
             <a:avLst/>
@@ -7256,61 +7748,21 @@
           <a:ln/>
         </p:spPr>
         <p:txBody>
-          <a:bodyPr wrap="none" lIns="0" tIns="0" rIns="0" bIns="0" rtlCol="0" anchor="t">
+          <a:bodyPr wrap="square" lIns="0" tIns="0" rIns="0" bIns="0" rtlCol="0" anchor="t">
             <a:spAutoFit/>
           </a:bodyPr>
           <a:lstStyle/>
           <a:p>
             <a:r>
-              <a:rPr lang="en-US" sz="667" b="1" dirty="0">
+              <a:rPr lang="en-US" sz="1600" b="1" smtClean="0">
                 <a:solidFill>
-                  <a:srgbClr val="FFFFFF">
-                    <a:alpha val="70000"/>
-                  </a:srgbClr>
+                  <a:srgbClr val="00D1FF"/>
                 </a:solidFill>
                 <a:latin typeface="Space Grotesk Bold" pitchFamily="34" charset="0"/>
                 <a:ea typeface="Space Grotesk Bold" pitchFamily="34" charset="-122"/>
                 <a:cs typeface="Space Grotesk Bold" pitchFamily="34" charset="-120"/>
               </a:rPr>
-              <a:t>PHASE</a:t>
-            </a:r>
-            <a:endParaRPr lang="en-US" sz="667" dirty="0"/>
-          </a:p>
-        </p:txBody>
-      </p:sp>
-      <p:sp>
-        <p:nvSpPr>
-          <p:cNvPr id="44" name="Text 37"/>
-          <p:cNvSpPr/>
-          <p:nvPr/>
-        </p:nvSpPr>
-        <p:spPr>
-          <a:xfrm>
-            <a:off x="865251" y="4754408"/>
-            <a:ext cx="243656" cy="246221"/>
-          </a:xfrm>
-          <a:prstGeom prst="rect">
-            <a:avLst/>
-          </a:prstGeom>
-          <a:noFill/>
-          <a:ln/>
-        </p:spPr>
-        <p:txBody>
-          <a:bodyPr wrap="none" lIns="0" tIns="0" rIns="0" bIns="0" rtlCol="0" anchor="t">
-            <a:spAutoFit/>
-          </a:bodyPr>
-          <a:lstStyle/>
-          <a:p>
-            <a:r>
-              <a:rPr lang="en-US" sz="1600" b="1" dirty="0">
-                <a:solidFill>
-                  <a:srgbClr val="FF4136"/>
-                </a:solidFill>
-                <a:latin typeface="Space Grotesk Bold" pitchFamily="34" charset="0"/>
-                <a:ea typeface="Space Grotesk Bold" pitchFamily="34" charset="-122"/>
-                <a:cs typeface="Space Grotesk Bold" pitchFamily="34" charset="-120"/>
-              </a:rPr>
-              <a:t>03</a:t>
+              <a:t>04</a:t>
             </a:r>
             <a:endParaRPr lang="en-US" sz="1600" dirty="0"/>
           </a:p>
@@ -7318,14 +7770,14 @@
       </p:sp>
       <p:sp>
         <p:nvSpPr>
-          <p:cNvPr id="45" name="Shape 38"/>
-          <p:cNvSpPr/>
-          <p:nvPr/>
-        </p:nvSpPr>
-        <p:spPr>
-          <a:xfrm>
-            <a:off x="1579626" y="4619749"/>
-            <a:ext cx="4144393" cy="438149"/>
+          <p:cNvPr id="61" name="Shape 51"/>
+          <p:cNvSpPr/>
+          <p:nvPr/>
+        </p:nvSpPr>
+        <p:spPr>
+          <a:xfrm>
+            <a:off x="1579626" y="5699526"/>
+            <a:ext cx="4144393" cy="438151"/>
           </a:xfrm>
           <a:prstGeom prst="rect">
             <a:avLst/>
@@ -7345,465 +7797,6 @@
       </p:sp>
       <p:sp>
         <p:nvSpPr>
-          <p:cNvPr id="46" name="Text 39"/>
-          <p:cNvSpPr/>
-          <p:nvPr/>
-        </p:nvSpPr>
-        <p:spPr>
-          <a:xfrm>
-            <a:off x="1693925" y="4740399"/>
-            <a:ext cx="2436019" cy="205121"/>
-          </a:xfrm>
-          <a:prstGeom prst="rect">
-            <a:avLst/>
-          </a:prstGeom>
-          <a:noFill/>
-          <a:ln/>
-        </p:spPr>
-        <p:txBody>
-          <a:bodyPr wrap="square" lIns="0" tIns="0" rIns="0" bIns="0" rtlCol="0" anchor="t">
-            <a:spAutoFit/>
-          </a:bodyPr>
-          <a:lstStyle/>
-          <a:p>
-            <a:r>
-              <a:rPr lang="en-US" sz="1333" b="1" dirty="0">
-                <a:solidFill>
-                  <a:srgbClr val="FF4136"/>
-                </a:solidFill>
-                <a:latin typeface="Space Grotesk Bold" pitchFamily="34" charset="0"/>
-                <a:ea typeface="Space Grotesk Bold" pitchFamily="34" charset="-122"/>
-                <a:cs typeface="Space Grotesk Bold" pitchFamily="34" charset="-120"/>
-              </a:rPr>
-              <a:t>재난 대응 (첫 전투 튜토리얼)</a:t>
-            </a:r>
-            <a:endParaRPr lang="en-US" sz="1333" dirty="0"/>
-          </a:p>
-        </p:txBody>
-      </p:sp>
-      <p:sp>
-        <p:nvSpPr>
-          <p:cNvPr id="47" name="Shape 40"/>
-          <p:cNvSpPr/>
-          <p:nvPr/>
-        </p:nvSpPr>
-        <p:spPr>
-          <a:xfrm>
-            <a:off x="5143741" y="4744763"/>
-            <a:ext cx="384543" cy="159544"/>
-          </a:xfrm>
-          <a:prstGeom prst="rect">
-            <a:avLst/>
-          </a:prstGeom>
-          <a:solidFill>
-            <a:srgbClr val="FF4136"/>
-          </a:solidFill>
-          <a:ln/>
-        </p:spPr>
-      </p:sp>
-      <p:sp>
-        <p:nvSpPr>
-          <p:cNvPr id="48" name="Text 41"/>
-          <p:cNvSpPr/>
-          <p:nvPr/>
-        </p:nvSpPr>
-        <p:spPr>
-          <a:xfrm>
-            <a:off x="5143741" y="4744764"/>
-            <a:ext cx="382733" cy="148482"/>
-          </a:xfrm>
-          <a:prstGeom prst="rect">
-            <a:avLst/>
-          </a:prstGeom>
-          <a:noFill/>
-          <a:ln/>
-        </p:spPr>
-        <p:txBody>
-          <a:bodyPr wrap="none" lIns="68072" tIns="22691" rIns="68072" bIns="22691" rtlCol="0" anchor="t">
-            <a:spAutoFit/>
-          </a:bodyPr>
-          <a:lstStyle/>
-          <a:p>
-            <a:r>
-              <a:rPr lang="en-US" sz="667" b="1" smtClean="0">
-                <a:solidFill>
-                  <a:srgbClr val="FFFFFF"/>
-                </a:solidFill>
-                <a:latin typeface="Space Grotesk Bold" pitchFamily="34" charset="0"/>
-                <a:ea typeface="Space Grotesk Bold" pitchFamily="34" charset="-122"/>
-                <a:cs typeface="Space Grotesk Bold" pitchFamily="34" charset="-120"/>
-              </a:rPr>
-              <a:t>BOSS</a:t>
-            </a:r>
-            <a:endParaRPr lang="en-US" sz="667" dirty="0"/>
-          </a:p>
-        </p:txBody>
-      </p:sp>
-      <p:sp>
-        <p:nvSpPr>
-          <p:cNvPr id="49" name="Shape 42"/>
-          <p:cNvSpPr/>
-          <p:nvPr/>
-        </p:nvSpPr>
-        <p:spPr>
-          <a:xfrm>
-            <a:off x="1579626" y="5147738"/>
-            <a:ext cx="1111833" cy="242888"/>
-          </a:xfrm>
-          <a:prstGeom prst="rect">
-            <a:avLst/>
-          </a:prstGeom>
-          <a:solidFill>
-            <a:srgbClr val="FFFFFF">
-              <a:alpha val="5000"/>
-            </a:srgbClr>
-          </a:solidFill>
-          <a:ln w="9144">
-            <a:solidFill>
-              <a:srgbClr val="00D1FF">
-                <a:alpha val="50000"/>
-              </a:srgbClr>
-            </a:solidFill>
-            <a:prstDash val="dash"/>
-          </a:ln>
-        </p:spPr>
-      </p:sp>
-      <p:pic>
-        <p:nvPicPr>
-          <p:cNvPr id="50" name="Image 5" descr="preencoded.png"/>
-          <p:cNvPicPr>
-            <a:picLocks noChangeAspect="1"/>
-          </p:cNvPicPr>
-          <p:nvPr/>
-        </p:nvPicPr>
-        <p:blipFill>
-          <a:blip r:embed="rId7"/>
-          <a:stretch>
-            <a:fillRect/>
-          </a:stretch>
-        </p:blipFill>
-        <p:spPr>
-          <a:xfrm>
-            <a:off x="1655825" y="5240607"/>
-            <a:ext cx="95251" cy="95251"/>
-          </a:xfrm>
-          <a:prstGeom prst="rect">
-            <a:avLst/>
-          </a:prstGeom>
-        </p:spPr>
-      </p:pic>
-      <p:sp>
-        <p:nvSpPr>
-          <p:cNvPr id="51" name="Text 43"/>
-          <p:cNvSpPr/>
-          <p:nvPr/>
-        </p:nvSpPr>
-        <p:spPr>
-          <a:xfrm>
-            <a:off x="1808226" y="5214413"/>
-            <a:ext cx="787075" cy="133434"/>
-          </a:xfrm>
-          <a:prstGeom prst="rect">
-            <a:avLst/>
-          </a:prstGeom>
-          <a:noFill/>
-          <a:ln/>
-        </p:spPr>
-        <p:txBody>
-          <a:bodyPr wrap="none" lIns="0" tIns="0" rIns="0" bIns="0" rtlCol="0" anchor="t">
-            <a:spAutoFit/>
-          </a:bodyPr>
-          <a:lstStyle/>
-          <a:p>
-            <a:r>
-              <a:rPr lang="en-US" sz="867" dirty="0">
-                <a:solidFill>
-                  <a:srgbClr val="FFFFFF"/>
-                </a:solidFill>
-                <a:latin typeface="Space Grotesk" pitchFamily="34" charset="0"/>
-                <a:ea typeface="Space Grotesk" pitchFamily="34" charset="-122"/>
-                <a:cs typeface="Space Grotesk" pitchFamily="34" charset="-120"/>
-              </a:rPr>
-              <a:t>SQ: 대피소 지원</a:t>
-            </a:r>
-            <a:endParaRPr lang="en-US" sz="867" dirty="0"/>
-          </a:p>
-        </p:txBody>
-      </p:sp>
-      <p:sp>
-        <p:nvSpPr>
-          <p:cNvPr id="52" name="Shape 44"/>
-          <p:cNvSpPr/>
-          <p:nvPr/>
-        </p:nvSpPr>
-        <p:spPr>
-          <a:xfrm>
-            <a:off x="2768809" y="5147738"/>
-            <a:ext cx="1541899" cy="242888"/>
-          </a:xfrm>
-          <a:prstGeom prst="rect">
-            <a:avLst/>
-          </a:prstGeom>
-          <a:solidFill>
-            <a:srgbClr val="FFFFFF">
-              <a:alpha val="5000"/>
-            </a:srgbClr>
-          </a:solidFill>
-          <a:ln w="9144">
-            <a:solidFill>
-              <a:srgbClr val="00D1FF">
-                <a:alpha val="50000"/>
-              </a:srgbClr>
-            </a:solidFill>
-            <a:prstDash val="dash"/>
-          </a:ln>
-        </p:spPr>
-      </p:sp>
-      <p:pic>
-        <p:nvPicPr>
-          <p:cNvPr id="53" name="Image 6" descr="preencoded.png"/>
-          <p:cNvPicPr>
-            <a:picLocks noChangeAspect="1"/>
-          </p:cNvPicPr>
-          <p:nvPr/>
-        </p:nvPicPr>
-        <p:blipFill>
-          <a:blip r:embed="rId8"/>
-          <a:stretch>
-            <a:fillRect/>
-          </a:stretch>
-        </p:blipFill>
-        <p:spPr>
-          <a:xfrm>
-            <a:off x="2845008" y="5240607"/>
-            <a:ext cx="95251" cy="95251"/>
-          </a:xfrm>
-          <a:prstGeom prst="rect">
-            <a:avLst/>
-          </a:prstGeom>
-        </p:spPr>
-      </p:pic>
-      <p:sp>
-        <p:nvSpPr>
-          <p:cNvPr id="54" name="Text 45"/>
-          <p:cNvSpPr/>
-          <p:nvPr/>
-        </p:nvSpPr>
-        <p:spPr>
-          <a:xfrm>
-            <a:off x="2997408" y="5214413"/>
-            <a:ext cx="1256754" cy="133434"/>
-          </a:xfrm>
-          <a:prstGeom prst="rect">
-            <a:avLst/>
-          </a:prstGeom>
-          <a:noFill/>
-          <a:ln/>
-        </p:spPr>
-        <p:txBody>
-          <a:bodyPr wrap="none" lIns="0" tIns="0" rIns="0" bIns="0" rtlCol="0" anchor="t">
-            <a:spAutoFit/>
-          </a:bodyPr>
-          <a:lstStyle/>
-          <a:p>
-            <a:r>
-              <a:rPr lang="en-US" sz="867" dirty="0">
-                <a:solidFill>
-                  <a:srgbClr val="FFFFFF"/>
-                </a:solidFill>
-                <a:latin typeface="Space Grotesk" pitchFamily="34" charset="0"/>
-                <a:ea typeface="Space Grotesk" pitchFamily="34" charset="-122"/>
-                <a:cs typeface="Space Grotesk" pitchFamily="34" charset="-120"/>
-              </a:rPr>
-              <a:t>SQ: 잃어버린 강아지 찾기</a:t>
-            </a:r>
-            <a:endParaRPr lang="en-US" sz="867" dirty="0"/>
-          </a:p>
-        </p:txBody>
-      </p:sp>
-      <p:sp>
-        <p:nvSpPr>
-          <p:cNvPr id="55" name="Shape 46"/>
-          <p:cNvSpPr/>
-          <p:nvPr/>
-        </p:nvSpPr>
-        <p:spPr>
-          <a:xfrm>
-            <a:off x="4386907" y="5147738"/>
-            <a:ext cx="1337112" cy="242888"/>
-          </a:xfrm>
-          <a:prstGeom prst="rect">
-            <a:avLst/>
-          </a:prstGeom>
-          <a:solidFill>
-            <a:srgbClr val="FFFFFF">
-              <a:alpha val="5000"/>
-            </a:srgbClr>
-          </a:solidFill>
-          <a:ln w="9144">
-            <a:solidFill>
-              <a:srgbClr val="00D1FF">
-                <a:alpha val="50000"/>
-              </a:srgbClr>
-            </a:solidFill>
-            <a:prstDash val="dash"/>
-          </a:ln>
-        </p:spPr>
-      </p:sp>
-      <p:pic>
-        <p:nvPicPr>
-          <p:cNvPr id="56" name="Image 7" descr="preencoded.png"/>
-          <p:cNvPicPr>
-            <a:picLocks noChangeAspect="1"/>
-          </p:cNvPicPr>
-          <p:nvPr/>
-        </p:nvPicPr>
-        <p:blipFill>
-          <a:blip r:embed="rId9"/>
-          <a:stretch>
-            <a:fillRect/>
-          </a:stretch>
-        </p:blipFill>
-        <p:spPr>
-          <a:xfrm>
-            <a:off x="4463105" y="5231081"/>
-            <a:ext cx="95251" cy="95251"/>
-          </a:xfrm>
-          <a:prstGeom prst="rect">
-            <a:avLst/>
-          </a:prstGeom>
-        </p:spPr>
-      </p:pic>
-      <p:sp>
-        <p:nvSpPr>
-          <p:cNvPr id="57" name="Text 47"/>
-          <p:cNvSpPr/>
-          <p:nvPr/>
-        </p:nvSpPr>
-        <p:spPr>
-          <a:xfrm>
-            <a:off x="4615506" y="5204888"/>
-            <a:ext cx="1008289" cy="133434"/>
-          </a:xfrm>
-          <a:prstGeom prst="rect">
-            <a:avLst/>
-          </a:prstGeom>
-          <a:noFill/>
-          <a:ln/>
-        </p:spPr>
-        <p:txBody>
-          <a:bodyPr wrap="none" lIns="0" tIns="0" rIns="0" bIns="0" rtlCol="0" anchor="t">
-            <a:spAutoFit/>
-          </a:bodyPr>
-          <a:lstStyle/>
-          <a:p>
-            <a:r>
-              <a:rPr lang="en-US" sz="867" dirty="0">
-                <a:solidFill>
-                  <a:srgbClr val="FFFFFF"/>
-                </a:solidFill>
-                <a:latin typeface="Space Grotesk" pitchFamily="34" charset="0"/>
-                <a:ea typeface="Space Grotesk" pitchFamily="34" charset="-122"/>
-                <a:cs typeface="Space Grotesk" pitchFamily="34" charset="-120"/>
-              </a:rPr>
-              <a:t>SQ: 괴물 목격담 수집</a:t>
-            </a:r>
-            <a:endParaRPr lang="en-US" sz="867" dirty="0"/>
-          </a:p>
-        </p:txBody>
-      </p:sp>
-      <p:sp>
-        <p:nvSpPr>
-          <p:cNvPr id="58" name="Shape 48"/>
-          <p:cNvSpPr/>
-          <p:nvPr/>
-        </p:nvSpPr>
-        <p:spPr>
-          <a:xfrm>
-            <a:off x="627125" y="5613920"/>
-            <a:ext cx="762000" cy="609600"/>
-          </a:xfrm>
-          <a:prstGeom prst="rect">
-            <a:avLst/>
-          </a:prstGeom>
-          <a:solidFill>
-            <a:srgbClr val="001F3F"/>
-          </a:solidFill>
-          <a:ln w="18288">
-            <a:solidFill>
-              <a:srgbClr val="00D1FF"/>
-            </a:solidFill>
-            <a:prstDash val="solid"/>
-          </a:ln>
-        </p:spPr>
-      </p:sp>
-      <p:sp>
-        <p:nvSpPr>
-          <p:cNvPr id="60" name="Text 50"/>
-          <p:cNvSpPr/>
-          <p:nvPr/>
-        </p:nvSpPr>
-        <p:spPr>
-          <a:xfrm>
-            <a:off x="861552" y="5834187"/>
-            <a:ext cx="503633" cy="246221"/>
-          </a:xfrm>
-          <a:prstGeom prst="rect">
-            <a:avLst/>
-          </a:prstGeom>
-          <a:noFill/>
-          <a:ln/>
-        </p:spPr>
-        <p:txBody>
-          <a:bodyPr wrap="square" lIns="0" tIns="0" rIns="0" bIns="0" rtlCol="0" anchor="t">
-            <a:spAutoFit/>
-          </a:bodyPr>
-          <a:lstStyle/>
-          <a:p>
-            <a:r>
-              <a:rPr lang="en-US" sz="1600" b="1" smtClean="0">
-                <a:solidFill>
-                  <a:srgbClr val="00D1FF"/>
-                </a:solidFill>
-                <a:latin typeface="Space Grotesk Bold" pitchFamily="34" charset="0"/>
-                <a:ea typeface="Space Grotesk Bold" pitchFamily="34" charset="-122"/>
-                <a:cs typeface="Space Grotesk Bold" pitchFamily="34" charset="-120"/>
-              </a:rPr>
-              <a:t>04</a:t>
-            </a:r>
-            <a:endParaRPr lang="en-US" sz="1600" dirty="0"/>
-          </a:p>
-        </p:txBody>
-      </p:sp>
-      <p:sp>
-        <p:nvSpPr>
-          <p:cNvPr id="61" name="Shape 51"/>
-          <p:cNvSpPr/>
-          <p:nvPr/>
-        </p:nvSpPr>
-        <p:spPr>
-          <a:xfrm>
-            <a:off x="1579626" y="5699526"/>
-            <a:ext cx="4144393" cy="438151"/>
-          </a:xfrm>
-          <a:prstGeom prst="rect">
-            <a:avLst/>
-          </a:prstGeom>
-          <a:solidFill>
-            <a:srgbClr val="003366">
-              <a:alpha val="60000"/>
-            </a:srgbClr>
-          </a:solidFill>
-          <a:ln w="9144">
-            <a:solidFill>
-              <a:srgbClr val="00D1FF"/>
-            </a:solidFill>
-            <a:prstDash val="solid"/>
-          </a:ln>
-        </p:spPr>
-      </p:sp>
-      <p:sp>
-        <p:nvSpPr>
           <p:cNvPr id="62" name="Text 52"/>
           <p:cNvSpPr/>
           <p:nvPr/>
@@ -7855,15 +7848,13 @@
             <a:avLst/>
           </a:prstGeom>
           <a:solidFill>
-            <a:srgbClr val="FFFFFF">
-              <a:alpha val="5000"/>
+            <a:srgbClr val="4272D2">
+              <a:alpha val="50000"/>
             </a:srgbClr>
           </a:solidFill>
           <a:ln w="9144">
             <a:solidFill>
-              <a:srgbClr val="00D1FF">
-                <a:alpha val="50000"/>
-              </a:srgbClr>
+              <a:srgbClr val="00D1FF"/>
             </a:solidFill>
             <a:prstDash val="dash"/>
           </a:ln>
@@ -7946,15 +7937,13 @@
             <a:avLst/>
           </a:prstGeom>
           <a:solidFill>
-            <a:srgbClr val="FFFFFF">
-              <a:alpha val="5000"/>
+            <a:srgbClr val="4272D2">
+              <a:alpha val="50000"/>
             </a:srgbClr>
           </a:solidFill>
           <a:ln w="9144">
             <a:solidFill>
-              <a:srgbClr val="00D1FF">
-                <a:alpha val="50000"/>
-              </a:srgbClr>
+              <a:srgbClr val="00D1FF"/>
             </a:solidFill>
             <a:prstDash val="dash"/>
           </a:ln>
@@ -8813,6 +8802,349 @@
 </file>
 
 <file path=ppt/slides/slide12.xml><?xml version="1.0" encoding="utf-8"?>
+<p:sld xmlns:a="http://schemas.openxmlformats.org/drawingml/2006/main" xmlns:r="http://schemas.openxmlformats.org/officeDocument/2006/relationships" xmlns:p="http://schemas.openxmlformats.org/presentationml/2006/main">
+  <p:cSld>
+    <p:bg>
+      <p:bgPr>
+        <a:solidFill>
+          <a:srgbClr val="001F3E"/>
+        </a:solidFill>
+        <a:effectLst/>
+      </p:bgPr>
+    </p:bg>
+    <p:spTree>
+      <p:nvGrpSpPr>
+        <p:cNvPr id="1" name=""/>
+        <p:cNvGrpSpPr/>
+        <p:nvPr/>
+      </p:nvGrpSpPr>
+      <p:grpSpPr>
+        <a:xfrm>
+          <a:off x="0" y="0"/>
+          <a:ext cx="0" cy="0"/>
+          <a:chOff x="0" y="0"/>
+          <a:chExt cx="0" cy="0"/>
+        </a:xfrm>
+      </p:grpSpPr>
+      <p:sp>
+        <p:nvSpPr>
+          <p:cNvPr id="3" name="Text 3"/>
+          <p:cNvSpPr/>
+          <p:nvPr/>
+        </p:nvSpPr>
+        <p:spPr>
+          <a:xfrm>
+            <a:off x="933450" y="419101"/>
+            <a:ext cx="6841331" cy="430887"/>
+          </a:xfrm>
+          <a:prstGeom prst="rect">
+            <a:avLst/>
+          </a:prstGeom>
+          <a:noFill/>
+          <a:ln/>
+        </p:spPr>
+        <p:txBody>
+          <a:bodyPr wrap="square" lIns="0" tIns="0" rIns="0" bIns="0" rtlCol="0" anchor="t">
+            <a:spAutoFit/>
+          </a:bodyPr>
+          <a:lstStyle/>
+          <a:p>
+            <a:r>
+              <a:rPr lang="ko-KR" altLang="en-US" sz="2800" b="1" kern="0" spc="3" smtClean="0">
+                <a:solidFill>
+                  <a:srgbClr val="FFFFFF"/>
+                </a:solidFill>
+                <a:latin typeface="Space Grotesk Bold" pitchFamily="34" charset="0"/>
+                <a:ea typeface="Space Grotesk Bold" pitchFamily="34" charset="-122"/>
+                <a:cs typeface="Space Grotesk Bold" pitchFamily="34" charset="-120"/>
+              </a:rPr>
+              <a:t>동생 심부름</a:t>
+            </a:r>
+            <a:endParaRPr lang="en-US" sz="2800" dirty="0">
+              <a:solidFill>
+                <a:srgbClr val="FFFFFF"/>
+              </a:solidFill>
+            </a:endParaRPr>
+          </a:p>
+        </p:txBody>
+      </p:sp>
+      <p:sp>
+        <p:nvSpPr>
+          <p:cNvPr id="4" name="Shape 2"/>
+          <p:cNvSpPr/>
+          <p:nvPr/>
+        </p:nvSpPr>
+        <p:spPr>
+          <a:xfrm>
+            <a:off x="768350" y="987174"/>
+            <a:ext cx="10566400" cy="55425"/>
+          </a:xfrm>
+          <a:prstGeom prst="rect">
+            <a:avLst/>
+          </a:prstGeom>
+          <a:solidFill>
+            <a:srgbClr val="00D1FF"/>
+          </a:solidFill>
+          <a:ln/>
+        </p:spPr>
+      </p:sp>
+      <p:sp>
+        <p:nvSpPr>
+          <p:cNvPr id="6" name="TextBox 5"/>
+          <p:cNvSpPr txBox="1"/>
+          <p:nvPr/>
+        </p:nvSpPr>
+        <p:spPr>
+          <a:xfrm>
+            <a:off x="933450" y="1428750"/>
+            <a:ext cx="5753100" cy="369332"/>
+          </a:xfrm>
+          <a:prstGeom prst="rect">
+            <a:avLst/>
+          </a:prstGeom>
+          <a:noFill/>
+        </p:spPr>
+        <p:txBody>
+          <a:bodyPr wrap="square" rtlCol="0">
+            <a:spAutoFit/>
+          </a:bodyPr>
+          <a:lstStyle/>
+          <a:p>
+            <a:r>
+              <a:rPr lang="en-US" altLang="ko-KR" smtClean="0">
+                <a:solidFill>
+                  <a:schemeClr val="bg1"/>
+                </a:solidFill>
+              </a:rPr>
+              <a:t>“ </a:t>
+            </a:r>
+            <a:r>
+              <a:rPr lang="ko-KR" altLang="en-US" smtClean="0">
+                <a:solidFill>
+                  <a:schemeClr val="bg1"/>
+                </a:solidFill>
+              </a:rPr>
+              <a:t>도심 맵을 자연스럽게 익히는 튜토리얼형 퀘스트 </a:t>
+            </a:r>
+            <a:r>
+              <a:rPr lang="en-US" altLang="ko-KR" smtClean="0">
+                <a:solidFill>
+                  <a:schemeClr val="bg1"/>
+                </a:solidFill>
+              </a:rPr>
+              <a:t>“</a:t>
+            </a:r>
+            <a:endParaRPr lang="ko-KR" altLang="en-US">
+              <a:solidFill>
+                <a:schemeClr val="bg1"/>
+              </a:solidFill>
+            </a:endParaRPr>
+          </a:p>
+        </p:txBody>
+      </p:sp>
+      <p:graphicFrame>
+        <p:nvGraphicFramePr>
+          <p:cNvPr id="8" name="표 7"/>
+          <p:cNvGraphicFramePr>
+            <a:graphicFrameLocks noGrp="1"/>
+          </p:cNvGraphicFramePr>
+          <p:nvPr>
+            <p:extLst>
+              <p:ext uri="{D42A27DB-BD31-4B8C-83A1-F6EECF244321}">
+                <p14:modId xmlns:p14="http://schemas.microsoft.com/office/powerpoint/2010/main" val="2539918687"/>
+              </p:ext>
+            </p:extLst>
+          </p:nvPr>
+        </p:nvGraphicFramePr>
+        <p:xfrm>
+          <a:off x="933450" y="2338916"/>
+          <a:ext cx="9874250" cy="3128435"/>
+        </p:xfrm>
+        <a:graphic>
+          <a:graphicData uri="http://schemas.openxmlformats.org/drawingml/2006/table">
+            <a:tbl>
+              <a:tblPr firstRow="1" bandRow="1">
+                <a:tableStyleId>{8799B23B-EC83-4686-B30A-512413B5E67A}</a:tableStyleId>
+              </a:tblPr>
+              <a:tblGrid>
+                <a:gridCol w="4937125">
+                  <a:extLst>
+                    <a:ext uri="{9D8B030D-6E8A-4147-A177-3AD203B41FA5}">
+                      <a16:colId xmlns:a16="http://schemas.microsoft.com/office/drawing/2014/main" val="3931637329"/>
+                    </a:ext>
+                  </a:extLst>
+                </a:gridCol>
+                <a:gridCol w="4937125">
+                  <a:extLst>
+                    <a:ext uri="{9D8B030D-6E8A-4147-A177-3AD203B41FA5}">
+                      <a16:colId xmlns:a16="http://schemas.microsoft.com/office/drawing/2014/main" val="3109178761"/>
+                    </a:ext>
+                  </a:extLst>
+                </a:gridCol>
+              </a:tblGrid>
+              <a:tr h="625687">
+                <a:tc>
+                  <a:txBody>
+                    <a:bodyPr/>
+                    <a:lstStyle/>
+                    <a:p>
+                      <a:pPr latinLnBrk="1"/>
+                      <a:endParaRPr lang="ko-KR" altLang="en-US"/>
+                    </a:p>
+                  </a:txBody>
+                  <a:tcPr anchor="ctr"/>
+                </a:tc>
+                <a:tc>
+                  <a:txBody>
+                    <a:bodyPr/>
+                    <a:lstStyle/>
+                    <a:p>
+                      <a:pPr latinLnBrk="1"/>
+                      <a:endParaRPr lang="ko-KR" altLang="en-US"/>
+                    </a:p>
+                  </a:txBody>
+                  <a:tcPr anchor="ctr"/>
+                </a:tc>
+                <a:extLst>
+                  <a:ext uri="{0D108BD9-81ED-4DB2-BD59-A6C34878D82A}">
+                    <a16:rowId xmlns:a16="http://schemas.microsoft.com/office/drawing/2014/main" val="1659863383"/>
+                  </a:ext>
+                </a:extLst>
+              </a:tr>
+              <a:tr h="625687">
+                <a:tc>
+                  <a:txBody>
+                    <a:bodyPr/>
+                    <a:lstStyle/>
+                    <a:p>
+                      <a:pPr latinLnBrk="1"/>
+                      <a:endParaRPr lang="ko-KR" altLang="en-US"/>
+                    </a:p>
+                  </a:txBody>
+                  <a:tcPr anchor="ctr"/>
+                </a:tc>
+                <a:tc>
+                  <a:txBody>
+                    <a:bodyPr/>
+                    <a:lstStyle/>
+                    <a:p>
+                      <a:pPr latinLnBrk="1"/>
+                      <a:endParaRPr lang="ko-KR" altLang="en-US"/>
+                    </a:p>
+                  </a:txBody>
+                  <a:tcPr anchor="ctr"/>
+                </a:tc>
+                <a:extLst>
+                  <a:ext uri="{0D108BD9-81ED-4DB2-BD59-A6C34878D82A}">
+                    <a16:rowId xmlns:a16="http://schemas.microsoft.com/office/drawing/2014/main" val="1775241057"/>
+                  </a:ext>
+                </a:extLst>
+              </a:tr>
+              <a:tr h="625687">
+                <a:tc>
+                  <a:txBody>
+                    <a:bodyPr/>
+                    <a:lstStyle/>
+                    <a:p>
+                      <a:pPr latinLnBrk="1"/>
+                      <a:endParaRPr lang="ko-KR" altLang="en-US"/>
+                    </a:p>
+                  </a:txBody>
+                  <a:tcPr anchor="ctr"/>
+                </a:tc>
+                <a:tc>
+                  <a:txBody>
+                    <a:bodyPr/>
+                    <a:lstStyle/>
+                    <a:p>
+                      <a:pPr latinLnBrk="1"/>
+                      <a:endParaRPr lang="ko-KR" altLang="en-US"/>
+                    </a:p>
+                  </a:txBody>
+                  <a:tcPr anchor="ctr"/>
+                </a:tc>
+                <a:extLst>
+                  <a:ext uri="{0D108BD9-81ED-4DB2-BD59-A6C34878D82A}">
+                    <a16:rowId xmlns:a16="http://schemas.microsoft.com/office/drawing/2014/main" val="2319098091"/>
+                  </a:ext>
+                </a:extLst>
+              </a:tr>
+              <a:tr h="625687">
+                <a:tc>
+                  <a:txBody>
+                    <a:bodyPr/>
+                    <a:lstStyle/>
+                    <a:p>
+                      <a:pPr latinLnBrk="1"/>
+                      <a:endParaRPr lang="ko-KR" altLang="en-US"/>
+                    </a:p>
+                  </a:txBody>
+                  <a:tcPr anchor="ctr"/>
+                </a:tc>
+                <a:tc>
+                  <a:txBody>
+                    <a:bodyPr/>
+                    <a:lstStyle/>
+                    <a:p>
+                      <a:pPr latinLnBrk="1"/>
+                      <a:endParaRPr lang="ko-KR" altLang="en-US"/>
+                    </a:p>
+                  </a:txBody>
+                  <a:tcPr anchor="ctr"/>
+                </a:tc>
+                <a:extLst>
+                  <a:ext uri="{0D108BD9-81ED-4DB2-BD59-A6C34878D82A}">
+                    <a16:rowId xmlns:a16="http://schemas.microsoft.com/office/drawing/2014/main" val="1853705115"/>
+                  </a:ext>
+                </a:extLst>
+              </a:tr>
+              <a:tr h="625687">
+                <a:tc>
+                  <a:txBody>
+                    <a:bodyPr/>
+                    <a:lstStyle/>
+                    <a:p>
+                      <a:pPr latinLnBrk="1"/>
+                      <a:endParaRPr lang="ko-KR" altLang="en-US"/>
+                    </a:p>
+                  </a:txBody>
+                  <a:tcPr anchor="ctr"/>
+                </a:tc>
+                <a:tc>
+                  <a:txBody>
+                    <a:bodyPr/>
+                    <a:lstStyle/>
+                    <a:p>
+                      <a:pPr latinLnBrk="1"/>
+                      <a:endParaRPr lang="ko-KR" altLang="en-US"/>
+                    </a:p>
+                  </a:txBody>
+                  <a:tcPr anchor="ctr"/>
+                </a:tc>
+                <a:extLst>
+                  <a:ext uri="{0D108BD9-81ED-4DB2-BD59-A6C34878D82A}">
+                    <a16:rowId xmlns:a16="http://schemas.microsoft.com/office/drawing/2014/main" val="3022926343"/>
+                  </a:ext>
+                </a:extLst>
+              </a:tr>
+            </a:tbl>
+          </a:graphicData>
+        </a:graphic>
+      </p:graphicFrame>
+    </p:spTree>
+    <p:extLst>
+      <p:ext uri="{BB962C8B-B14F-4D97-AF65-F5344CB8AC3E}">
+        <p14:creationId xmlns:p14="http://schemas.microsoft.com/office/powerpoint/2010/main" val="528799986"/>
+      </p:ext>
+    </p:extLst>
+  </p:cSld>
+  <p:clrMapOvr>
+    <a:masterClrMapping/>
+  </p:clrMapOvr>
+</p:sld>
+</file>
+
+<file path=ppt/slides/slide13.xml><?xml version="1.0" encoding="utf-8"?>
 <p:sld xmlns:a="http://schemas.openxmlformats.org/drawingml/2006/main" xmlns:r="http://schemas.openxmlformats.org/officeDocument/2006/relationships" xmlns:p="http://schemas.openxmlformats.org/presentationml/2006/main">
   <p:cSld>
     <p:bg>
